--- a/lv_readings/images/lv_scaling.pptx
+++ b/lv_readings/images/lv_scaling.pptx
@@ -8,6 +8,8 @@
     <p:sldId id="258" r:id="rId2"/>
     <p:sldId id="259" r:id="rId3"/>
     <p:sldId id="260" r:id="rId4"/>
+    <p:sldId id="261" r:id="rId5"/>
+    <p:sldId id="262" r:id="rId6"/>
   </p:sldIdLst>
   <p:sldSz cx="12192000" cy="6858000"/>
   <p:notesSz cx="6858000" cy="9144000"/>
@@ -263,7 +265,7 @@
           <a:p>
             <a:fld id="{6487BBF2-5813-4A92-ADF4-45C081C37504}" type="datetimeFigureOut">
               <a:rPr lang="en-GB" smtClean="0"/>
-              <a:t>02/09/2025</a:t>
+              <a:t>06/11/2025</a:t>
             </a:fld>
             <a:endParaRPr lang="en-GB"/>
           </a:p>
@@ -463,7 +465,7 @@
           <a:p>
             <a:fld id="{6487BBF2-5813-4A92-ADF4-45C081C37504}" type="datetimeFigureOut">
               <a:rPr lang="en-GB" smtClean="0"/>
-              <a:t>02/09/2025</a:t>
+              <a:t>06/11/2025</a:t>
             </a:fld>
             <a:endParaRPr lang="en-GB"/>
           </a:p>
@@ -673,7 +675,7 @@
           <a:p>
             <a:fld id="{6487BBF2-5813-4A92-ADF4-45C081C37504}" type="datetimeFigureOut">
               <a:rPr lang="en-GB" smtClean="0"/>
-              <a:t>02/09/2025</a:t>
+              <a:t>06/11/2025</a:t>
             </a:fld>
             <a:endParaRPr lang="en-GB"/>
           </a:p>
@@ -873,7 +875,7 @@
           <a:p>
             <a:fld id="{6487BBF2-5813-4A92-ADF4-45C081C37504}" type="datetimeFigureOut">
               <a:rPr lang="en-GB" smtClean="0"/>
-              <a:t>02/09/2025</a:t>
+              <a:t>06/11/2025</a:t>
             </a:fld>
             <a:endParaRPr lang="en-GB"/>
           </a:p>
@@ -1149,7 +1151,7 @@
           <a:p>
             <a:fld id="{6487BBF2-5813-4A92-ADF4-45C081C37504}" type="datetimeFigureOut">
               <a:rPr lang="en-GB" smtClean="0"/>
-              <a:t>02/09/2025</a:t>
+              <a:t>06/11/2025</a:t>
             </a:fld>
             <a:endParaRPr lang="en-GB"/>
           </a:p>
@@ -1417,7 +1419,7 @@
           <a:p>
             <a:fld id="{6487BBF2-5813-4A92-ADF4-45C081C37504}" type="datetimeFigureOut">
               <a:rPr lang="en-GB" smtClean="0"/>
-              <a:t>02/09/2025</a:t>
+              <a:t>06/11/2025</a:t>
             </a:fld>
             <a:endParaRPr lang="en-GB"/>
           </a:p>
@@ -1832,7 +1834,7 @@
           <a:p>
             <a:fld id="{6487BBF2-5813-4A92-ADF4-45C081C37504}" type="datetimeFigureOut">
               <a:rPr lang="en-GB" smtClean="0"/>
-              <a:t>02/09/2025</a:t>
+              <a:t>06/11/2025</a:t>
             </a:fld>
             <a:endParaRPr lang="en-GB"/>
           </a:p>
@@ -1974,7 +1976,7 @@
           <a:p>
             <a:fld id="{6487BBF2-5813-4A92-ADF4-45C081C37504}" type="datetimeFigureOut">
               <a:rPr lang="en-GB" smtClean="0"/>
-              <a:t>02/09/2025</a:t>
+              <a:t>06/11/2025</a:t>
             </a:fld>
             <a:endParaRPr lang="en-GB"/>
           </a:p>
@@ -2087,7 +2089,7 @@
           <a:p>
             <a:fld id="{6487BBF2-5813-4A92-ADF4-45C081C37504}" type="datetimeFigureOut">
               <a:rPr lang="en-GB" smtClean="0"/>
-              <a:t>02/09/2025</a:t>
+              <a:t>06/11/2025</a:t>
             </a:fld>
             <a:endParaRPr lang="en-GB"/>
           </a:p>
@@ -2400,7 +2402,7 @@
           <a:p>
             <a:fld id="{6487BBF2-5813-4A92-ADF4-45C081C37504}" type="datetimeFigureOut">
               <a:rPr lang="en-GB" smtClean="0"/>
-              <a:t>02/09/2025</a:t>
+              <a:t>06/11/2025</a:t>
             </a:fld>
             <a:endParaRPr lang="en-GB"/>
           </a:p>
@@ -2689,7 +2691,7 @@
           <a:p>
             <a:fld id="{6487BBF2-5813-4A92-ADF4-45C081C37504}" type="datetimeFigureOut">
               <a:rPr lang="en-GB" smtClean="0"/>
-              <a:t>02/09/2025</a:t>
+              <a:t>06/11/2025</a:t>
             </a:fld>
             <a:endParaRPr lang="en-GB"/>
           </a:p>
@@ -2932,7 +2934,7 @@
           <a:p>
             <a:fld id="{6487BBF2-5813-4A92-ADF4-45C081C37504}" type="datetimeFigureOut">
               <a:rPr lang="en-GB" smtClean="0"/>
-              <a:t>02/09/2025</a:t>
+              <a:t>06/11/2025</a:t>
             </a:fld>
             <a:endParaRPr lang="en-GB"/>
           </a:p>
@@ -14272,6 +14274,6815 @@
 </p:sld>
 </file>
 
+<file path=ppt/slides/slide4.xml><?xml version="1.0" encoding="utf-8"?>
+<p:sld xmlns:a="http://schemas.openxmlformats.org/drawingml/2006/main" xmlns:r="http://schemas.openxmlformats.org/officeDocument/2006/relationships" xmlns:p="http://schemas.openxmlformats.org/presentationml/2006/main">
+  <p:cSld>
+    <p:spTree>
+      <p:nvGrpSpPr>
+        <p:cNvPr id="1" name=""/>
+        <p:cNvGrpSpPr/>
+        <p:nvPr/>
+      </p:nvGrpSpPr>
+      <p:grpSpPr>
+        <a:xfrm>
+          <a:off x="0" y="0"/>
+          <a:ext cx="0" cy="0"/>
+          <a:chOff x="0" y="0"/>
+          <a:chExt cx="0" cy="0"/>
+        </a:xfrm>
+      </p:grpSpPr>
+      <p:sp>
+        <p:nvSpPr>
+          <p:cNvPr id="43" name="Arc 42">
+            <a:extLst>
+              <a:ext uri="{FF2B5EF4-FFF2-40B4-BE49-F238E27FC236}">
+                <a16:creationId xmlns:a16="http://schemas.microsoft.com/office/drawing/2014/main" id="{5DBC26E4-E697-94FA-95DC-B23CA770A084}"/>
+              </a:ext>
+            </a:extLst>
+          </p:cNvPr>
+          <p:cNvSpPr/>
+          <p:nvPr/>
+        </p:nvSpPr>
+        <p:spPr>
+          <a:xfrm rot="1003916">
+            <a:off x="5364436" y="5451080"/>
+            <a:ext cx="485858" cy="468622"/>
+          </a:xfrm>
+          <a:prstGeom prst="arc">
+            <a:avLst>
+              <a:gd name="adj1" fmla="val 16200000"/>
+              <a:gd name="adj2" fmla="val 13932934"/>
+            </a:avLst>
+          </a:prstGeom>
+          <a:noFill/>
+          <a:ln w="28575">
+            <a:solidFill>
+              <a:schemeClr val="tx1"/>
+            </a:solidFill>
+            <a:headEnd type="triangle" w="lg" len="lg"/>
+            <a:tailEnd type="triangle" w="lg" len="lg"/>
+          </a:ln>
+        </p:spPr>
+        <p:style>
+          <a:lnRef idx="1">
+            <a:schemeClr val="accent1"/>
+          </a:lnRef>
+          <a:fillRef idx="0">
+            <a:schemeClr val="accent1"/>
+          </a:fillRef>
+          <a:effectRef idx="0">
+            <a:schemeClr val="accent1"/>
+          </a:effectRef>
+          <a:fontRef idx="minor">
+            <a:schemeClr val="tx1"/>
+          </a:fontRef>
+        </p:style>
+        <p:txBody>
+          <a:bodyPr rtlCol="0" anchor="ctr"/>
+          <a:lstStyle/>
+          <a:p>
+            <a:pPr algn="ctr"/>
+            <a:endParaRPr lang="en-GB" sz="3200" dirty="0"/>
+          </a:p>
+        </p:txBody>
+      </p:sp>
+      <p:sp>
+        <p:nvSpPr>
+          <p:cNvPr id="44" name="Rectangle 43">
+            <a:extLst>
+              <a:ext uri="{FF2B5EF4-FFF2-40B4-BE49-F238E27FC236}">
+                <a16:creationId xmlns:a16="http://schemas.microsoft.com/office/drawing/2014/main" id="{2C88686F-6AF5-3BC2-4022-7199E565DE22}"/>
+              </a:ext>
+            </a:extLst>
+          </p:cNvPr>
+          <p:cNvSpPr/>
+          <p:nvPr/>
+        </p:nvSpPr>
+        <p:spPr>
+          <a:xfrm>
+            <a:off x="5246418" y="3617941"/>
+            <a:ext cx="721895" cy="705852"/>
+          </a:xfrm>
+          <a:prstGeom prst="rect">
+            <a:avLst/>
+          </a:prstGeom>
+          <a:noFill/>
+          <a:ln>
+            <a:solidFill>
+              <a:schemeClr val="tx1"/>
+            </a:solidFill>
+          </a:ln>
+        </p:spPr>
+        <p:style>
+          <a:lnRef idx="2">
+            <a:schemeClr val="accent1">
+              <a:shade val="50000"/>
+            </a:schemeClr>
+          </a:lnRef>
+          <a:fillRef idx="1">
+            <a:schemeClr val="accent1"/>
+          </a:fillRef>
+          <a:effectRef idx="0">
+            <a:schemeClr val="accent1"/>
+          </a:effectRef>
+          <a:fontRef idx="minor">
+            <a:schemeClr val="lt1"/>
+          </a:fontRef>
+        </p:style>
+        <p:txBody>
+          <a:bodyPr rtlCol="0" anchor="ctr"/>
+          <a:lstStyle/>
+          <a:p>
+            <a:pPr algn="ctr"/>
+            <a:r>
+              <a:rPr lang="en-GB" sz="3200" dirty="0">
+                <a:solidFill>
+                  <a:schemeClr val="tx1"/>
+                </a:solidFill>
+              </a:rPr>
+              <a:t>Y1</a:t>
+            </a:r>
+          </a:p>
+        </p:txBody>
+      </p:sp>
+      <p:sp>
+        <p:nvSpPr>
+          <p:cNvPr id="45" name="Rectangle 44">
+            <a:extLst>
+              <a:ext uri="{FF2B5EF4-FFF2-40B4-BE49-F238E27FC236}">
+                <a16:creationId xmlns:a16="http://schemas.microsoft.com/office/drawing/2014/main" id="{62022AD9-3402-ED63-DB37-BB629065CD68}"/>
+              </a:ext>
+            </a:extLst>
+          </p:cNvPr>
+          <p:cNvSpPr/>
+          <p:nvPr/>
+        </p:nvSpPr>
+        <p:spPr>
+          <a:xfrm>
+            <a:off x="6769740" y="3617941"/>
+            <a:ext cx="721895" cy="705852"/>
+          </a:xfrm>
+          <a:prstGeom prst="rect">
+            <a:avLst/>
+          </a:prstGeom>
+          <a:noFill/>
+          <a:ln>
+            <a:solidFill>
+              <a:schemeClr val="tx1"/>
+            </a:solidFill>
+          </a:ln>
+        </p:spPr>
+        <p:style>
+          <a:lnRef idx="2">
+            <a:schemeClr val="accent1">
+              <a:shade val="50000"/>
+            </a:schemeClr>
+          </a:lnRef>
+          <a:fillRef idx="1">
+            <a:schemeClr val="accent1"/>
+          </a:fillRef>
+          <a:effectRef idx="0">
+            <a:schemeClr val="accent1"/>
+          </a:effectRef>
+          <a:fontRef idx="minor">
+            <a:schemeClr val="lt1"/>
+          </a:fontRef>
+        </p:style>
+        <p:txBody>
+          <a:bodyPr rtlCol="0" anchor="ctr"/>
+          <a:lstStyle/>
+          <a:p>
+            <a:pPr algn="ctr"/>
+            <a:r>
+              <a:rPr lang="en-GB" sz="3200" dirty="0">
+                <a:solidFill>
+                  <a:schemeClr val="tx1"/>
+                </a:solidFill>
+              </a:rPr>
+              <a:t>Y2</a:t>
+            </a:r>
+          </a:p>
+        </p:txBody>
+      </p:sp>
+      <p:sp>
+        <p:nvSpPr>
+          <p:cNvPr id="46" name="TextBox 45">
+            <a:extLst>
+              <a:ext uri="{FF2B5EF4-FFF2-40B4-BE49-F238E27FC236}">
+                <a16:creationId xmlns:a16="http://schemas.microsoft.com/office/drawing/2014/main" id="{1D5F55CC-90E7-781F-65BB-1460FB6A6D83}"/>
+              </a:ext>
+            </a:extLst>
+          </p:cNvPr>
+          <p:cNvSpPr txBox="1"/>
+          <p:nvPr/>
+        </p:nvSpPr>
+        <p:spPr>
+          <a:xfrm>
+            <a:off x="5527420" y="449679"/>
+            <a:ext cx="4096838" cy="954107"/>
+          </a:xfrm>
+          <a:prstGeom prst="rect">
+            <a:avLst/>
+          </a:prstGeom>
+          <a:noFill/>
+        </p:spPr>
+        <p:txBody>
+          <a:bodyPr wrap="square" rtlCol="0">
+            <a:spAutoFit/>
+          </a:bodyPr>
+          <a:lstStyle/>
+          <a:p>
+            <a:r>
+              <a:rPr lang="en-GB" sz="2800" dirty="0"/>
+              <a:t>Theoretical Model					</a:t>
+            </a:r>
+          </a:p>
+        </p:txBody>
+      </p:sp>
+      <p:sp>
+        <p:nvSpPr>
+          <p:cNvPr id="47" name="Rectangle 46">
+            <a:extLst>
+              <a:ext uri="{FF2B5EF4-FFF2-40B4-BE49-F238E27FC236}">
+                <a16:creationId xmlns:a16="http://schemas.microsoft.com/office/drawing/2014/main" id="{7A52CE28-F37D-61DA-D827-91EADE93B05A}"/>
+              </a:ext>
+            </a:extLst>
+          </p:cNvPr>
+          <p:cNvSpPr/>
+          <p:nvPr/>
+        </p:nvSpPr>
+        <p:spPr>
+          <a:xfrm>
+            <a:off x="8314946" y="3617941"/>
+            <a:ext cx="721895" cy="705852"/>
+          </a:xfrm>
+          <a:prstGeom prst="rect">
+            <a:avLst/>
+          </a:prstGeom>
+          <a:noFill/>
+          <a:ln>
+            <a:solidFill>
+              <a:schemeClr val="tx1"/>
+            </a:solidFill>
+          </a:ln>
+        </p:spPr>
+        <p:style>
+          <a:lnRef idx="2">
+            <a:schemeClr val="accent1">
+              <a:shade val="50000"/>
+            </a:schemeClr>
+          </a:lnRef>
+          <a:fillRef idx="1">
+            <a:schemeClr val="accent1"/>
+          </a:fillRef>
+          <a:effectRef idx="0">
+            <a:schemeClr val="accent1"/>
+          </a:effectRef>
+          <a:fontRef idx="minor">
+            <a:schemeClr val="lt1"/>
+          </a:fontRef>
+        </p:style>
+        <p:txBody>
+          <a:bodyPr rtlCol="0" anchor="ctr"/>
+          <a:lstStyle/>
+          <a:p>
+            <a:pPr algn="ctr"/>
+            <a:r>
+              <a:rPr lang="en-GB" sz="3200" dirty="0">
+                <a:solidFill>
+                  <a:schemeClr val="tx1"/>
+                </a:solidFill>
+              </a:rPr>
+              <a:t>Y3</a:t>
+            </a:r>
+          </a:p>
+        </p:txBody>
+      </p:sp>
+      <p:sp>
+        <p:nvSpPr>
+          <p:cNvPr id="48" name="Rectangle 47">
+            <a:extLst>
+              <a:ext uri="{FF2B5EF4-FFF2-40B4-BE49-F238E27FC236}">
+                <a16:creationId xmlns:a16="http://schemas.microsoft.com/office/drawing/2014/main" id="{844D2FAB-7303-D040-2D43-D63CE2BEC927}"/>
+              </a:ext>
+            </a:extLst>
+          </p:cNvPr>
+          <p:cNvSpPr/>
+          <p:nvPr/>
+        </p:nvSpPr>
+        <p:spPr>
+          <a:xfrm>
+            <a:off x="9795572" y="3617941"/>
+            <a:ext cx="721895" cy="705852"/>
+          </a:xfrm>
+          <a:prstGeom prst="rect">
+            <a:avLst/>
+          </a:prstGeom>
+          <a:noFill/>
+          <a:ln>
+            <a:solidFill>
+              <a:schemeClr val="tx1"/>
+            </a:solidFill>
+          </a:ln>
+        </p:spPr>
+        <p:style>
+          <a:lnRef idx="2">
+            <a:schemeClr val="accent1">
+              <a:shade val="50000"/>
+            </a:schemeClr>
+          </a:lnRef>
+          <a:fillRef idx="1">
+            <a:schemeClr val="accent1"/>
+          </a:fillRef>
+          <a:effectRef idx="0">
+            <a:schemeClr val="accent1"/>
+          </a:effectRef>
+          <a:fontRef idx="minor">
+            <a:schemeClr val="lt1"/>
+          </a:fontRef>
+        </p:style>
+        <p:txBody>
+          <a:bodyPr rtlCol="0" anchor="ctr"/>
+          <a:lstStyle/>
+          <a:p>
+            <a:pPr algn="ctr"/>
+            <a:r>
+              <a:rPr lang="en-GB" sz="3200" dirty="0">
+                <a:solidFill>
+                  <a:schemeClr val="tx1"/>
+                </a:solidFill>
+              </a:rPr>
+              <a:t>Y4</a:t>
+            </a:r>
+          </a:p>
+        </p:txBody>
+      </p:sp>
+      <p:sp>
+        <p:nvSpPr>
+          <p:cNvPr id="49" name="Oval 48">
+            <a:extLst>
+              <a:ext uri="{FF2B5EF4-FFF2-40B4-BE49-F238E27FC236}">
+                <a16:creationId xmlns:a16="http://schemas.microsoft.com/office/drawing/2014/main" id="{9E20C140-4DA9-B9E0-C31A-D23D206C30CF}"/>
+              </a:ext>
+            </a:extLst>
+          </p:cNvPr>
+          <p:cNvSpPr/>
+          <p:nvPr/>
+        </p:nvSpPr>
+        <p:spPr>
+          <a:xfrm>
+            <a:off x="7329418" y="1639539"/>
+            <a:ext cx="1173653" cy="883798"/>
+          </a:xfrm>
+          <a:prstGeom prst="ellipse">
+            <a:avLst/>
+          </a:prstGeom>
+          <a:solidFill>
+            <a:schemeClr val="bg1"/>
+          </a:solidFill>
+          <a:ln>
+            <a:solidFill>
+              <a:schemeClr val="tx1"/>
+            </a:solidFill>
+          </a:ln>
+        </p:spPr>
+        <p:style>
+          <a:lnRef idx="2">
+            <a:schemeClr val="accent1">
+              <a:shade val="50000"/>
+            </a:schemeClr>
+          </a:lnRef>
+          <a:fillRef idx="1">
+            <a:schemeClr val="accent1"/>
+          </a:fillRef>
+          <a:effectRef idx="0">
+            <a:schemeClr val="accent1"/>
+          </a:effectRef>
+          <a:fontRef idx="minor">
+            <a:schemeClr val="lt1"/>
+          </a:fontRef>
+        </p:style>
+        <p:txBody>
+          <a:bodyPr rtlCol="0" anchor="ctr"/>
+          <a:lstStyle/>
+          <a:p>
+            <a:pPr algn="ctr"/>
+            <a:r>
+              <a:rPr lang="en-GB" sz="3200" dirty="0">
+                <a:solidFill>
+                  <a:schemeClr val="tx1"/>
+                </a:solidFill>
+              </a:rPr>
+              <a:t>F</a:t>
+            </a:r>
+          </a:p>
+        </p:txBody>
+      </p:sp>
+      <p:cxnSp>
+        <p:nvCxnSpPr>
+          <p:cNvPr id="50" name="Straight Arrow Connector 49">
+            <a:extLst>
+              <a:ext uri="{FF2B5EF4-FFF2-40B4-BE49-F238E27FC236}">
+                <a16:creationId xmlns:a16="http://schemas.microsoft.com/office/drawing/2014/main" id="{BB97FA2A-9A0E-F31B-FBD8-1B688997EBEB}"/>
+              </a:ext>
+            </a:extLst>
+          </p:cNvPr>
+          <p:cNvCxnSpPr>
+            <a:stCxn id="49" idx="4"/>
+            <a:endCxn id="44" idx="0"/>
+          </p:cNvCxnSpPr>
+          <p:nvPr/>
+        </p:nvCxnSpPr>
+        <p:spPr>
+          <a:xfrm flipH="1">
+            <a:off x="5607366" y="2523337"/>
+            <a:ext cx="2308879" cy="1094604"/>
+          </a:xfrm>
+          <a:prstGeom prst="straightConnector1">
+            <a:avLst/>
+          </a:prstGeom>
+          <a:ln w="38100">
+            <a:solidFill>
+              <a:schemeClr val="tx1"/>
+            </a:solidFill>
+            <a:headEnd w="lg" len="lg"/>
+            <a:tailEnd type="triangle" w="lg" len="lg"/>
+          </a:ln>
+        </p:spPr>
+        <p:style>
+          <a:lnRef idx="1">
+            <a:schemeClr val="accent1"/>
+          </a:lnRef>
+          <a:fillRef idx="0">
+            <a:schemeClr val="accent1"/>
+          </a:fillRef>
+          <a:effectRef idx="0">
+            <a:schemeClr val="accent1"/>
+          </a:effectRef>
+          <a:fontRef idx="minor">
+            <a:schemeClr val="tx1"/>
+          </a:fontRef>
+        </p:style>
+      </p:cxnSp>
+      <p:cxnSp>
+        <p:nvCxnSpPr>
+          <p:cNvPr id="51" name="Straight Arrow Connector 50">
+            <a:extLst>
+              <a:ext uri="{FF2B5EF4-FFF2-40B4-BE49-F238E27FC236}">
+                <a16:creationId xmlns:a16="http://schemas.microsoft.com/office/drawing/2014/main" id="{10846AB3-CEBD-3002-34A0-11C50FC885D9}"/>
+              </a:ext>
+            </a:extLst>
+          </p:cNvPr>
+          <p:cNvCxnSpPr>
+            <a:stCxn id="49" idx="4"/>
+            <a:endCxn id="45" idx="0"/>
+          </p:cNvCxnSpPr>
+          <p:nvPr/>
+        </p:nvCxnSpPr>
+        <p:spPr>
+          <a:xfrm flipH="1">
+            <a:off x="7130688" y="2523337"/>
+            <a:ext cx="785557" cy="1094604"/>
+          </a:xfrm>
+          <a:prstGeom prst="straightConnector1">
+            <a:avLst/>
+          </a:prstGeom>
+          <a:ln w="38100">
+            <a:solidFill>
+              <a:schemeClr val="tx1"/>
+            </a:solidFill>
+            <a:headEnd w="lg" len="lg"/>
+            <a:tailEnd type="triangle" w="lg" len="lg"/>
+          </a:ln>
+        </p:spPr>
+        <p:style>
+          <a:lnRef idx="1">
+            <a:schemeClr val="accent1"/>
+          </a:lnRef>
+          <a:fillRef idx="0">
+            <a:schemeClr val="accent1"/>
+          </a:fillRef>
+          <a:effectRef idx="0">
+            <a:schemeClr val="accent1"/>
+          </a:effectRef>
+          <a:fontRef idx="minor">
+            <a:schemeClr val="tx1"/>
+          </a:fontRef>
+        </p:style>
+      </p:cxnSp>
+      <p:cxnSp>
+        <p:nvCxnSpPr>
+          <p:cNvPr id="52" name="Straight Arrow Connector 51">
+            <a:extLst>
+              <a:ext uri="{FF2B5EF4-FFF2-40B4-BE49-F238E27FC236}">
+                <a16:creationId xmlns:a16="http://schemas.microsoft.com/office/drawing/2014/main" id="{6B244552-0D66-7335-719D-2D09FAA28933}"/>
+              </a:ext>
+            </a:extLst>
+          </p:cNvPr>
+          <p:cNvCxnSpPr>
+            <a:stCxn id="49" idx="4"/>
+            <a:endCxn id="47" idx="0"/>
+          </p:cNvCxnSpPr>
+          <p:nvPr/>
+        </p:nvCxnSpPr>
+        <p:spPr>
+          <a:xfrm>
+            <a:off x="7916245" y="2523337"/>
+            <a:ext cx="759649" cy="1094604"/>
+          </a:xfrm>
+          <a:prstGeom prst="straightConnector1">
+            <a:avLst/>
+          </a:prstGeom>
+          <a:ln w="38100">
+            <a:solidFill>
+              <a:schemeClr val="tx1"/>
+            </a:solidFill>
+            <a:headEnd w="lg" len="lg"/>
+            <a:tailEnd type="triangle" w="lg" len="lg"/>
+          </a:ln>
+        </p:spPr>
+        <p:style>
+          <a:lnRef idx="1">
+            <a:schemeClr val="accent1"/>
+          </a:lnRef>
+          <a:fillRef idx="0">
+            <a:schemeClr val="accent1"/>
+          </a:fillRef>
+          <a:effectRef idx="0">
+            <a:schemeClr val="accent1"/>
+          </a:effectRef>
+          <a:fontRef idx="minor">
+            <a:schemeClr val="tx1"/>
+          </a:fontRef>
+        </p:style>
+      </p:cxnSp>
+      <p:cxnSp>
+        <p:nvCxnSpPr>
+          <p:cNvPr id="53" name="Straight Arrow Connector 52">
+            <a:extLst>
+              <a:ext uri="{FF2B5EF4-FFF2-40B4-BE49-F238E27FC236}">
+                <a16:creationId xmlns:a16="http://schemas.microsoft.com/office/drawing/2014/main" id="{820357CE-97E1-8648-F4C3-DAD3D114DB70}"/>
+              </a:ext>
+            </a:extLst>
+          </p:cNvPr>
+          <p:cNvCxnSpPr>
+            <a:stCxn id="49" idx="4"/>
+            <a:endCxn id="48" idx="0"/>
+          </p:cNvCxnSpPr>
+          <p:nvPr/>
+        </p:nvCxnSpPr>
+        <p:spPr>
+          <a:xfrm>
+            <a:off x="7916245" y="2523337"/>
+            <a:ext cx="2240275" cy="1094604"/>
+          </a:xfrm>
+          <a:prstGeom prst="straightConnector1">
+            <a:avLst/>
+          </a:prstGeom>
+          <a:ln w="38100">
+            <a:solidFill>
+              <a:schemeClr val="tx1"/>
+            </a:solidFill>
+            <a:headEnd w="lg" len="lg"/>
+            <a:tailEnd type="triangle" w="lg" len="lg"/>
+          </a:ln>
+        </p:spPr>
+        <p:style>
+          <a:lnRef idx="1">
+            <a:schemeClr val="accent1"/>
+          </a:lnRef>
+          <a:fillRef idx="0">
+            <a:schemeClr val="accent1"/>
+          </a:fillRef>
+          <a:effectRef idx="0">
+            <a:schemeClr val="accent1"/>
+          </a:effectRef>
+          <a:fontRef idx="minor">
+            <a:schemeClr val="tx1"/>
+          </a:fontRef>
+        </p:style>
+      </p:cxnSp>
+      <p:graphicFrame>
+        <p:nvGraphicFramePr>
+          <p:cNvPr id="54" name="Table 106">
+            <a:extLst>
+              <a:ext uri="{FF2B5EF4-FFF2-40B4-BE49-F238E27FC236}">
+                <a16:creationId xmlns:a16="http://schemas.microsoft.com/office/drawing/2014/main" id="{C861189B-54F5-D7E9-8388-A041A51E9E0D}"/>
+              </a:ext>
+            </a:extLst>
+          </p:cNvPr>
+          <p:cNvGraphicFramePr>
+            <a:graphicFrameLocks noGrp="1"/>
+          </p:cNvGraphicFramePr>
+          <p:nvPr>
+            <p:extLst>
+              <p:ext uri="{D42A27DB-BD31-4B8C-83A1-F6EECF244321}">
+                <p14:modId xmlns:p14="http://schemas.microsoft.com/office/powerpoint/2010/main" val="3538939034"/>
+              </p:ext>
+            </p:extLst>
+          </p:nvPr>
+        </p:nvGraphicFramePr>
+        <p:xfrm>
+          <a:off x="478429" y="1913896"/>
+          <a:ext cx="3518570" cy="2313485"/>
+        </p:xfrm>
+        <a:graphic>
+          <a:graphicData uri="http://schemas.openxmlformats.org/drawingml/2006/table">
+            <a:tbl>
+              <a:tblPr firstRow="1" bandRow="1">
+                <a:tableStyleId>{5C22544A-7EE6-4342-B048-85BDC9FD1C3A}</a:tableStyleId>
+              </a:tblPr>
+              <a:tblGrid>
+                <a:gridCol w="703714">
+                  <a:extLst>
+                    <a:ext uri="{9D8B030D-6E8A-4147-A177-3AD203B41FA5}">
+                      <a16:colId xmlns:a16="http://schemas.microsoft.com/office/drawing/2014/main" val="1010010654"/>
+                    </a:ext>
+                  </a:extLst>
+                </a:gridCol>
+                <a:gridCol w="703714">
+                  <a:extLst>
+                    <a:ext uri="{9D8B030D-6E8A-4147-A177-3AD203B41FA5}">
+                      <a16:colId xmlns:a16="http://schemas.microsoft.com/office/drawing/2014/main" val="2729503702"/>
+                    </a:ext>
+                  </a:extLst>
+                </a:gridCol>
+                <a:gridCol w="703714">
+                  <a:extLst>
+                    <a:ext uri="{9D8B030D-6E8A-4147-A177-3AD203B41FA5}">
+                      <a16:colId xmlns:a16="http://schemas.microsoft.com/office/drawing/2014/main" val="2302851017"/>
+                    </a:ext>
+                  </a:extLst>
+                </a:gridCol>
+                <a:gridCol w="703714">
+                  <a:extLst>
+                    <a:ext uri="{9D8B030D-6E8A-4147-A177-3AD203B41FA5}">
+                      <a16:colId xmlns:a16="http://schemas.microsoft.com/office/drawing/2014/main" val="3433354927"/>
+                    </a:ext>
+                  </a:extLst>
+                </a:gridCol>
+                <a:gridCol w="703714">
+                  <a:extLst>
+                    <a:ext uri="{9D8B030D-6E8A-4147-A177-3AD203B41FA5}">
+                      <a16:colId xmlns:a16="http://schemas.microsoft.com/office/drawing/2014/main" val="2334715431"/>
+                    </a:ext>
+                  </a:extLst>
+                </a:gridCol>
+              </a:tblGrid>
+              <a:tr h="462697">
+                <a:tc>
+                  <a:txBody>
+                    <a:bodyPr/>
+                    <a:lstStyle/>
+                    <a:p>
+                      <a:pPr algn="ctr"/>
+                      <a:endParaRPr lang="en-GB" sz="1800" b="1" dirty="0">
+                        <a:solidFill>
+                          <a:schemeClr val="tx1"/>
+                        </a:solidFill>
+                      </a:endParaRPr>
+                    </a:p>
+                  </a:txBody>
+                  <a:tcPr anchor="ctr">
+                    <a:lnL w="12700" cap="flat" cmpd="sng" algn="ctr">
+                      <a:solidFill>
+                        <a:schemeClr val="tx1"/>
+                      </a:solidFill>
+                      <a:prstDash val="solid"/>
+                      <a:round/>
+                      <a:headEnd type="none" w="med" len="med"/>
+                      <a:tailEnd type="none" w="med" len="med"/>
+                    </a:lnL>
+                    <a:lnR w="12700" cap="flat" cmpd="sng" algn="ctr">
+                      <a:solidFill>
+                        <a:schemeClr val="tx1"/>
+                      </a:solidFill>
+                      <a:prstDash val="solid"/>
+                      <a:round/>
+                      <a:headEnd type="none" w="med" len="med"/>
+                      <a:tailEnd type="none" w="med" len="med"/>
+                    </a:lnR>
+                    <a:lnT w="12700" cap="flat" cmpd="sng" algn="ctr">
+                      <a:solidFill>
+                        <a:schemeClr val="tx1"/>
+                      </a:solidFill>
+                      <a:prstDash val="solid"/>
+                      <a:round/>
+                      <a:headEnd type="none" w="med" len="med"/>
+                      <a:tailEnd type="none" w="med" len="med"/>
+                    </a:lnT>
+                    <a:lnB w="12700" cap="flat" cmpd="sng" algn="ctr">
+                      <a:solidFill>
+                        <a:schemeClr val="tx1"/>
+                      </a:solidFill>
+                      <a:prstDash val="solid"/>
+                      <a:round/>
+                      <a:headEnd type="none" w="med" len="med"/>
+                      <a:tailEnd type="none" w="med" len="med"/>
+                    </a:lnB>
+                    <a:lnTlToBr w="12700" cmpd="sng">
+                      <a:noFill/>
+                      <a:prstDash val="solid"/>
+                    </a:lnTlToBr>
+                    <a:lnBlToTr w="12700" cmpd="sng">
+                      <a:noFill/>
+                      <a:prstDash val="solid"/>
+                    </a:lnBlToTr>
+                    <a:solidFill>
+                      <a:schemeClr val="bg1"/>
+                    </a:solidFill>
+                  </a:tcPr>
+                </a:tc>
+                <a:tc>
+                  <a:txBody>
+                    <a:bodyPr/>
+                    <a:lstStyle/>
+                    <a:p>
+                      <a:pPr algn="ctr"/>
+                      <a:r>
+                        <a:rPr lang="en-GB" sz="1800" b="1" dirty="0">
+                          <a:solidFill>
+                            <a:schemeClr val="tx1"/>
+                          </a:solidFill>
+                        </a:rPr>
+                        <a:t>Y1</a:t>
+                      </a:r>
+                    </a:p>
+                  </a:txBody>
+                  <a:tcPr anchor="ctr">
+                    <a:lnL w="12700" cap="flat" cmpd="sng" algn="ctr">
+                      <a:solidFill>
+                        <a:schemeClr val="tx1"/>
+                      </a:solidFill>
+                      <a:prstDash val="solid"/>
+                      <a:round/>
+                      <a:headEnd type="none" w="med" len="med"/>
+                      <a:tailEnd type="none" w="med" len="med"/>
+                    </a:lnL>
+                    <a:lnR w="12700" cap="flat" cmpd="sng" algn="ctr">
+                      <a:solidFill>
+                        <a:schemeClr val="tx1"/>
+                      </a:solidFill>
+                      <a:prstDash val="solid"/>
+                      <a:round/>
+                      <a:headEnd type="none" w="med" len="med"/>
+                      <a:tailEnd type="none" w="med" len="med"/>
+                    </a:lnR>
+                    <a:lnT w="12700" cap="flat" cmpd="sng" algn="ctr">
+                      <a:solidFill>
+                        <a:schemeClr val="tx1"/>
+                      </a:solidFill>
+                      <a:prstDash val="solid"/>
+                      <a:round/>
+                      <a:headEnd type="none" w="med" len="med"/>
+                      <a:tailEnd type="none" w="med" len="med"/>
+                    </a:lnT>
+                    <a:lnB w="12700" cap="flat" cmpd="sng" algn="ctr">
+                      <a:solidFill>
+                        <a:schemeClr val="tx1"/>
+                      </a:solidFill>
+                      <a:prstDash val="solid"/>
+                      <a:round/>
+                      <a:headEnd type="none" w="med" len="med"/>
+                      <a:tailEnd type="none" w="med" len="med"/>
+                    </a:lnB>
+                    <a:lnTlToBr w="12700" cmpd="sng">
+                      <a:noFill/>
+                      <a:prstDash val="solid"/>
+                    </a:lnTlToBr>
+                    <a:lnBlToTr w="12700" cmpd="sng">
+                      <a:noFill/>
+                      <a:prstDash val="solid"/>
+                    </a:lnBlToTr>
+                    <a:solidFill>
+                      <a:schemeClr val="bg1"/>
+                    </a:solidFill>
+                  </a:tcPr>
+                </a:tc>
+                <a:tc>
+                  <a:txBody>
+                    <a:bodyPr/>
+                    <a:lstStyle/>
+                    <a:p>
+                      <a:pPr algn="ctr"/>
+                      <a:r>
+                        <a:rPr lang="en-GB" sz="1800" b="1" dirty="0">
+                          <a:solidFill>
+                            <a:schemeClr val="tx1"/>
+                          </a:solidFill>
+                        </a:rPr>
+                        <a:t>Y2</a:t>
+                      </a:r>
+                    </a:p>
+                  </a:txBody>
+                  <a:tcPr anchor="ctr">
+                    <a:lnL w="12700" cap="flat" cmpd="sng" algn="ctr">
+                      <a:solidFill>
+                        <a:schemeClr val="tx1"/>
+                      </a:solidFill>
+                      <a:prstDash val="solid"/>
+                      <a:round/>
+                      <a:headEnd type="none" w="med" len="med"/>
+                      <a:tailEnd type="none" w="med" len="med"/>
+                    </a:lnL>
+                    <a:lnR w="12700" cap="flat" cmpd="sng" algn="ctr">
+                      <a:solidFill>
+                        <a:schemeClr val="tx1"/>
+                      </a:solidFill>
+                      <a:prstDash val="solid"/>
+                      <a:round/>
+                      <a:headEnd type="none" w="med" len="med"/>
+                      <a:tailEnd type="none" w="med" len="med"/>
+                    </a:lnR>
+                    <a:lnT w="12700" cap="flat" cmpd="sng" algn="ctr">
+                      <a:solidFill>
+                        <a:schemeClr val="tx1"/>
+                      </a:solidFill>
+                      <a:prstDash val="solid"/>
+                      <a:round/>
+                      <a:headEnd type="none" w="med" len="med"/>
+                      <a:tailEnd type="none" w="med" len="med"/>
+                    </a:lnT>
+                    <a:lnB w="12700" cap="flat" cmpd="sng" algn="ctr">
+                      <a:solidFill>
+                        <a:schemeClr val="tx1"/>
+                      </a:solidFill>
+                      <a:prstDash val="solid"/>
+                      <a:round/>
+                      <a:headEnd type="none" w="med" len="med"/>
+                      <a:tailEnd type="none" w="med" len="med"/>
+                    </a:lnB>
+                    <a:lnTlToBr w="12700" cmpd="sng">
+                      <a:noFill/>
+                      <a:prstDash val="solid"/>
+                    </a:lnTlToBr>
+                    <a:lnBlToTr w="12700" cmpd="sng">
+                      <a:noFill/>
+                      <a:prstDash val="solid"/>
+                    </a:lnBlToTr>
+                    <a:solidFill>
+                      <a:schemeClr val="bg1"/>
+                    </a:solidFill>
+                  </a:tcPr>
+                </a:tc>
+                <a:tc>
+                  <a:txBody>
+                    <a:bodyPr/>
+                    <a:lstStyle/>
+                    <a:p>
+                      <a:pPr algn="ctr"/>
+                      <a:r>
+                        <a:rPr lang="en-GB" sz="1800" b="1" dirty="0">
+                          <a:solidFill>
+                            <a:schemeClr val="tx1"/>
+                          </a:solidFill>
+                        </a:rPr>
+                        <a:t>Y3</a:t>
+                      </a:r>
+                    </a:p>
+                  </a:txBody>
+                  <a:tcPr anchor="ctr">
+                    <a:lnL w="12700" cap="flat" cmpd="sng" algn="ctr">
+                      <a:solidFill>
+                        <a:schemeClr val="tx1"/>
+                      </a:solidFill>
+                      <a:prstDash val="solid"/>
+                      <a:round/>
+                      <a:headEnd type="none" w="med" len="med"/>
+                      <a:tailEnd type="none" w="med" len="med"/>
+                    </a:lnL>
+                    <a:lnR w="12700" cap="flat" cmpd="sng" algn="ctr">
+                      <a:solidFill>
+                        <a:schemeClr val="tx1"/>
+                      </a:solidFill>
+                      <a:prstDash val="solid"/>
+                      <a:round/>
+                      <a:headEnd type="none" w="med" len="med"/>
+                      <a:tailEnd type="none" w="med" len="med"/>
+                    </a:lnR>
+                    <a:lnT w="12700" cap="flat" cmpd="sng" algn="ctr">
+                      <a:solidFill>
+                        <a:schemeClr val="tx1"/>
+                      </a:solidFill>
+                      <a:prstDash val="solid"/>
+                      <a:round/>
+                      <a:headEnd type="none" w="med" len="med"/>
+                      <a:tailEnd type="none" w="med" len="med"/>
+                    </a:lnT>
+                    <a:lnB w="12700" cap="flat" cmpd="sng" algn="ctr">
+                      <a:solidFill>
+                        <a:schemeClr val="tx1"/>
+                      </a:solidFill>
+                      <a:prstDash val="solid"/>
+                      <a:round/>
+                      <a:headEnd type="none" w="med" len="med"/>
+                      <a:tailEnd type="none" w="med" len="med"/>
+                    </a:lnB>
+                    <a:lnTlToBr w="12700" cmpd="sng">
+                      <a:noFill/>
+                      <a:prstDash val="solid"/>
+                    </a:lnTlToBr>
+                    <a:lnBlToTr w="12700" cmpd="sng">
+                      <a:noFill/>
+                      <a:prstDash val="solid"/>
+                    </a:lnBlToTr>
+                    <a:solidFill>
+                      <a:schemeClr val="bg1"/>
+                    </a:solidFill>
+                  </a:tcPr>
+                </a:tc>
+                <a:tc>
+                  <a:txBody>
+                    <a:bodyPr/>
+                    <a:lstStyle/>
+                    <a:p>
+                      <a:pPr algn="ctr"/>
+                      <a:r>
+                        <a:rPr lang="en-GB" sz="1800" b="1" dirty="0">
+                          <a:solidFill>
+                            <a:schemeClr val="tx1"/>
+                          </a:solidFill>
+                        </a:rPr>
+                        <a:t>Y4</a:t>
+                      </a:r>
+                    </a:p>
+                  </a:txBody>
+                  <a:tcPr anchor="ctr">
+                    <a:lnL w="12700" cap="flat" cmpd="sng" algn="ctr">
+                      <a:solidFill>
+                        <a:schemeClr val="tx1"/>
+                      </a:solidFill>
+                      <a:prstDash val="solid"/>
+                      <a:round/>
+                      <a:headEnd type="none" w="med" len="med"/>
+                      <a:tailEnd type="none" w="med" len="med"/>
+                    </a:lnL>
+                    <a:lnR w="12700" cap="flat" cmpd="sng" algn="ctr">
+                      <a:solidFill>
+                        <a:schemeClr val="tx1"/>
+                      </a:solidFill>
+                      <a:prstDash val="solid"/>
+                      <a:round/>
+                      <a:headEnd type="none" w="med" len="med"/>
+                      <a:tailEnd type="none" w="med" len="med"/>
+                    </a:lnR>
+                    <a:lnT w="12700" cap="flat" cmpd="sng" algn="ctr">
+                      <a:solidFill>
+                        <a:schemeClr val="tx1"/>
+                      </a:solidFill>
+                      <a:prstDash val="solid"/>
+                      <a:round/>
+                      <a:headEnd type="none" w="med" len="med"/>
+                      <a:tailEnd type="none" w="med" len="med"/>
+                    </a:lnT>
+                    <a:lnB w="12700" cap="flat" cmpd="sng" algn="ctr">
+                      <a:solidFill>
+                        <a:schemeClr val="tx1"/>
+                      </a:solidFill>
+                      <a:prstDash val="solid"/>
+                      <a:round/>
+                      <a:headEnd type="none" w="med" len="med"/>
+                      <a:tailEnd type="none" w="med" len="med"/>
+                    </a:lnB>
+                    <a:lnTlToBr w="12700" cmpd="sng">
+                      <a:noFill/>
+                      <a:prstDash val="solid"/>
+                    </a:lnTlToBr>
+                    <a:lnBlToTr w="12700" cmpd="sng">
+                      <a:noFill/>
+                      <a:prstDash val="solid"/>
+                    </a:lnBlToTr>
+                    <a:solidFill>
+                      <a:schemeClr val="bg1"/>
+                    </a:solidFill>
+                  </a:tcPr>
+                </a:tc>
+                <a:extLst>
+                  <a:ext uri="{0D108BD9-81ED-4DB2-BD59-A6C34878D82A}">
+                    <a16:rowId xmlns:a16="http://schemas.microsoft.com/office/drawing/2014/main" val="2937080134"/>
+                  </a:ext>
+                </a:extLst>
+              </a:tr>
+              <a:tr h="462697">
+                <a:tc>
+                  <a:txBody>
+                    <a:bodyPr/>
+                    <a:lstStyle/>
+                    <a:p>
+                      <a:pPr algn="ctr"/>
+                      <a:r>
+                        <a:rPr lang="en-GB" sz="1800" b="1" dirty="0">
+                          <a:solidFill>
+                            <a:schemeClr val="tx1"/>
+                          </a:solidFill>
+                        </a:rPr>
+                        <a:t>Y1</a:t>
+                      </a:r>
+                    </a:p>
+                  </a:txBody>
+                  <a:tcPr anchor="ctr">
+                    <a:lnL w="12700" cap="flat" cmpd="sng" algn="ctr">
+                      <a:solidFill>
+                        <a:schemeClr val="tx1"/>
+                      </a:solidFill>
+                      <a:prstDash val="solid"/>
+                      <a:round/>
+                      <a:headEnd type="none" w="med" len="med"/>
+                      <a:tailEnd type="none" w="med" len="med"/>
+                    </a:lnL>
+                    <a:lnR w="12700" cap="flat" cmpd="sng" algn="ctr">
+                      <a:solidFill>
+                        <a:schemeClr val="tx1"/>
+                      </a:solidFill>
+                      <a:prstDash val="solid"/>
+                      <a:round/>
+                      <a:headEnd type="none" w="med" len="med"/>
+                      <a:tailEnd type="none" w="med" len="med"/>
+                    </a:lnR>
+                    <a:lnT w="12700" cap="flat" cmpd="sng" algn="ctr">
+                      <a:solidFill>
+                        <a:schemeClr val="tx1"/>
+                      </a:solidFill>
+                      <a:prstDash val="solid"/>
+                      <a:round/>
+                      <a:headEnd type="none" w="med" len="med"/>
+                      <a:tailEnd type="none" w="med" len="med"/>
+                    </a:lnT>
+                    <a:lnB w="12700" cap="flat" cmpd="sng" algn="ctr">
+                      <a:solidFill>
+                        <a:schemeClr val="tx1"/>
+                      </a:solidFill>
+                      <a:prstDash val="solid"/>
+                      <a:round/>
+                      <a:headEnd type="none" w="med" len="med"/>
+                      <a:tailEnd type="none" w="med" len="med"/>
+                    </a:lnB>
+                    <a:lnTlToBr w="12700" cmpd="sng">
+                      <a:noFill/>
+                      <a:prstDash val="solid"/>
+                    </a:lnTlToBr>
+                    <a:lnBlToTr w="12700" cmpd="sng">
+                      <a:noFill/>
+                      <a:prstDash val="solid"/>
+                    </a:lnBlToTr>
+                    <a:solidFill>
+                      <a:schemeClr val="bg1"/>
+                    </a:solidFill>
+                  </a:tcPr>
+                </a:tc>
+                <a:tc>
+                  <a:txBody>
+                    <a:bodyPr/>
+                    <a:lstStyle/>
+                    <a:p>
+                      <a:pPr algn="ctr"/>
+                      <a:r>
+                        <a:rPr lang="en-GB" sz="1800" b="0" dirty="0">
+                          <a:solidFill>
+                            <a:schemeClr val="tx1"/>
+                          </a:solidFill>
+                        </a:rPr>
+                        <a:t>var</a:t>
+                      </a:r>
+                      <a:r>
+                        <a:rPr lang="en-GB" sz="1800" b="0" baseline="-25000" dirty="0">
+                          <a:solidFill>
+                            <a:schemeClr val="tx1"/>
+                          </a:solidFill>
+                        </a:rPr>
+                        <a:t>1</a:t>
+                      </a:r>
+                      <a:endParaRPr lang="en-GB" sz="1800" b="0" dirty="0">
+                        <a:solidFill>
+                          <a:schemeClr val="tx1"/>
+                        </a:solidFill>
+                      </a:endParaRPr>
+                    </a:p>
+                  </a:txBody>
+                  <a:tcPr anchor="ctr">
+                    <a:lnL w="12700" cap="flat" cmpd="sng" algn="ctr">
+                      <a:solidFill>
+                        <a:schemeClr val="tx1"/>
+                      </a:solidFill>
+                      <a:prstDash val="solid"/>
+                      <a:round/>
+                      <a:headEnd type="none" w="med" len="med"/>
+                      <a:tailEnd type="none" w="med" len="med"/>
+                    </a:lnL>
+                    <a:lnR w="12700" cap="flat" cmpd="sng" algn="ctr">
+                      <a:noFill/>
+                      <a:prstDash val="solid"/>
+                      <a:round/>
+                      <a:headEnd type="none" w="med" len="med"/>
+                      <a:tailEnd type="none" w="med" len="med"/>
+                    </a:lnR>
+                    <a:lnT w="12700" cap="flat" cmpd="sng" algn="ctr">
+                      <a:solidFill>
+                        <a:schemeClr val="tx1"/>
+                      </a:solidFill>
+                      <a:prstDash val="solid"/>
+                      <a:round/>
+                      <a:headEnd type="none" w="med" len="med"/>
+                      <a:tailEnd type="none" w="med" len="med"/>
+                    </a:lnT>
+                    <a:lnB w="12700" cap="flat" cmpd="sng" algn="ctr">
+                      <a:noFill/>
+                      <a:prstDash val="solid"/>
+                      <a:round/>
+                      <a:headEnd type="none" w="med" len="med"/>
+                      <a:tailEnd type="none" w="med" len="med"/>
+                    </a:lnB>
+                    <a:lnTlToBr w="12700" cmpd="sng">
+                      <a:noFill/>
+                      <a:prstDash val="solid"/>
+                    </a:lnTlToBr>
+                    <a:lnBlToTr w="12700" cmpd="sng">
+                      <a:noFill/>
+                      <a:prstDash val="solid"/>
+                    </a:lnBlToTr>
+                    <a:solidFill>
+                      <a:schemeClr val="bg1"/>
+                    </a:solidFill>
+                  </a:tcPr>
+                </a:tc>
+                <a:tc>
+                  <a:txBody>
+                    <a:bodyPr/>
+                    <a:lstStyle/>
+                    <a:p>
+                      <a:pPr algn="ctr"/>
+                      <a:endParaRPr lang="en-GB" sz="1800" b="0" dirty="0">
+                        <a:solidFill>
+                          <a:schemeClr val="tx1"/>
+                        </a:solidFill>
+                      </a:endParaRPr>
+                    </a:p>
+                  </a:txBody>
+                  <a:tcPr anchor="ctr">
+                    <a:lnL w="12700" cap="flat" cmpd="sng" algn="ctr">
+                      <a:noFill/>
+                      <a:prstDash val="solid"/>
+                      <a:round/>
+                      <a:headEnd type="none" w="med" len="med"/>
+                      <a:tailEnd type="none" w="med" len="med"/>
+                    </a:lnL>
+                    <a:lnR w="12700" cap="flat" cmpd="sng" algn="ctr">
+                      <a:noFill/>
+                      <a:prstDash val="solid"/>
+                      <a:round/>
+                      <a:headEnd type="none" w="med" len="med"/>
+                      <a:tailEnd type="none" w="med" len="med"/>
+                    </a:lnR>
+                    <a:lnT w="12700" cap="flat" cmpd="sng" algn="ctr">
+                      <a:solidFill>
+                        <a:schemeClr val="tx1"/>
+                      </a:solidFill>
+                      <a:prstDash val="solid"/>
+                      <a:round/>
+                      <a:headEnd type="none" w="med" len="med"/>
+                      <a:tailEnd type="none" w="med" len="med"/>
+                    </a:lnT>
+                    <a:lnB w="12700" cap="flat" cmpd="sng" algn="ctr">
+                      <a:noFill/>
+                      <a:prstDash val="solid"/>
+                      <a:round/>
+                      <a:headEnd type="none" w="med" len="med"/>
+                      <a:tailEnd type="none" w="med" len="med"/>
+                    </a:lnB>
+                    <a:lnTlToBr w="12700" cmpd="sng">
+                      <a:noFill/>
+                      <a:prstDash val="solid"/>
+                    </a:lnTlToBr>
+                    <a:lnBlToTr w="12700" cmpd="sng">
+                      <a:noFill/>
+                      <a:prstDash val="solid"/>
+                    </a:lnBlToTr>
+                    <a:solidFill>
+                      <a:schemeClr val="bg1"/>
+                    </a:solidFill>
+                  </a:tcPr>
+                </a:tc>
+                <a:tc>
+                  <a:txBody>
+                    <a:bodyPr/>
+                    <a:lstStyle/>
+                    <a:p>
+                      <a:pPr algn="ctr"/>
+                      <a:endParaRPr lang="en-GB" sz="1800" b="0" dirty="0">
+                        <a:solidFill>
+                          <a:schemeClr val="tx1"/>
+                        </a:solidFill>
+                      </a:endParaRPr>
+                    </a:p>
+                  </a:txBody>
+                  <a:tcPr anchor="ctr">
+                    <a:lnL w="12700" cap="flat" cmpd="sng" algn="ctr">
+                      <a:noFill/>
+                      <a:prstDash val="solid"/>
+                      <a:round/>
+                      <a:headEnd type="none" w="med" len="med"/>
+                      <a:tailEnd type="none" w="med" len="med"/>
+                    </a:lnL>
+                    <a:lnR w="12700" cap="flat" cmpd="sng" algn="ctr">
+                      <a:noFill/>
+                      <a:prstDash val="solid"/>
+                      <a:round/>
+                      <a:headEnd type="none" w="med" len="med"/>
+                      <a:tailEnd type="none" w="med" len="med"/>
+                    </a:lnR>
+                    <a:lnT w="12700" cap="flat" cmpd="sng" algn="ctr">
+                      <a:solidFill>
+                        <a:schemeClr val="tx1"/>
+                      </a:solidFill>
+                      <a:prstDash val="solid"/>
+                      <a:round/>
+                      <a:headEnd type="none" w="med" len="med"/>
+                      <a:tailEnd type="none" w="med" len="med"/>
+                    </a:lnT>
+                    <a:lnB w="12700" cap="flat" cmpd="sng" algn="ctr">
+                      <a:noFill/>
+                      <a:prstDash val="solid"/>
+                      <a:round/>
+                      <a:headEnd type="none" w="med" len="med"/>
+                      <a:tailEnd type="none" w="med" len="med"/>
+                    </a:lnB>
+                    <a:lnTlToBr w="12700" cmpd="sng">
+                      <a:noFill/>
+                      <a:prstDash val="solid"/>
+                    </a:lnTlToBr>
+                    <a:lnBlToTr w="12700" cmpd="sng">
+                      <a:noFill/>
+                      <a:prstDash val="solid"/>
+                    </a:lnBlToTr>
+                    <a:solidFill>
+                      <a:schemeClr val="bg1"/>
+                    </a:solidFill>
+                  </a:tcPr>
+                </a:tc>
+                <a:tc>
+                  <a:txBody>
+                    <a:bodyPr/>
+                    <a:lstStyle/>
+                    <a:p>
+                      <a:pPr algn="ctr"/>
+                      <a:endParaRPr lang="en-GB" sz="1800" b="0" dirty="0">
+                        <a:solidFill>
+                          <a:schemeClr val="tx1"/>
+                        </a:solidFill>
+                      </a:endParaRPr>
+                    </a:p>
+                  </a:txBody>
+                  <a:tcPr anchor="ctr">
+                    <a:lnL w="12700" cap="flat" cmpd="sng" algn="ctr">
+                      <a:noFill/>
+                      <a:prstDash val="solid"/>
+                      <a:round/>
+                      <a:headEnd type="none" w="med" len="med"/>
+                      <a:tailEnd type="none" w="med" len="med"/>
+                    </a:lnL>
+                    <a:lnR w="12700" cap="flat" cmpd="sng" algn="ctr">
+                      <a:noFill/>
+                      <a:prstDash val="solid"/>
+                      <a:round/>
+                      <a:headEnd type="none" w="med" len="med"/>
+                      <a:tailEnd type="none" w="med" len="med"/>
+                    </a:lnR>
+                    <a:lnT w="12700" cap="flat" cmpd="sng" algn="ctr">
+                      <a:solidFill>
+                        <a:schemeClr val="tx1"/>
+                      </a:solidFill>
+                      <a:prstDash val="solid"/>
+                      <a:round/>
+                      <a:headEnd type="none" w="med" len="med"/>
+                      <a:tailEnd type="none" w="med" len="med"/>
+                    </a:lnT>
+                    <a:lnB w="12700" cap="flat" cmpd="sng" algn="ctr">
+                      <a:noFill/>
+                      <a:prstDash val="solid"/>
+                      <a:round/>
+                      <a:headEnd type="none" w="med" len="med"/>
+                      <a:tailEnd type="none" w="med" len="med"/>
+                    </a:lnB>
+                    <a:lnTlToBr w="12700" cmpd="sng">
+                      <a:noFill/>
+                      <a:prstDash val="solid"/>
+                    </a:lnTlToBr>
+                    <a:lnBlToTr w="12700" cmpd="sng">
+                      <a:noFill/>
+                      <a:prstDash val="solid"/>
+                    </a:lnBlToTr>
+                    <a:solidFill>
+                      <a:schemeClr val="bg1"/>
+                    </a:solidFill>
+                  </a:tcPr>
+                </a:tc>
+                <a:extLst>
+                  <a:ext uri="{0D108BD9-81ED-4DB2-BD59-A6C34878D82A}">
+                    <a16:rowId xmlns:a16="http://schemas.microsoft.com/office/drawing/2014/main" val="2230996407"/>
+                  </a:ext>
+                </a:extLst>
+              </a:tr>
+              <a:tr h="462697">
+                <a:tc>
+                  <a:txBody>
+                    <a:bodyPr/>
+                    <a:lstStyle/>
+                    <a:p>
+                      <a:pPr algn="ctr"/>
+                      <a:r>
+                        <a:rPr lang="en-GB" sz="1800" b="1" dirty="0">
+                          <a:solidFill>
+                            <a:schemeClr val="tx1"/>
+                          </a:solidFill>
+                        </a:rPr>
+                        <a:t>Y2</a:t>
+                      </a:r>
+                    </a:p>
+                  </a:txBody>
+                  <a:tcPr anchor="ctr">
+                    <a:lnL w="12700" cap="flat" cmpd="sng" algn="ctr">
+                      <a:solidFill>
+                        <a:schemeClr val="tx1"/>
+                      </a:solidFill>
+                      <a:prstDash val="solid"/>
+                      <a:round/>
+                      <a:headEnd type="none" w="med" len="med"/>
+                      <a:tailEnd type="none" w="med" len="med"/>
+                    </a:lnL>
+                    <a:lnR w="12700" cap="flat" cmpd="sng" algn="ctr">
+                      <a:solidFill>
+                        <a:schemeClr val="tx1"/>
+                      </a:solidFill>
+                      <a:prstDash val="solid"/>
+                      <a:round/>
+                      <a:headEnd type="none" w="med" len="med"/>
+                      <a:tailEnd type="none" w="med" len="med"/>
+                    </a:lnR>
+                    <a:lnT w="12700" cap="flat" cmpd="sng" algn="ctr">
+                      <a:solidFill>
+                        <a:schemeClr val="tx1"/>
+                      </a:solidFill>
+                      <a:prstDash val="solid"/>
+                      <a:round/>
+                      <a:headEnd type="none" w="med" len="med"/>
+                      <a:tailEnd type="none" w="med" len="med"/>
+                    </a:lnT>
+                    <a:lnB w="12700" cap="flat" cmpd="sng" algn="ctr">
+                      <a:solidFill>
+                        <a:schemeClr val="tx1"/>
+                      </a:solidFill>
+                      <a:prstDash val="solid"/>
+                      <a:round/>
+                      <a:headEnd type="none" w="med" len="med"/>
+                      <a:tailEnd type="none" w="med" len="med"/>
+                    </a:lnB>
+                    <a:lnTlToBr w="12700" cmpd="sng">
+                      <a:noFill/>
+                      <a:prstDash val="solid"/>
+                    </a:lnTlToBr>
+                    <a:lnBlToTr w="12700" cmpd="sng">
+                      <a:noFill/>
+                      <a:prstDash val="solid"/>
+                    </a:lnBlToTr>
+                    <a:solidFill>
+                      <a:schemeClr val="bg1"/>
+                    </a:solidFill>
+                  </a:tcPr>
+                </a:tc>
+                <a:tc>
+                  <a:txBody>
+                    <a:bodyPr/>
+                    <a:lstStyle/>
+                    <a:p>
+                      <a:pPr algn="ctr"/>
+                      <a:r>
+                        <a:rPr lang="en-GB" sz="1800" b="0" dirty="0">
+                          <a:solidFill>
+                            <a:schemeClr val="tx1"/>
+                          </a:solidFill>
+                        </a:rPr>
+                        <a:t>cov</a:t>
+                      </a:r>
+                      <a:r>
+                        <a:rPr lang="en-GB" sz="1800" b="0" baseline="-25000" dirty="0">
+                          <a:solidFill>
+                            <a:schemeClr val="tx1"/>
+                          </a:solidFill>
+                        </a:rPr>
+                        <a:t>2.1</a:t>
+                      </a:r>
+                      <a:endParaRPr lang="en-GB" sz="1800" b="0" dirty="0">
+                        <a:solidFill>
+                          <a:schemeClr val="tx1"/>
+                        </a:solidFill>
+                      </a:endParaRPr>
+                    </a:p>
+                  </a:txBody>
+                  <a:tcPr anchor="ctr">
+                    <a:lnL w="12700" cap="flat" cmpd="sng" algn="ctr">
+                      <a:solidFill>
+                        <a:schemeClr val="tx1"/>
+                      </a:solidFill>
+                      <a:prstDash val="solid"/>
+                      <a:round/>
+                      <a:headEnd type="none" w="med" len="med"/>
+                      <a:tailEnd type="none" w="med" len="med"/>
+                    </a:lnL>
+                    <a:lnR w="12700" cap="flat" cmpd="sng" algn="ctr">
+                      <a:noFill/>
+                      <a:prstDash val="solid"/>
+                      <a:round/>
+                      <a:headEnd type="none" w="med" len="med"/>
+                      <a:tailEnd type="none" w="med" len="med"/>
+                    </a:lnR>
+                    <a:lnT w="12700" cap="flat" cmpd="sng" algn="ctr">
+                      <a:noFill/>
+                      <a:prstDash val="solid"/>
+                      <a:round/>
+                      <a:headEnd type="none" w="med" len="med"/>
+                      <a:tailEnd type="none" w="med" len="med"/>
+                    </a:lnT>
+                    <a:lnB w="12700" cap="flat" cmpd="sng" algn="ctr">
+                      <a:noFill/>
+                      <a:prstDash val="solid"/>
+                      <a:round/>
+                      <a:headEnd type="none" w="med" len="med"/>
+                      <a:tailEnd type="none" w="med" len="med"/>
+                    </a:lnB>
+                    <a:lnTlToBr w="12700" cmpd="sng">
+                      <a:noFill/>
+                      <a:prstDash val="solid"/>
+                    </a:lnTlToBr>
+                    <a:lnBlToTr w="12700" cmpd="sng">
+                      <a:noFill/>
+                      <a:prstDash val="solid"/>
+                    </a:lnBlToTr>
+                    <a:solidFill>
+                      <a:schemeClr val="bg1"/>
+                    </a:solidFill>
+                  </a:tcPr>
+                </a:tc>
+                <a:tc>
+                  <a:txBody>
+                    <a:bodyPr/>
+                    <a:lstStyle/>
+                    <a:p>
+                      <a:pPr algn="ctr"/>
+                      <a:r>
+                        <a:rPr lang="en-GB" sz="1800" b="0" dirty="0">
+                          <a:solidFill>
+                            <a:schemeClr val="tx1"/>
+                          </a:solidFill>
+                        </a:rPr>
+                        <a:t>var</a:t>
+                      </a:r>
+                      <a:r>
+                        <a:rPr lang="en-GB" sz="1800" b="0" baseline="-25000" dirty="0">
+                          <a:solidFill>
+                            <a:schemeClr val="tx1"/>
+                          </a:solidFill>
+                        </a:rPr>
+                        <a:t>2</a:t>
+                      </a:r>
+                      <a:endParaRPr lang="en-GB" sz="1800" b="0" dirty="0">
+                        <a:solidFill>
+                          <a:schemeClr val="tx1"/>
+                        </a:solidFill>
+                      </a:endParaRPr>
+                    </a:p>
+                  </a:txBody>
+                  <a:tcPr anchor="ctr">
+                    <a:lnL w="12700" cap="flat" cmpd="sng" algn="ctr">
+                      <a:noFill/>
+                      <a:prstDash val="solid"/>
+                      <a:round/>
+                      <a:headEnd type="none" w="med" len="med"/>
+                      <a:tailEnd type="none" w="med" len="med"/>
+                    </a:lnL>
+                    <a:lnR w="12700" cap="flat" cmpd="sng" algn="ctr">
+                      <a:noFill/>
+                      <a:prstDash val="solid"/>
+                      <a:round/>
+                      <a:headEnd type="none" w="med" len="med"/>
+                      <a:tailEnd type="none" w="med" len="med"/>
+                    </a:lnR>
+                    <a:lnT w="12700" cap="flat" cmpd="sng" algn="ctr">
+                      <a:noFill/>
+                      <a:prstDash val="solid"/>
+                      <a:round/>
+                      <a:headEnd type="none" w="med" len="med"/>
+                      <a:tailEnd type="none" w="med" len="med"/>
+                    </a:lnT>
+                    <a:lnB w="12700" cap="flat" cmpd="sng" algn="ctr">
+                      <a:noFill/>
+                      <a:prstDash val="solid"/>
+                      <a:round/>
+                      <a:headEnd type="none" w="med" len="med"/>
+                      <a:tailEnd type="none" w="med" len="med"/>
+                    </a:lnB>
+                    <a:lnTlToBr w="12700" cmpd="sng">
+                      <a:noFill/>
+                      <a:prstDash val="solid"/>
+                    </a:lnTlToBr>
+                    <a:lnBlToTr w="12700" cmpd="sng">
+                      <a:noFill/>
+                      <a:prstDash val="solid"/>
+                    </a:lnBlToTr>
+                    <a:solidFill>
+                      <a:schemeClr val="bg1"/>
+                    </a:solidFill>
+                  </a:tcPr>
+                </a:tc>
+                <a:tc>
+                  <a:txBody>
+                    <a:bodyPr/>
+                    <a:lstStyle/>
+                    <a:p>
+                      <a:pPr algn="ctr"/>
+                      <a:endParaRPr lang="en-GB" sz="1800" b="0" dirty="0">
+                        <a:solidFill>
+                          <a:schemeClr val="tx1"/>
+                        </a:solidFill>
+                      </a:endParaRPr>
+                    </a:p>
+                  </a:txBody>
+                  <a:tcPr anchor="ctr">
+                    <a:lnL w="12700" cap="flat" cmpd="sng" algn="ctr">
+                      <a:noFill/>
+                      <a:prstDash val="solid"/>
+                      <a:round/>
+                      <a:headEnd type="none" w="med" len="med"/>
+                      <a:tailEnd type="none" w="med" len="med"/>
+                    </a:lnL>
+                    <a:lnR w="12700" cap="flat" cmpd="sng" algn="ctr">
+                      <a:noFill/>
+                      <a:prstDash val="solid"/>
+                      <a:round/>
+                      <a:headEnd type="none" w="med" len="med"/>
+                      <a:tailEnd type="none" w="med" len="med"/>
+                    </a:lnR>
+                    <a:lnT w="12700" cap="flat" cmpd="sng" algn="ctr">
+                      <a:noFill/>
+                      <a:prstDash val="solid"/>
+                      <a:round/>
+                      <a:headEnd type="none" w="med" len="med"/>
+                      <a:tailEnd type="none" w="med" len="med"/>
+                    </a:lnT>
+                    <a:lnB w="12700" cap="flat" cmpd="sng" algn="ctr">
+                      <a:noFill/>
+                      <a:prstDash val="solid"/>
+                      <a:round/>
+                      <a:headEnd type="none" w="med" len="med"/>
+                      <a:tailEnd type="none" w="med" len="med"/>
+                    </a:lnB>
+                    <a:lnTlToBr w="12700" cmpd="sng">
+                      <a:noFill/>
+                      <a:prstDash val="solid"/>
+                    </a:lnTlToBr>
+                    <a:lnBlToTr w="12700" cmpd="sng">
+                      <a:noFill/>
+                      <a:prstDash val="solid"/>
+                    </a:lnBlToTr>
+                    <a:solidFill>
+                      <a:schemeClr val="bg1"/>
+                    </a:solidFill>
+                  </a:tcPr>
+                </a:tc>
+                <a:tc>
+                  <a:txBody>
+                    <a:bodyPr/>
+                    <a:lstStyle/>
+                    <a:p>
+                      <a:pPr algn="ctr"/>
+                      <a:endParaRPr lang="en-GB" sz="1800" b="0" dirty="0">
+                        <a:solidFill>
+                          <a:schemeClr val="tx1"/>
+                        </a:solidFill>
+                      </a:endParaRPr>
+                    </a:p>
+                  </a:txBody>
+                  <a:tcPr anchor="ctr">
+                    <a:lnL w="12700" cap="flat" cmpd="sng" algn="ctr">
+                      <a:noFill/>
+                      <a:prstDash val="solid"/>
+                      <a:round/>
+                      <a:headEnd type="none" w="med" len="med"/>
+                      <a:tailEnd type="none" w="med" len="med"/>
+                    </a:lnL>
+                    <a:lnR w="12700" cap="flat" cmpd="sng" algn="ctr">
+                      <a:noFill/>
+                      <a:prstDash val="solid"/>
+                      <a:round/>
+                      <a:headEnd type="none" w="med" len="med"/>
+                      <a:tailEnd type="none" w="med" len="med"/>
+                    </a:lnR>
+                    <a:lnT w="12700" cap="flat" cmpd="sng" algn="ctr">
+                      <a:noFill/>
+                      <a:prstDash val="solid"/>
+                      <a:round/>
+                      <a:headEnd type="none" w="med" len="med"/>
+                      <a:tailEnd type="none" w="med" len="med"/>
+                    </a:lnT>
+                    <a:lnB w="12700" cap="flat" cmpd="sng" algn="ctr">
+                      <a:noFill/>
+                      <a:prstDash val="solid"/>
+                      <a:round/>
+                      <a:headEnd type="none" w="med" len="med"/>
+                      <a:tailEnd type="none" w="med" len="med"/>
+                    </a:lnB>
+                    <a:lnTlToBr w="12700" cmpd="sng">
+                      <a:noFill/>
+                      <a:prstDash val="solid"/>
+                    </a:lnTlToBr>
+                    <a:lnBlToTr w="12700" cmpd="sng">
+                      <a:noFill/>
+                      <a:prstDash val="solid"/>
+                    </a:lnBlToTr>
+                    <a:solidFill>
+                      <a:schemeClr val="bg1"/>
+                    </a:solidFill>
+                  </a:tcPr>
+                </a:tc>
+                <a:extLst>
+                  <a:ext uri="{0D108BD9-81ED-4DB2-BD59-A6C34878D82A}">
+                    <a16:rowId xmlns:a16="http://schemas.microsoft.com/office/drawing/2014/main" val="1073739229"/>
+                  </a:ext>
+                </a:extLst>
+              </a:tr>
+              <a:tr h="462697">
+                <a:tc>
+                  <a:txBody>
+                    <a:bodyPr/>
+                    <a:lstStyle/>
+                    <a:p>
+                      <a:pPr algn="ctr"/>
+                      <a:r>
+                        <a:rPr lang="en-GB" sz="1800" b="1" dirty="0">
+                          <a:solidFill>
+                            <a:schemeClr val="tx1"/>
+                          </a:solidFill>
+                        </a:rPr>
+                        <a:t>Y3</a:t>
+                      </a:r>
+                    </a:p>
+                  </a:txBody>
+                  <a:tcPr anchor="ctr">
+                    <a:lnL w="12700" cap="flat" cmpd="sng" algn="ctr">
+                      <a:solidFill>
+                        <a:schemeClr val="tx1"/>
+                      </a:solidFill>
+                      <a:prstDash val="solid"/>
+                      <a:round/>
+                      <a:headEnd type="none" w="med" len="med"/>
+                      <a:tailEnd type="none" w="med" len="med"/>
+                    </a:lnL>
+                    <a:lnR w="12700" cap="flat" cmpd="sng" algn="ctr">
+                      <a:solidFill>
+                        <a:schemeClr val="tx1"/>
+                      </a:solidFill>
+                      <a:prstDash val="solid"/>
+                      <a:round/>
+                      <a:headEnd type="none" w="med" len="med"/>
+                      <a:tailEnd type="none" w="med" len="med"/>
+                    </a:lnR>
+                    <a:lnT w="12700" cap="flat" cmpd="sng" algn="ctr">
+                      <a:solidFill>
+                        <a:schemeClr val="tx1"/>
+                      </a:solidFill>
+                      <a:prstDash val="solid"/>
+                      <a:round/>
+                      <a:headEnd type="none" w="med" len="med"/>
+                      <a:tailEnd type="none" w="med" len="med"/>
+                    </a:lnT>
+                    <a:lnB w="12700" cap="flat" cmpd="sng" algn="ctr">
+                      <a:solidFill>
+                        <a:schemeClr val="tx1"/>
+                      </a:solidFill>
+                      <a:prstDash val="solid"/>
+                      <a:round/>
+                      <a:headEnd type="none" w="med" len="med"/>
+                      <a:tailEnd type="none" w="med" len="med"/>
+                    </a:lnB>
+                    <a:lnTlToBr w="12700" cmpd="sng">
+                      <a:noFill/>
+                      <a:prstDash val="solid"/>
+                    </a:lnTlToBr>
+                    <a:lnBlToTr w="12700" cmpd="sng">
+                      <a:noFill/>
+                      <a:prstDash val="solid"/>
+                    </a:lnBlToTr>
+                    <a:solidFill>
+                      <a:schemeClr val="bg1"/>
+                    </a:solidFill>
+                  </a:tcPr>
+                </a:tc>
+                <a:tc>
+                  <a:txBody>
+                    <a:bodyPr/>
+                    <a:lstStyle/>
+                    <a:p>
+                      <a:pPr algn="ctr"/>
+                      <a:r>
+                        <a:rPr lang="en-GB" sz="1800" b="0" dirty="0">
+                          <a:solidFill>
+                            <a:schemeClr val="tx1"/>
+                          </a:solidFill>
+                        </a:rPr>
+                        <a:t>cov</a:t>
+                      </a:r>
+                      <a:r>
+                        <a:rPr lang="en-GB" sz="1800" b="0" baseline="-25000" dirty="0">
+                          <a:solidFill>
+                            <a:schemeClr val="tx1"/>
+                          </a:solidFill>
+                        </a:rPr>
+                        <a:t>3.1</a:t>
+                      </a:r>
+                      <a:endParaRPr lang="en-GB" sz="1800" b="0" dirty="0">
+                        <a:solidFill>
+                          <a:schemeClr val="tx1"/>
+                        </a:solidFill>
+                      </a:endParaRPr>
+                    </a:p>
+                  </a:txBody>
+                  <a:tcPr anchor="ctr">
+                    <a:lnL w="12700" cap="flat" cmpd="sng" algn="ctr">
+                      <a:solidFill>
+                        <a:schemeClr val="tx1"/>
+                      </a:solidFill>
+                      <a:prstDash val="solid"/>
+                      <a:round/>
+                      <a:headEnd type="none" w="med" len="med"/>
+                      <a:tailEnd type="none" w="med" len="med"/>
+                    </a:lnL>
+                    <a:lnR w="12700" cap="flat" cmpd="sng" algn="ctr">
+                      <a:noFill/>
+                      <a:prstDash val="solid"/>
+                      <a:round/>
+                      <a:headEnd type="none" w="med" len="med"/>
+                      <a:tailEnd type="none" w="med" len="med"/>
+                    </a:lnR>
+                    <a:lnT w="12700" cap="flat" cmpd="sng" algn="ctr">
+                      <a:noFill/>
+                      <a:prstDash val="solid"/>
+                      <a:round/>
+                      <a:headEnd type="none" w="med" len="med"/>
+                      <a:tailEnd type="none" w="med" len="med"/>
+                    </a:lnT>
+                    <a:lnB w="12700" cap="flat" cmpd="sng" algn="ctr">
+                      <a:noFill/>
+                      <a:prstDash val="solid"/>
+                      <a:round/>
+                      <a:headEnd type="none" w="med" len="med"/>
+                      <a:tailEnd type="none" w="med" len="med"/>
+                    </a:lnB>
+                    <a:lnTlToBr w="12700" cmpd="sng">
+                      <a:noFill/>
+                      <a:prstDash val="solid"/>
+                    </a:lnTlToBr>
+                    <a:lnBlToTr w="12700" cmpd="sng">
+                      <a:noFill/>
+                      <a:prstDash val="solid"/>
+                    </a:lnBlToTr>
+                    <a:solidFill>
+                      <a:schemeClr val="bg1"/>
+                    </a:solidFill>
+                  </a:tcPr>
+                </a:tc>
+                <a:tc>
+                  <a:txBody>
+                    <a:bodyPr/>
+                    <a:lstStyle/>
+                    <a:p>
+                      <a:pPr algn="ctr"/>
+                      <a:r>
+                        <a:rPr lang="en-GB" sz="1800" b="0" dirty="0">
+                          <a:solidFill>
+                            <a:schemeClr val="tx1"/>
+                          </a:solidFill>
+                        </a:rPr>
+                        <a:t>cov</a:t>
+                      </a:r>
+                      <a:r>
+                        <a:rPr lang="en-GB" sz="1800" b="0" baseline="-25000" dirty="0">
+                          <a:solidFill>
+                            <a:schemeClr val="tx1"/>
+                          </a:solidFill>
+                        </a:rPr>
+                        <a:t>3.2</a:t>
+                      </a:r>
+                      <a:endParaRPr lang="en-GB" sz="1800" b="0" dirty="0">
+                        <a:solidFill>
+                          <a:schemeClr val="tx1"/>
+                        </a:solidFill>
+                      </a:endParaRPr>
+                    </a:p>
+                  </a:txBody>
+                  <a:tcPr anchor="ctr">
+                    <a:lnL w="12700" cap="flat" cmpd="sng" algn="ctr">
+                      <a:noFill/>
+                      <a:prstDash val="solid"/>
+                      <a:round/>
+                      <a:headEnd type="none" w="med" len="med"/>
+                      <a:tailEnd type="none" w="med" len="med"/>
+                    </a:lnL>
+                    <a:lnR w="12700" cap="flat" cmpd="sng" algn="ctr">
+                      <a:noFill/>
+                      <a:prstDash val="solid"/>
+                      <a:round/>
+                      <a:headEnd type="none" w="med" len="med"/>
+                      <a:tailEnd type="none" w="med" len="med"/>
+                    </a:lnR>
+                    <a:lnT w="12700" cap="flat" cmpd="sng" algn="ctr">
+                      <a:noFill/>
+                      <a:prstDash val="solid"/>
+                      <a:round/>
+                      <a:headEnd type="none" w="med" len="med"/>
+                      <a:tailEnd type="none" w="med" len="med"/>
+                    </a:lnT>
+                    <a:lnB w="12700" cap="flat" cmpd="sng" algn="ctr">
+                      <a:noFill/>
+                      <a:prstDash val="solid"/>
+                      <a:round/>
+                      <a:headEnd type="none" w="med" len="med"/>
+                      <a:tailEnd type="none" w="med" len="med"/>
+                    </a:lnB>
+                    <a:lnTlToBr w="12700" cmpd="sng">
+                      <a:noFill/>
+                      <a:prstDash val="solid"/>
+                    </a:lnTlToBr>
+                    <a:lnBlToTr w="12700" cmpd="sng">
+                      <a:noFill/>
+                      <a:prstDash val="solid"/>
+                    </a:lnBlToTr>
+                    <a:solidFill>
+                      <a:schemeClr val="bg1"/>
+                    </a:solidFill>
+                  </a:tcPr>
+                </a:tc>
+                <a:tc>
+                  <a:txBody>
+                    <a:bodyPr/>
+                    <a:lstStyle/>
+                    <a:p>
+                      <a:pPr algn="ctr"/>
+                      <a:r>
+                        <a:rPr lang="en-GB" sz="1800" b="0" dirty="0">
+                          <a:solidFill>
+                            <a:schemeClr val="tx1"/>
+                          </a:solidFill>
+                        </a:rPr>
+                        <a:t>var</a:t>
+                      </a:r>
+                      <a:r>
+                        <a:rPr lang="en-GB" sz="1800" b="0" baseline="-25000" dirty="0">
+                          <a:solidFill>
+                            <a:schemeClr val="tx1"/>
+                          </a:solidFill>
+                        </a:rPr>
+                        <a:t>3</a:t>
+                      </a:r>
+                      <a:endParaRPr lang="en-GB" sz="1800" b="0" dirty="0">
+                        <a:solidFill>
+                          <a:schemeClr val="tx1"/>
+                        </a:solidFill>
+                      </a:endParaRPr>
+                    </a:p>
+                  </a:txBody>
+                  <a:tcPr anchor="ctr">
+                    <a:lnL w="12700" cap="flat" cmpd="sng" algn="ctr">
+                      <a:noFill/>
+                      <a:prstDash val="solid"/>
+                      <a:round/>
+                      <a:headEnd type="none" w="med" len="med"/>
+                      <a:tailEnd type="none" w="med" len="med"/>
+                    </a:lnL>
+                    <a:lnR w="12700" cap="flat" cmpd="sng" algn="ctr">
+                      <a:noFill/>
+                      <a:prstDash val="solid"/>
+                      <a:round/>
+                      <a:headEnd type="none" w="med" len="med"/>
+                      <a:tailEnd type="none" w="med" len="med"/>
+                    </a:lnR>
+                    <a:lnT w="12700" cap="flat" cmpd="sng" algn="ctr">
+                      <a:noFill/>
+                      <a:prstDash val="solid"/>
+                      <a:round/>
+                      <a:headEnd type="none" w="med" len="med"/>
+                      <a:tailEnd type="none" w="med" len="med"/>
+                    </a:lnT>
+                    <a:lnB w="12700" cap="flat" cmpd="sng" algn="ctr">
+                      <a:noFill/>
+                      <a:prstDash val="solid"/>
+                      <a:round/>
+                      <a:headEnd type="none" w="med" len="med"/>
+                      <a:tailEnd type="none" w="med" len="med"/>
+                    </a:lnB>
+                    <a:lnTlToBr w="12700" cmpd="sng">
+                      <a:noFill/>
+                      <a:prstDash val="solid"/>
+                    </a:lnTlToBr>
+                    <a:lnBlToTr w="12700" cmpd="sng">
+                      <a:noFill/>
+                      <a:prstDash val="solid"/>
+                    </a:lnBlToTr>
+                    <a:solidFill>
+                      <a:schemeClr val="bg1"/>
+                    </a:solidFill>
+                  </a:tcPr>
+                </a:tc>
+                <a:tc>
+                  <a:txBody>
+                    <a:bodyPr/>
+                    <a:lstStyle/>
+                    <a:p>
+                      <a:pPr algn="ctr"/>
+                      <a:endParaRPr lang="en-GB" sz="1800" b="0" dirty="0">
+                        <a:solidFill>
+                          <a:schemeClr val="tx1"/>
+                        </a:solidFill>
+                      </a:endParaRPr>
+                    </a:p>
+                  </a:txBody>
+                  <a:tcPr anchor="ctr">
+                    <a:lnL w="12700" cap="flat" cmpd="sng" algn="ctr">
+                      <a:noFill/>
+                      <a:prstDash val="solid"/>
+                      <a:round/>
+                      <a:headEnd type="none" w="med" len="med"/>
+                      <a:tailEnd type="none" w="med" len="med"/>
+                    </a:lnL>
+                    <a:lnR w="12700" cap="flat" cmpd="sng" algn="ctr">
+                      <a:noFill/>
+                      <a:prstDash val="solid"/>
+                      <a:round/>
+                      <a:headEnd type="none" w="med" len="med"/>
+                      <a:tailEnd type="none" w="med" len="med"/>
+                    </a:lnR>
+                    <a:lnT w="12700" cap="flat" cmpd="sng" algn="ctr">
+                      <a:noFill/>
+                      <a:prstDash val="solid"/>
+                      <a:round/>
+                      <a:headEnd type="none" w="med" len="med"/>
+                      <a:tailEnd type="none" w="med" len="med"/>
+                    </a:lnT>
+                    <a:lnB w="12700" cap="flat" cmpd="sng" algn="ctr">
+                      <a:noFill/>
+                      <a:prstDash val="solid"/>
+                      <a:round/>
+                      <a:headEnd type="none" w="med" len="med"/>
+                      <a:tailEnd type="none" w="med" len="med"/>
+                    </a:lnB>
+                    <a:lnTlToBr w="12700" cmpd="sng">
+                      <a:noFill/>
+                      <a:prstDash val="solid"/>
+                    </a:lnTlToBr>
+                    <a:lnBlToTr w="12700" cmpd="sng">
+                      <a:noFill/>
+                      <a:prstDash val="solid"/>
+                    </a:lnBlToTr>
+                    <a:solidFill>
+                      <a:schemeClr val="bg1"/>
+                    </a:solidFill>
+                  </a:tcPr>
+                </a:tc>
+                <a:extLst>
+                  <a:ext uri="{0D108BD9-81ED-4DB2-BD59-A6C34878D82A}">
+                    <a16:rowId xmlns:a16="http://schemas.microsoft.com/office/drawing/2014/main" val="1915547210"/>
+                  </a:ext>
+                </a:extLst>
+              </a:tr>
+              <a:tr h="462697">
+                <a:tc>
+                  <a:txBody>
+                    <a:bodyPr/>
+                    <a:lstStyle/>
+                    <a:p>
+                      <a:pPr algn="ctr"/>
+                      <a:r>
+                        <a:rPr lang="en-GB" sz="1800" b="1" dirty="0">
+                          <a:solidFill>
+                            <a:schemeClr val="tx1"/>
+                          </a:solidFill>
+                        </a:rPr>
+                        <a:t>Y4</a:t>
+                      </a:r>
+                    </a:p>
+                  </a:txBody>
+                  <a:tcPr anchor="ctr">
+                    <a:lnL w="12700" cap="flat" cmpd="sng" algn="ctr">
+                      <a:solidFill>
+                        <a:schemeClr val="tx1"/>
+                      </a:solidFill>
+                      <a:prstDash val="solid"/>
+                      <a:round/>
+                      <a:headEnd type="none" w="med" len="med"/>
+                      <a:tailEnd type="none" w="med" len="med"/>
+                    </a:lnL>
+                    <a:lnR w="12700" cap="flat" cmpd="sng" algn="ctr">
+                      <a:solidFill>
+                        <a:schemeClr val="tx1"/>
+                      </a:solidFill>
+                      <a:prstDash val="solid"/>
+                      <a:round/>
+                      <a:headEnd type="none" w="med" len="med"/>
+                      <a:tailEnd type="none" w="med" len="med"/>
+                    </a:lnR>
+                    <a:lnT w="12700" cap="flat" cmpd="sng" algn="ctr">
+                      <a:solidFill>
+                        <a:schemeClr val="tx1"/>
+                      </a:solidFill>
+                      <a:prstDash val="solid"/>
+                      <a:round/>
+                      <a:headEnd type="none" w="med" len="med"/>
+                      <a:tailEnd type="none" w="med" len="med"/>
+                    </a:lnT>
+                    <a:lnB w="12700" cap="flat" cmpd="sng" algn="ctr">
+                      <a:solidFill>
+                        <a:schemeClr val="tx1"/>
+                      </a:solidFill>
+                      <a:prstDash val="solid"/>
+                      <a:round/>
+                      <a:headEnd type="none" w="med" len="med"/>
+                      <a:tailEnd type="none" w="med" len="med"/>
+                    </a:lnB>
+                    <a:lnTlToBr w="12700" cmpd="sng">
+                      <a:noFill/>
+                      <a:prstDash val="solid"/>
+                    </a:lnTlToBr>
+                    <a:lnBlToTr w="12700" cmpd="sng">
+                      <a:noFill/>
+                      <a:prstDash val="solid"/>
+                    </a:lnBlToTr>
+                    <a:solidFill>
+                      <a:schemeClr val="bg1"/>
+                    </a:solidFill>
+                  </a:tcPr>
+                </a:tc>
+                <a:tc>
+                  <a:txBody>
+                    <a:bodyPr/>
+                    <a:lstStyle/>
+                    <a:p>
+                      <a:pPr algn="ctr"/>
+                      <a:r>
+                        <a:rPr lang="en-GB" sz="1800" b="0" dirty="0">
+                          <a:solidFill>
+                            <a:schemeClr val="tx1"/>
+                          </a:solidFill>
+                        </a:rPr>
+                        <a:t>cov</a:t>
+                      </a:r>
+                      <a:r>
+                        <a:rPr lang="en-GB" sz="1800" b="0" baseline="-25000" dirty="0">
+                          <a:solidFill>
+                            <a:schemeClr val="tx1"/>
+                          </a:solidFill>
+                        </a:rPr>
+                        <a:t>4.1</a:t>
+                      </a:r>
+                      <a:endParaRPr lang="en-GB" sz="1800" b="0" dirty="0">
+                        <a:solidFill>
+                          <a:schemeClr val="tx1"/>
+                        </a:solidFill>
+                      </a:endParaRPr>
+                    </a:p>
+                  </a:txBody>
+                  <a:tcPr anchor="ctr">
+                    <a:lnL w="12700" cap="flat" cmpd="sng" algn="ctr">
+                      <a:solidFill>
+                        <a:schemeClr val="tx1"/>
+                      </a:solidFill>
+                      <a:prstDash val="solid"/>
+                      <a:round/>
+                      <a:headEnd type="none" w="med" len="med"/>
+                      <a:tailEnd type="none" w="med" len="med"/>
+                    </a:lnL>
+                    <a:lnR w="12700" cap="flat" cmpd="sng" algn="ctr">
+                      <a:noFill/>
+                      <a:prstDash val="solid"/>
+                      <a:round/>
+                      <a:headEnd type="none" w="med" len="med"/>
+                      <a:tailEnd type="none" w="med" len="med"/>
+                    </a:lnR>
+                    <a:lnT w="12700" cap="flat" cmpd="sng" algn="ctr">
+                      <a:noFill/>
+                      <a:prstDash val="solid"/>
+                      <a:round/>
+                      <a:headEnd type="none" w="med" len="med"/>
+                      <a:tailEnd type="none" w="med" len="med"/>
+                    </a:lnT>
+                    <a:lnB w="12700" cap="flat" cmpd="sng" algn="ctr">
+                      <a:noFill/>
+                      <a:prstDash val="solid"/>
+                      <a:round/>
+                      <a:headEnd type="none" w="med" len="med"/>
+                      <a:tailEnd type="none" w="med" len="med"/>
+                    </a:lnB>
+                    <a:lnTlToBr w="12700" cmpd="sng">
+                      <a:noFill/>
+                      <a:prstDash val="solid"/>
+                    </a:lnTlToBr>
+                    <a:lnBlToTr w="12700" cmpd="sng">
+                      <a:noFill/>
+                      <a:prstDash val="solid"/>
+                    </a:lnBlToTr>
+                    <a:solidFill>
+                      <a:schemeClr val="bg1"/>
+                    </a:solidFill>
+                  </a:tcPr>
+                </a:tc>
+                <a:tc>
+                  <a:txBody>
+                    <a:bodyPr/>
+                    <a:lstStyle/>
+                    <a:p>
+                      <a:pPr algn="ctr"/>
+                      <a:r>
+                        <a:rPr lang="en-GB" sz="1800" b="0" dirty="0">
+                          <a:solidFill>
+                            <a:schemeClr val="tx1"/>
+                          </a:solidFill>
+                        </a:rPr>
+                        <a:t>cov</a:t>
+                      </a:r>
+                      <a:r>
+                        <a:rPr lang="en-GB" sz="1800" b="0" baseline="-25000" dirty="0">
+                          <a:solidFill>
+                            <a:schemeClr val="tx1"/>
+                          </a:solidFill>
+                        </a:rPr>
+                        <a:t>4.2</a:t>
+                      </a:r>
+                      <a:endParaRPr lang="en-GB" sz="1800" b="0" dirty="0">
+                        <a:solidFill>
+                          <a:schemeClr val="tx1"/>
+                        </a:solidFill>
+                      </a:endParaRPr>
+                    </a:p>
+                  </a:txBody>
+                  <a:tcPr anchor="ctr">
+                    <a:lnL w="12700" cap="flat" cmpd="sng" algn="ctr">
+                      <a:noFill/>
+                      <a:prstDash val="solid"/>
+                      <a:round/>
+                      <a:headEnd type="none" w="med" len="med"/>
+                      <a:tailEnd type="none" w="med" len="med"/>
+                    </a:lnL>
+                    <a:lnR w="12700" cap="flat" cmpd="sng" algn="ctr">
+                      <a:noFill/>
+                      <a:prstDash val="solid"/>
+                      <a:round/>
+                      <a:headEnd type="none" w="med" len="med"/>
+                      <a:tailEnd type="none" w="med" len="med"/>
+                    </a:lnR>
+                    <a:lnT w="12700" cap="flat" cmpd="sng" algn="ctr">
+                      <a:noFill/>
+                      <a:prstDash val="solid"/>
+                      <a:round/>
+                      <a:headEnd type="none" w="med" len="med"/>
+                      <a:tailEnd type="none" w="med" len="med"/>
+                    </a:lnT>
+                    <a:lnB w="12700" cap="flat" cmpd="sng" algn="ctr">
+                      <a:noFill/>
+                      <a:prstDash val="solid"/>
+                      <a:round/>
+                      <a:headEnd type="none" w="med" len="med"/>
+                      <a:tailEnd type="none" w="med" len="med"/>
+                    </a:lnB>
+                    <a:lnTlToBr w="12700" cmpd="sng">
+                      <a:noFill/>
+                      <a:prstDash val="solid"/>
+                    </a:lnTlToBr>
+                    <a:lnBlToTr w="12700" cmpd="sng">
+                      <a:noFill/>
+                      <a:prstDash val="solid"/>
+                    </a:lnBlToTr>
+                    <a:solidFill>
+                      <a:schemeClr val="bg1"/>
+                    </a:solidFill>
+                  </a:tcPr>
+                </a:tc>
+                <a:tc>
+                  <a:txBody>
+                    <a:bodyPr/>
+                    <a:lstStyle/>
+                    <a:p>
+                      <a:pPr marL="0" marR="0" lvl="0" indent="0" algn="ctr" defTabSz="914400" rtl="0" eaLnBrk="1" fontAlgn="auto" latinLnBrk="0" hangingPunct="1">
+                        <a:lnSpc>
+                          <a:spcPct val="100000"/>
+                        </a:lnSpc>
+                        <a:spcBef>
+                          <a:spcPts val="0"/>
+                        </a:spcBef>
+                        <a:spcAft>
+                          <a:spcPts val="0"/>
+                        </a:spcAft>
+                        <a:buClrTx/>
+                        <a:buSzTx/>
+                        <a:buFontTx/>
+                        <a:buNone/>
+                        <a:tabLst/>
+                        <a:defRPr/>
+                      </a:pPr>
+                      <a:r>
+                        <a:rPr lang="en-GB" sz="1800" b="0" dirty="0">
+                          <a:solidFill>
+                            <a:schemeClr val="tx1"/>
+                          </a:solidFill>
+                        </a:rPr>
+                        <a:t>cov</a:t>
+                      </a:r>
+                      <a:r>
+                        <a:rPr lang="en-GB" sz="1800" b="0" baseline="-25000" dirty="0">
+                          <a:solidFill>
+                            <a:schemeClr val="tx1"/>
+                          </a:solidFill>
+                        </a:rPr>
+                        <a:t>4.3</a:t>
+                      </a:r>
+                      <a:endParaRPr lang="en-GB" sz="1800" b="0" dirty="0">
+                        <a:solidFill>
+                          <a:schemeClr val="tx1"/>
+                        </a:solidFill>
+                      </a:endParaRPr>
+                    </a:p>
+                  </a:txBody>
+                  <a:tcPr anchor="ctr">
+                    <a:lnL w="12700" cap="flat" cmpd="sng" algn="ctr">
+                      <a:noFill/>
+                      <a:prstDash val="solid"/>
+                      <a:round/>
+                      <a:headEnd type="none" w="med" len="med"/>
+                      <a:tailEnd type="none" w="med" len="med"/>
+                    </a:lnL>
+                    <a:lnR w="12700" cap="flat" cmpd="sng" algn="ctr">
+                      <a:noFill/>
+                      <a:prstDash val="solid"/>
+                      <a:round/>
+                      <a:headEnd type="none" w="med" len="med"/>
+                      <a:tailEnd type="none" w="med" len="med"/>
+                    </a:lnR>
+                    <a:lnT w="12700" cap="flat" cmpd="sng" algn="ctr">
+                      <a:noFill/>
+                      <a:prstDash val="solid"/>
+                      <a:round/>
+                      <a:headEnd type="none" w="med" len="med"/>
+                      <a:tailEnd type="none" w="med" len="med"/>
+                    </a:lnT>
+                    <a:lnB w="12700" cap="flat" cmpd="sng" algn="ctr">
+                      <a:noFill/>
+                      <a:prstDash val="solid"/>
+                      <a:round/>
+                      <a:headEnd type="none" w="med" len="med"/>
+                      <a:tailEnd type="none" w="med" len="med"/>
+                    </a:lnB>
+                    <a:lnTlToBr w="12700" cmpd="sng">
+                      <a:noFill/>
+                      <a:prstDash val="solid"/>
+                    </a:lnTlToBr>
+                    <a:lnBlToTr w="12700" cmpd="sng">
+                      <a:noFill/>
+                      <a:prstDash val="solid"/>
+                    </a:lnBlToTr>
+                    <a:solidFill>
+                      <a:schemeClr val="bg1"/>
+                    </a:solidFill>
+                  </a:tcPr>
+                </a:tc>
+                <a:tc>
+                  <a:txBody>
+                    <a:bodyPr/>
+                    <a:lstStyle/>
+                    <a:p>
+                      <a:pPr algn="ctr"/>
+                      <a:r>
+                        <a:rPr lang="en-GB" sz="1800" b="0" dirty="0">
+                          <a:solidFill>
+                            <a:schemeClr val="tx1"/>
+                          </a:solidFill>
+                        </a:rPr>
+                        <a:t>var</a:t>
+                      </a:r>
+                      <a:r>
+                        <a:rPr lang="en-GB" sz="1800" b="0" baseline="-25000" dirty="0">
+                          <a:solidFill>
+                            <a:schemeClr val="tx1"/>
+                          </a:solidFill>
+                        </a:rPr>
+                        <a:t>4</a:t>
+                      </a:r>
+                      <a:endParaRPr lang="en-GB" sz="1800" b="0" dirty="0">
+                        <a:solidFill>
+                          <a:schemeClr val="tx1"/>
+                        </a:solidFill>
+                      </a:endParaRPr>
+                    </a:p>
+                  </a:txBody>
+                  <a:tcPr anchor="ctr">
+                    <a:lnL w="12700" cap="flat" cmpd="sng" algn="ctr">
+                      <a:noFill/>
+                      <a:prstDash val="solid"/>
+                      <a:round/>
+                      <a:headEnd type="none" w="med" len="med"/>
+                      <a:tailEnd type="none" w="med" len="med"/>
+                    </a:lnL>
+                    <a:lnR w="12700" cap="flat" cmpd="sng" algn="ctr">
+                      <a:noFill/>
+                      <a:prstDash val="solid"/>
+                      <a:round/>
+                      <a:headEnd type="none" w="med" len="med"/>
+                      <a:tailEnd type="none" w="med" len="med"/>
+                    </a:lnR>
+                    <a:lnT w="12700" cap="flat" cmpd="sng" algn="ctr">
+                      <a:noFill/>
+                      <a:prstDash val="solid"/>
+                      <a:round/>
+                      <a:headEnd type="none" w="med" len="med"/>
+                      <a:tailEnd type="none" w="med" len="med"/>
+                    </a:lnT>
+                    <a:lnB w="12700" cap="flat" cmpd="sng" algn="ctr">
+                      <a:noFill/>
+                      <a:prstDash val="solid"/>
+                      <a:round/>
+                      <a:headEnd type="none" w="med" len="med"/>
+                      <a:tailEnd type="none" w="med" len="med"/>
+                    </a:lnB>
+                    <a:lnTlToBr w="12700" cmpd="sng">
+                      <a:noFill/>
+                      <a:prstDash val="solid"/>
+                    </a:lnTlToBr>
+                    <a:lnBlToTr w="12700" cmpd="sng">
+                      <a:noFill/>
+                      <a:prstDash val="solid"/>
+                    </a:lnBlToTr>
+                    <a:solidFill>
+                      <a:schemeClr val="bg1"/>
+                    </a:solidFill>
+                  </a:tcPr>
+                </a:tc>
+                <a:extLst>
+                  <a:ext uri="{0D108BD9-81ED-4DB2-BD59-A6C34878D82A}">
+                    <a16:rowId xmlns:a16="http://schemas.microsoft.com/office/drawing/2014/main" val="1045833436"/>
+                  </a:ext>
+                </a:extLst>
+              </a:tr>
+            </a:tbl>
+          </a:graphicData>
+        </a:graphic>
+      </p:graphicFrame>
+      <p:sp>
+        <p:nvSpPr>
+          <p:cNvPr id="55" name="TextBox 54">
+            <a:extLst>
+              <a:ext uri="{FF2B5EF4-FFF2-40B4-BE49-F238E27FC236}">
+                <a16:creationId xmlns:a16="http://schemas.microsoft.com/office/drawing/2014/main" id="{9B10F716-A1B8-3C21-3D8E-06DECAE2CD13}"/>
+              </a:ext>
+            </a:extLst>
+          </p:cNvPr>
+          <p:cNvSpPr txBox="1"/>
+          <p:nvPr/>
+        </p:nvSpPr>
+        <p:spPr>
+          <a:xfrm>
+            <a:off x="368900" y="449679"/>
+            <a:ext cx="4715671" cy="1384995"/>
+          </a:xfrm>
+          <a:prstGeom prst="rect">
+            <a:avLst/>
+          </a:prstGeom>
+          <a:noFill/>
+        </p:spPr>
+        <p:txBody>
+          <a:bodyPr wrap="square" rtlCol="0">
+            <a:spAutoFit/>
+          </a:bodyPr>
+          <a:lstStyle/>
+          <a:p>
+            <a:r>
+              <a:rPr lang="en-GB" sz="2800" dirty="0"/>
+              <a:t>Observed covariance matrix</a:t>
+            </a:r>
+          </a:p>
+          <a:p>
+            <a:endParaRPr lang="en-GB" sz="2800" dirty="0"/>
+          </a:p>
+          <a:p>
+            <a:r>
+              <a:rPr lang="en-GB" sz="2800" dirty="0"/>
+              <a:t>10 knowns:</a:t>
+            </a:r>
+          </a:p>
+        </p:txBody>
+      </p:sp>
+      <p:sp>
+        <p:nvSpPr>
+          <p:cNvPr id="56" name="Arc 55">
+            <a:extLst>
+              <a:ext uri="{FF2B5EF4-FFF2-40B4-BE49-F238E27FC236}">
+                <a16:creationId xmlns:a16="http://schemas.microsoft.com/office/drawing/2014/main" id="{C36F94B1-BA3F-CDE5-1868-8FC7C0509A5E}"/>
+              </a:ext>
+            </a:extLst>
+          </p:cNvPr>
+          <p:cNvSpPr/>
+          <p:nvPr/>
+        </p:nvSpPr>
+        <p:spPr>
+          <a:xfrm rot="15103718">
+            <a:off x="8318188" y="1281430"/>
+            <a:ext cx="721895" cy="705852"/>
+          </a:xfrm>
+          <a:prstGeom prst="arc">
+            <a:avLst>
+              <a:gd name="adj1" fmla="val 16200000"/>
+              <a:gd name="adj2" fmla="val 13932934"/>
+            </a:avLst>
+          </a:prstGeom>
+          <a:noFill/>
+          <a:ln w="38100">
+            <a:solidFill>
+              <a:schemeClr val="tx1"/>
+            </a:solidFill>
+            <a:headEnd type="triangle" w="lg" len="lg"/>
+            <a:tailEnd type="triangle" w="lg" len="lg"/>
+          </a:ln>
+        </p:spPr>
+        <p:style>
+          <a:lnRef idx="1">
+            <a:schemeClr val="accent1"/>
+          </a:lnRef>
+          <a:fillRef idx="0">
+            <a:schemeClr val="accent1"/>
+          </a:fillRef>
+          <a:effectRef idx="0">
+            <a:schemeClr val="accent1"/>
+          </a:effectRef>
+          <a:fontRef idx="minor">
+            <a:schemeClr val="tx1"/>
+          </a:fontRef>
+        </p:style>
+        <p:txBody>
+          <a:bodyPr rtlCol="0" anchor="ctr"/>
+          <a:lstStyle/>
+          <a:p>
+            <a:pPr algn="ctr"/>
+            <a:endParaRPr lang="en-GB" sz="3200"/>
+          </a:p>
+        </p:txBody>
+      </p:sp>
+      <p:sp>
+        <p:nvSpPr>
+          <p:cNvPr id="57" name="Oval 56">
+            <a:extLst>
+              <a:ext uri="{FF2B5EF4-FFF2-40B4-BE49-F238E27FC236}">
+                <a16:creationId xmlns:a16="http://schemas.microsoft.com/office/drawing/2014/main" id="{98820277-2EDF-0BFE-4467-A6BC10B46140}"/>
+              </a:ext>
+            </a:extLst>
+          </p:cNvPr>
+          <p:cNvSpPr/>
+          <p:nvPr/>
+        </p:nvSpPr>
+        <p:spPr>
+          <a:xfrm>
+            <a:off x="5200993" y="4852087"/>
+            <a:ext cx="812744" cy="623385"/>
+          </a:xfrm>
+          <a:prstGeom prst="ellipse">
+            <a:avLst/>
+          </a:prstGeom>
+          <a:solidFill>
+            <a:schemeClr val="bg1"/>
+          </a:solidFill>
+          <a:ln>
+            <a:solidFill>
+              <a:schemeClr val="tx1"/>
+            </a:solidFill>
+          </a:ln>
+        </p:spPr>
+        <p:style>
+          <a:lnRef idx="2">
+            <a:schemeClr val="accent1">
+              <a:shade val="50000"/>
+            </a:schemeClr>
+          </a:lnRef>
+          <a:fillRef idx="1">
+            <a:schemeClr val="accent1"/>
+          </a:fillRef>
+          <a:effectRef idx="0">
+            <a:schemeClr val="accent1"/>
+          </a:effectRef>
+          <a:fontRef idx="minor">
+            <a:schemeClr val="lt1"/>
+          </a:fontRef>
+        </p:style>
+        <p:txBody>
+          <a:bodyPr rtlCol="0" anchor="ctr"/>
+          <a:lstStyle/>
+          <a:p>
+            <a:pPr algn="ctr"/>
+            <a:r>
+              <a:rPr lang="en-GB" sz="2400" dirty="0">
+                <a:solidFill>
+                  <a:schemeClr val="tx1"/>
+                </a:solidFill>
+              </a:rPr>
+              <a:t>u</a:t>
+            </a:r>
+            <a:r>
+              <a:rPr lang="en-GB" sz="2400" baseline="-25000" dirty="0">
+                <a:solidFill>
+                  <a:schemeClr val="tx1"/>
+                </a:solidFill>
+              </a:rPr>
+              <a:t>1</a:t>
+            </a:r>
+            <a:endParaRPr lang="en-GB" sz="2400" dirty="0">
+              <a:solidFill>
+                <a:schemeClr val="tx1"/>
+              </a:solidFill>
+            </a:endParaRPr>
+          </a:p>
+        </p:txBody>
+      </p:sp>
+      <p:cxnSp>
+        <p:nvCxnSpPr>
+          <p:cNvPr id="58" name="Straight Arrow Connector 57">
+            <a:extLst>
+              <a:ext uri="{FF2B5EF4-FFF2-40B4-BE49-F238E27FC236}">
+                <a16:creationId xmlns:a16="http://schemas.microsoft.com/office/drawing/2014/main" id="{41F0D41B-8207-97DB-E8AE-79A44DBB30F6}"/>
+              </a:ext>
+            </a:extLst>
+          </p:cNvPr>
+          <p:cNvCxnSpPr>
+            <a:cxnSpLocks/>
+            <a:stCxn id="57" idx="0"/>
+            <a:endCxn id="44" idx="2"/>
+          </p:cNvCxnSpPr>
+          <p:nvPr/>
+        </p:nvCxnSpPr>
+        <p:spPr>
+          <a:xfrm flipV="1">
+            <a:off x="5607365" y="4323793"/>
+            <a:ext cx="1" cy="528294"/>
+          </a:xfrm>
+          <a:prstGeom prst="straightConnector1">
+            <a:avLst/>
+          </a:prstGeom>
+          <a:ln w="28575">
+            <a:solidFill>
+              <a:schemeClr val="tx1"/>
+            </a:solidFill>
+            <a:tailEnd type="triangle"/>
+          </a:ln>
+        </p:spPr>
+        <p:style>
+          <a:lnRef idx="1">
+            <a:schemeClr val="accent1"/>
+          </a:lnRef>
+          <a:fillRef idx="0">
+            <a:schemeClr val="accent1"/>
+          </a:fillRef>
+          <a:effectRef idx="0">
+            <a:schemeClr val="accent1"/>
+          </a:effectRef>
+          <a:fontRef idx="minor">
+            <a:schemeClr val="tx1"/>
+          </a:fontRef>
+        </p:style>
+      </p:cxnSp>
+      <p:sp>
+        <p:nvSpPr>
+          <p:cNvPr id="59" name="TextBox 58">
+            <a:extLst>
+              <a:ext uri="{FF2B5EF4-FFF2-40B4-BE49-F238E27FC236}">
+                <a16:creationId xmlns:a16="http://schemas.microsoft.com/office/drawing/2014/main" id="{52C51BA4-B23E-3209-4E08-7C2C9007A519}"/>
+              </a:ext>
+            </a:extLst>
+          </p:cNvPr>
+          <p:cNvSpPr txBox="1"/>
+          <p:nvPr/>
+        </p:nvSpPr>
+        <p:spPr>
+          <a:xfrm>
+            <a:off x="5461331" y="5901567"/>
+            <a:ext cx="292068" cy="369332"/>
+          </a:xfrm>
+          <a:prstGeom prst="rect">
+            <a:avLst/>
+          </a:prstGeom>
+          <a:noFill/>
+        </p:spPr>
+        <p:txBody>
+          <a:bodyPr wrap="none" rtlCol="0">
+            <a:spAutoFit/>
+          </a:bodyPr>
+          <a:lstStyle/>
+          <a:p>
+            <a:r>
+              <a:rPr lang="en-GB" b="1" dirty="0">
+                <a:solidFill>
+                  <a:schemeClr val="accent1"/>
+                </a:solidFill>
+              </a:rPr>
+              <a:t>?</a:t>
+            </a:r>
+          </a:p>
+        </p:txBody>
+      </p:sp>
+      <p:sp>
+        <p:nvSpPr>
+          <p:cNvPr id="60" name="Arc 59">
+            <a:extLst>
+              <a:ext uri="{FF2B5EF4-FFF2-40B4-BE49-F238E27FC236}">
+                <a16:creationId xmlns:a16="http://schemas.microsoft.com/office/drawing/2014/main" id="{838D6AB9-6185-6A16-D159-DA8B0AF459E7}"/>
+              </a:ext>
+            </a:extLst>
+          </p:cNvPr>
+          <p:cNvSpPr/>
+          <p:nvPr/>
+        </p:nvSpPr>
+        <p:spPr>
+          <a:xfrm rot="1003916">
+            <a:off x="6887759" y="5451080"/>
+            <a:ext cx="485858" cy="468622"/>
+          </a:xfrm>
+          <a:prstGeom prst="arc">
+            <a:avLst>
+              <a:gd name="adj1" fmla="val 16200000"/>
+              <a:gd name="adj2" fmla="val 13932934"/>
+            </a:avLst>
+          </a:prstGeom>
+          <a:noFill/>
+          <a:ln w="28575">
+            <a:solidFill>
+              <a:schemeClr val="tx1"/>
+            </a:solidFill>
+            <a:headEnd type="triangle" w="lg" len="lg"/>
+            <a:tailEnd type="triangle" w="lg" len="lg"/>
+          </a:ln>
+        </p:spPr>
+        <p:style>
+          <a:lnRef idx="1">
+            <a:schemeClr val="accent1"/>
+          </a:lnRef>
+          <a:fillRef idx="0">
+            <a:schemeClr val="accent1"/>
+          </a:fillRef>
+          <a:effectRef idx="0">
+            <a:schemeClr val="accent1"/>
+          </a:effectRef>
+          <a:fontRef idx="minor">
+            <a:schemeClr val="tx1"/>
+          </a:fontRef>
+        </p:style>
+        <p:txBody>
+          <a:bodyPr rtlCol="0" anchor="ctr"/>
+          <a:lstStyle/>
+          <a:p>
+            <a:pPr algn="ctr"/>
+            <a:endParaRPr lang="en-GB" sz="3200" dirty="0"/>
+          </a:p>
+        </p:txBody>
+      </p:sp>
+      <p:sp>
+        <p:nvSpPr>
+          <p:cNvPr id="61" name="Oval 60">
+            <a:extLst>
+              <a:ext uri="{FF2B5EF4-FFF2-40B4-BE49-F238E27FC236}">
+                <a16:creationId xmlns:a16="http://schemas.microsoft.com/office/drawing/2014/main" id="{9AC4CAC7-F282-5A71-53B0-ABC0F2AA8D4F}"/>
+              </a:ext>
+            </a:extLst>
+          </p:cNvPr>
+          <p:cNvSpPr/>
+          <p:nvPr/>
+        </p:nvSpPr>
+        <p:spPr>
+          <a:xfrm>
+            <a:off x="6724316" y="4852087"/>
+            <a:ext cx="812744" cy="623385"/>
+          </a:xfrm>
+          <a:prstGeom prst="ellipse">
+            <a:avLst/>
+          </a:prstGeom>
+          <a:solidFill>
+            <a:schemeClr val="bg1"/>
+          </a:solidFill>
+          <a:ln>
+            <a:solidFill>
+              <a:schemeClr val="tx1"/>
+            </a:solidFill>
+          </a:ln>
+        </p:spPr>
+        <p:style>
+          <a:lnRef idx="2">
+            <a:schemeClr val="accent1">
+              <a:shade val="50000"/>
+            </a:schemeClr>
+          </a:lnRef>
+          <a:fillRef idx="1">
+            <a:schemeClr val="accent1"/>
+          </a:fillRef>
+          <a:effectRef idx="0">
+            <a:schemeClr val="accent1"/>
+          </a:effectRef>
+          <a:fontRef idx="minor">
+            <a:schemeClr val="lt1"/>
+          </a:fontRef>
+        </p:style>
+        <p:txBody>
+          <a:bodyPr rtlCol="0" anchor="ctr"/>
+          <a:lstStyle/>
+          <a:p>
+            <a:pPr algn="ctr"/>
+            <a:r>
+              <a:rPr lang="en-GB" sz="2400" dirty="0">
+                <a:solidFill>
+                  <a:schemeClr val="tx1"/>
+                </a:solidFill>
+              </a:rPr>
+              <a:t>u</a:t>
+            </a:r>
+            <a:r>
+              <a:rPr lang="en-GB" sz="2400" baseline="-25000" dirty="0">
+                <a:solidFill>
+                  <a:schemeClr val="tx1"/>
+                </a:solidFill>
+              </a:rPr>
+              <a:t>2</a:t>
+            </a:r>
+            <a:endParaRPr lang="en-GB" sz="2400" dirty="0">
+              <a:solidFill>
+                <a:schemeClr val="tx1"/>
+              </a:solidFill>
+            </a:endParaRPr>
+          </a:p>
+        </p:txBody>
+      </p:sp>
+      <p:cxnSp>
+        <p:nvCxnSpPr>
+          <p:cNvPr id="62" name="Straight Arrow Connector 61">
+            <a:extLst>
+              <a:ext uri="{FF2B5EF4-FFF2-40B4-BE49-F238E27FC236}">
+                <a16:creationId xmlns:a16="http://schemas.microsoft.com/office/drawing/2014/main" id="{DFE6034C-7CE6-9D5C-9EC8-506B8BF936D9}"/>
+              </a:ext>
+            </a:extLst>
+          </p:cNvPr>
+          <p:cNvCxnSpPr>
+            <a:cxnSpLocks/>
+            <a:stCxn id="61" idx="0"/>
+            <a:endCxn id="45" idx="2"/>
+          </p:cNvCxnSpPr>
+          <p:nvPr/>
+        </p:nvCxnSpPr>
+        <p:spPr>
+          <a:xfrm flipV="1">
+            <a:off x="7130688" y="4323793"/>
+            <a:ext cx="0" cy="528294"/>
+          </a:xfrm>
+          <a:prstGeom prst="straightConnector1">
+            <a:avLst/>
+          </a:prstGeom>
+          <a:ln w="28575">
+            <a:solidFill>
+              <a:schemeClr val="tx1"/>
+            </a:solidFill>
+            <a:tailEnd type="triangle"/>
+          </a:ln>
+        </p:spPr>
+        <p:style>
+          <a:lnRef idx="1">
+            <a:schemeClr val="accent1"/>
+          </a:lnRef>
+          <a:fillRef idx="0">
+            <a:schemeClr val="accent1"/>
+          </a:fillRef>
+          <a:effectRef idx="0">
+            <a:schemeClr val="accent1"/>
+          </a:effectRef>
+          <a:fontRef idx="minor">
+            <a:schemeClr val="tx1"/>
+          </a:fontRef>
+        </p:style>
+      </p:cxnSp>
+      <p:sp>
+        <p:nvSpPr>
+          <p:cNvPr id="63" name="TextBox 62">
+            <a:extLst>
+              <a:ext uri="{FF2B5EF4-FFF2-40B4-BE49-F238E27FC236}">
+                <a16:creationId xmlns:a16="http://schemas.microsoft.com/office/drawing/2014/main" id="{59FC1AEB-5D93-ED29-DF14-956D33FE4701}"/>
+              </a:ext>
+            </a:extLst>
+          </p:cNvPr>
+          <p:cNvSpPr txBox="1"/>
+          <p:nvPr/>
+        </p:nvSpPr>
+        <p:spPr>
+          <a:xfrm>
+            <a:off x="6984654" y="5901567"/>
+            <a:ext cx="292068" cy="369332"/>
+          </a:xfrm>
+          <a:prstGeom prst="rect">
+            <a:avLst/>
+          </a:prstGeom>
+          <a:noFill/>
+        </p:spPr>
+        <p:txBody>
+          <a:bodyPr wrap="none" rtlCol="0">
+            <a:spAutoFit/>
+          </a:bodyPr>
+          <a:lstStyle/>
+          <a:p>
+            <a:r>
+              <a:rPr lang="en-GB" b="1" dirty="0">
+                <a:solidFill>
+                  <a:schemeClr val="accent1"/>
+                </a:solidFill>
+              </a:rPr>
+              <a:t>?</a:t>
+            </a:r>
+          </a:p>
+        </p:txBody>
+      </p:sp>
+      <p:sp>
+        <p:nvSpPr>
+          <p:cNvPr id="64" name="Arc 63">
+            <a:extLst>
+              <a:ext uri="{FF2B5EF4-FFF2-40B4-BE49-F238E27FC236}">
+                <a16:creationId xmlns:a16="http://schemas.microsoft.com/office/drawing/2014/main" id="{B53EDC04-D565-B57B-7771-50270B47B2F9}"/>
+              </a:ext>
+            </a:extLst>
+          </p:cNvPr>
+          <p:cNvSpPr/>
+          <p:nvPr/>
+        </p:nvSpPr>
+        <p:spPr>
+          <a:xfrm rot="1003916">
+            <a:off x="8432965" y="5451080"/>
+            <a:ext cx="485858" cy="468622"/>
+          </a:xfrm>
+          <a:prstGeom prst="arc">
+            <a:avLst>
+              <a:gd name="adj1" fmla="val 16200000"/>
+              <a:gd name="adj2" fmla="val 13932934"/>
+            </a:avLst>
+          </a:prstGeom>
+          <a:noFill/>
+          <a:ln w="28575">
+            <a:solidFill>
+              <a:schemeClr val="tx1"/>
+            </a:solidFill>
+            <a:headEnd type="triangle" w="lg" len="lg"/>
+            <a:tailEnd type="triangle" w="lg" len="lg"/>
+          </a:ln>
+        </p:spPr>
+        <p:style>
+          <a:lnRef idx="1">
+            <a:schemeClr val="accent1"/>
+          </a:lnRef>
+          <a:fillRef idx="0">
+            <a:schemeClr val="accent1"/>
+          </a:fillRef>
+          <a:effectRef idx="0">
+            <a:schemeClr val="accent1"/>
+          </a:effectRef>
+          <a:fontRef idx="minor">
+            <a:schemeClr val="tx1"/>
+          </a:fontRef>
+        </p:style>
+        <p:txBody>
+          <a:bodyPr rtlCol="0" anchor="ctr"/>
+          <a:lstStyle/>
+          <a:p>
+            <a:pPr algn="ctr"/>
+            <a:endParaRPr lang="en-GB" sz="3200" dirty="0"/>
+          </a:p>
+        </p:txBody>
+      </p:sp>
+      <p:sp>
+        <p:nvSpPr>
+          <p:cNvPr id="65" name="Oval 64">
+            <a:extLst>
+              <a:ext uri="{FF2B5EF4-FFF2-40B4-BE49-F238E27FC236}">
+                <a16:creationId xmlns:a16="http://schemas.microsoft.com/office/drawing/2014/main" id="{4529D083-727E-6188-C9B8-1A77CEDBAD51}"/>
+              </a:ext>
+            </a:extLst>
+          </p:cNvPr>
+          <p:cNvSpPr/>
+          <p:nvPr/>
+        </p:nvSpPr>
+        <p:spPr>
+          <a:xfrm>
+            <a:off x="8269522" y="4852087"/>
+            <a:ext cx="812744" cy="623385"/>
+          </a:xfrm>
+          <a:prstGeom prst="ellipse">
+            <a:avLst/>
+          </a:prstGeom>
+          <a:solidFill>
+            <a:schemeClr val="bg1"/>
+          </a:solidFill>
+          <a:ln>
+            <a:solidFill>
+              <a:schemeClr val="tx1"/>
+            </a:solidFill>
+          </a:ln>
+        </p:spPr>
+        <p:style>
+          <a:lnRef idx="2">
+            <a:schemeClr val="accent1">
+              <a:shade val="50000"/>
+            </a:schemeClr>
+          </a:lnRef>
+          <a:fillRef idx="1">
+            <a:schemeClr val="accent1"/>
+          </a:fillRef>
+          <a:effectRef idx="0">
+            <a:schemeClr val="accent1"/>
+          </a:effectRef>
+          <a:fontRef idx="minor">
+            <a:schemeClr val="lt1"/>
+          </a:fontRef>
+        </p:style>
+        <p:txBody>
+          <a:bodyPr rtlCol="0" anchor="ctr"/>
+          <a:lstStyle/>
+          <a:p>
+            <a:pPr algn="ctr"/>
+            <a:r>
+              <a:rPr lang="en-GB" sz="2400" dirty="0">
+                <a:solidFill>
+                  <a:schemeClr val="tx1"/>
+                </a:solidFill>
+              </a:rPr>
+              <a:t>u</a:t>
+            </a:r>
+            <a:r>
+              <a:rPr lang="en-GB" sz="2400" baseline="-25000" dirty="0">
+                <a:solidFill>
+                  <a:schemeClr val="tx1"/>
+                </a:solidFill>
+              </a:rPr>
+              <a:t>3</a:t>
+            </a:r>
+            <a:endParaRPr lang="en-GB" sz="2400" dirty="0">
+              <a:solidFill>
+                <a:schemeClr val="tx1"/>
+              </a:solidFill>
+            </a:endParaRPr>
+          </a:p>
+        </p:txBody>
+      </p:sp>
+      <p:cxnSp>
+        <p:nvCxnSpPr>
+          <p:cNvPr id="66" name="Straight Arrow Connector 65">
+            <a:extLst>
+              <a:ext uri="{FF2B5EF4-FFF2-40B4-BE49-F238E27FC236}">
+                <a16:creationId xmlns:a16="http://schemas.microsoft.com/office/drawing/2014/main" id="{B0D00207-EE4B-406B-9370-A7E4EC5388FF}"/>
+              </a:ext>
+            </a:extLst>
+          </p:cNvPr>
+          <p:cNvCxnSpPr>
+            <a:cxnSpLocks/>
+            <a:stCxn id="65" idx="0"/>
+            <a:endCxn id="47" idx="2"/>
+          </p:cNvCxnSpPr>
+          <p:nvPr/>
+        </p:nvCxnSpPr>
+        <p:spPr>
+          <a:xfrm flipV="1">
+            <a:off x="8675894" y="4323793"/>
+            <a:ext cx="0" cy="528294"/>
+          </a:xfrm>
+          <a:prstGeom prst="straightConnector1">
+            <a:avLst/>
+          </a:prstGeom>
+          <a:ln w="28575">
+            <a:solidFill>
+              <a:schemeClr val="tx1"/>
+            </a:solidFill>
+            <a:tailEnd type="triangle"/>
+          </a:ln>
+        </p:spPr>
+        <p:style>
+          <a:lnRef idx="1">
+            <a:schemeClr val="accent1"/>
+          </a:lnRef>
+          <a:fillRef idx="0">
+            <a:schemeClr val="accent1"/>
+          </a:fillRef>
+          <a:effectRef idx="0">
+            <a:schemeClr val="accent1"/>
+          </a:effectRef>
+          <a:fontRef idx="minor">
+            <a:schemeClr val="tx1"/>
+          </a:fontRef>
+        </p:style>
+      </p:cxnSp>
+      <p:sp>
+        <p:nvSpPr>
+          <p:cNvPr id="67" name="TextBox 66">
+            <a:extLst>
+              <a:ext uri="{FF2B5EF4-FFF2-40B4-BE49-F238E27FC236}">
+                <a16:creationId xmlns:a16="http://schemas.microsoft.com/office/drawing/2014/main" id="{CBCC0284-F24B-42D1-66FD-D1DFDC429F0D}"/>
+              </a:ext>
+            </a:extLst>
+          </p:cNvPr>
+          <p:cNvSpPr txBox="1"/>
+          <p:nvPr/>
+        </p:nvSpPr>
+        <p:spPr>
+          <a:xfrm>
+            <a:off x="8529860" y="5901567"/>
+            <a:ext cx="292068" cy="369332"/>
+          </a:xfrm>
+          <a:prstGeom prst="rect">
+            <a:avLst/>
+          </a:prstGeom>
+          <a:noFill/>
+        </p:spPr>
+        <p:txBody>
+          <a:bodyPr wrap="none" rtlCol="0">
+            <a:spAutoFit/>
+          </a:bodyPr>
+          <a:lstStyle/>
+          <a:p>
+            <a:r>
+              <a:rPr lang="en-GB" b="1" dirty="0">
+                <a:solidFill>
+                  <a:schemeClr val="accent1"/>
+                </a:solidFill>
+              </a:rPr>
+              <a:t>?</a:t>
+            </a:r>
+          </a:p>
+        </p:txBody>
+      </p:sp>
+      <p:sp>
+        <p:nvSpPr>
+          <p:cNvPr id="68" name="Arc 67">
+            <a:extLst>
+              <a:ext uri="{FF2B5EF4-FFF2-40B4-BE49-F238E27FC236}">
+                <a16:creationId xmlns:a16="http://schemas.microsoft.com/office/drawing/2014/main" id="{7EFA4A13-BDCD-2DBB-4F4C-882276A610DB}"/>
+              </a:ext>
+            </a:extLst>
+          </p:cNvPr>
+          <p:cNvSpPr/>
+          <p:nvPr/>
+        </p:nvSpPr>
+        <p:spPr>
+          <a:xfrm rot="1003916">
+            <a:off x="9913591" y="5451080"/>
+            <a:ext cx="485858" cy="468622"/>
+          </a:xfrm>
+          <a:prstGeom prst="arc">
+            <a:avLst>
+              <a:gd name="adj1" fmla="val 16200000"/>
+              <a:gd name="adj2" fmla="val 13932934"/>
+            </a:avLst>
+          </a:prstGeom>
+          <a:noFill/>
+          <a:ln w="28575">
+            <a:solidFill>
+              <a:schemeClr val="tx1"/>
+            </a:solidFill>
+            <a:headEnd type="triangle" w="lg" len="lg"/>
+            <a:tailEnd type="triangle" w="lg" len="lg"/>
+          </a:ln>
+        </p:spPr>
+        <p:style>
+          <a:lnRef idx="1">
+            <a:schemeClr val="accent1"/>
+          </a:lnRef>
+          <a:fillRef idx="0">
+            <a:schemeClr val="accent1"/>
+          </a:fillRef>
+          <a:effectRef idx="0">
+            <a:schemeClr val="accent1"/>
+          </a:effectRef>
+          <a:fontRef idx="minor">
+            <a:schemeClr val="tx1"/>
+          </a:fontRef>
+        </p:style>
+        <p:txBody>
+          <a:bodyPr rtlCol="0" anchor="ctr"/>
+          <a:lstStyle/>
+          <a:p>
+            <a:pPr algn="ctr"/>
+            <a:endParaRPr lang="en-GB" sz="3200" dirty="0"/>
+          </a:p>
+        </p:txBody>
+      </p:sp>
+      <p:sp>
+        <p:nvSpPr>
+          <p:cNvPr id="69" name="Oval 68">
+            <a:extLst>
+              <a:ext uri="{FF2B5EF4-FFF2-40B4-BE49-F238E27FC236}">
+                <a16:creationId xmlns:a16="http://schemas.microsoft.com/office/drawing/2014/main" id="{0B451868-4CFB-1D98-BB05-540AC37D13BA}"/>
+              </a:ext>
+            </a:extLst>
+          </p:cNvPr>
+          <p:cNvSpPr/>
+          <p:nvPr/>
+        </p:nvSpPr>
+        <p:spPr>
+          <a:xfrm>
+            <a:off x="9750148" y="4852087"/>
+            <a:ext cx="812744" cy="623385"/>
+          </a:xfrm>
+          <a:prstGeom prst="ellipse">
+            <a:avLst/>
+          </a:prstGeom>
+          <a:solidFill>
+            <a:schemeClr val="bg1"/>
+          </a:solidFill>
+          <a:ln>
+            <a:solidFill>
+              <a:schemeClr val="tx1"/>
+            </a:solidFill>
+          </a:ln>
+        </p:spPr>
+        <p:style>
+          <a:lnRef idx="2">
+            <a:schemeClr val="accent1">
+              <a:shade val="50000"/>
+            </a:schemeClr>
+          </a:lnRef>
+          <a:fillRef idx="1">
+            <a:schemeClr val="accent1"/>
+          </a:fillRef>
+          <a:effectRef idx="0">
+            <a:schemeClr val="accent1"/>
+          </a:effectRef>
+          <a:fontRef idx="minor">
+            <a:schemeClr val="lt1"/>
+          </a:fontRef>
+        </p:style>
+        <p:txBody>
+          <a:bodyPr rtlCol="0" anchor="ctr"/>
+          <a:lstStyle/>
+          <a:p>
+            <a:pPr algn="ctr"/>
+            <a:r>
+              <a:rPr lang="en-GB" sz="2400" dirty="0">
+                <a:solidFill>
+                  <a:schemeClr val="tx1"/>
+                </a:solidFill>
+              </a:rPr>
+              <a:t>u</a:t>
+            </a:r>
+            <a:r>
+              <a:rPr lang="en-GB" sz="2400" baseline="-25000" dirty="0">
+                <a:solidFill>
+                  <a:schemeClr val="tx1"/>
+                </a:solidFill>
+              </a:rPr>
+              <a:t>4</a:t>
+            </a:r>
+            <a:endParaRPr lang="en-GB" sz="2400" dirty="0">
+              <a:solidFill>
+                <a:schemeClr val="tx1"/>
+              </a:solidFill>
+            </a:endParaRPr>
+          </a:p>
+        </p:txBody>
+      </p:sp>
+      <p:cxnSp>
+        <p:nvCxnSpPr>
+          <p:cNvPr id="70" name="Straight Arrow Connector 69">
+            <a:extLst>
+              <a:ext uri="{FF2B5EF4-FFF2-40B4-BE49-F238E27FC236}">
+                <a16:creationId xmlns:a16="http://schemas.microsoft.com/office/drawing/2014/main" id="{90272481-2135-9C37-AEE0-34FB4015C74F}"/>
+              </a:ext>
+            </a:extLst>
+          </p:cNvPr>
+          <p:cNvCxnSpPr>
+            <a:cxnSpLocks/>
+            <a:stCxn id="69" idx="0"/>
+            <a:endCxn id="48" idx="2"/>
+          </p:cNvCxnSpPr>
+          <p:nvPr/>
+        </p:nvCxnSpPr>
+        <p:spPr>
+          <a:xfrm flipV="1">
+            <a:off x="10156520" y="4323793"/>
+            <a:ext cx="0" cy="528294"/>
+          </a:xfrm>
+          <a:prstGeom prst="straightConnector1">
+            <a:avLst/>
+          </a:prstGeom>
+          <a:ln w="28575">
+            <a:solidFill>
+              <a:schemeClr val="tx1"/>
+            </a:solidFill>
+            <a:tailEnd type="triangle"/>
+          </a:ln>
+        </p:spPr>
+        <p:style>
+          <a:lnRef idx="1">
+            <a:schemeClr val="accent1"/>
+          </a:lnRef>
+          <a:fillRef idx="0">
+            <a:schemeClr val="accent1"/>
+          </a:fillRef>
+          <a:effectRef idx="0">
+            <a:schemeClr val="accent1"/>
+          </a:effectRef>
+          <a:fontRef idx="minor">
+            <a:schemeClr val="tx1"/>
+          </a:fontRef>
+        </p:style>
+      </p:cxnSp>
+      <p:sp>
+        <p:nvSpPr>
+          <p:cNvPr id="71" name="TextBox 70">
+            <a:extLst>
+              <a:ext uri="{FF2B5EF4-FFF2-40B4-BE49-F238E27FC236}">
+                <a16:creationId xmlns:a16="http://schemas.microsoft.com/office/drawing/2014/main" id="{D3BF120B-FE01-8A3A-1519-1BC2405D6100}"/>
+              </a:ext>
+            </a:extLst>
+          </p:cNvPr>
+          <p:cNvSpPr txBox="1"/>
+          <p:nvPr/>
+        </p:nvSpPr>
+        <p:spPr>
+          <a:xfrm>
+            <a:off x="10010486" y="5901567"/>
+            <a:ext cx="292068" cy="369332"/>
+          </a:xfrm>
+          <a:prstGeom prst="rect">
+            <a:avLst/>
+          </a:prstGeom>
+          <a:noFill/>
+        </p:spPr>
+        <p:txBody>
+          <a:bodyPr wrap="none" rtlCol="0">
+            <a:spAutoFit/>
+          </a:bodyPr>
+          <a:lstStyle/>
+          <a:p>
+            <a:r>
+              <a:rPr lang="en-GB" b="1" dirty="0">
+                <a:solidFill>
+                  <a:schemeClr val="accent1"/>
+                </a:solidFill>
+              </a:rPr>
+              <a:t>?</a:t>
+            </a:r>
+          </a:p>
+        </p:txBody>
+      </p:sp>
+      <p:sp>
+        <p:nvSpPr>
+          <p:cNvPr id="72" name="TextBox 71">
+            <a:extLst>
+              <a:ext uri="{FF2B5EF4-FFF2-40B4-BE49-F238E27FC236}">
+                <a16:creationId xmlns:a16="http://schemas.microsoft.com/office/drawing/2014/main" id="{5DB3D370-7937-EEDF-0CCF-D5B12ADC2412}"/>
+              </a:ext>
+            </a:extLst>
+          </p:cNvPr>
+          <p:cNvSpPr txBox="1"/>
+          <p:nvPr/>
+        </p:nvSpPr>
+        <p:spPr>
+          <a:xfrm>
+            <a:off x="8829377" y="926732"/>
+            <a:ext cx="351378" cy="523220"/>
+          </a:xfrm>
+          <a:prstGeom prst="rect">
+            <a:avLst/>
+          </a:prstGeom>
+          <a:noFill/>
+        </p:spPr>
+        <p:txBody>
+          <a:bodyPr wrap="none" rtlCol="0">
+            <a:spAutoFit/>
+          </a:bodyPr>
+          <a:lstStyle/>
+          <a:p>
+            <a:r>
+              <a:rPr lang="en-GB" sz="2800" dirty="0">
+                <a:solidFill>
+                  <a:schemeClr val="accent1"/>
+                </a:solidFill>
+              </a:rPr>
+              <a:t>?</a:t>
+            </a:r>
+          </a:p>
+        </p:txBody>
+      </p:sp>
+      <p:sp>
+        <p:nvSpPr>
+          <p:cNvPr id="73" name="TextBox 72">
+            <a:extLst>
+              <a:ext uri="{FF2B5EF4-FFF2-40B4-BE49-F238E27FC236}">
+                <a16:creationId xmlns:a16="http://schemas.microsoft.com/office/drawing/2014/main" id="{12B1210F-83FE-0D5B-77BA-14B99232AB33}"/>
+              </a:ext>
+            </a:extLst>
+          </p:cNvPr>
+          <p:cNvSpPr txBox="1"/>
+          <p:nvPr/>
+        </p:nvSpPr>
+        <p:spPr>
+          <a:xfrm>
+            <a:off x="6219864" y="2809029"/>
+            <a:ext cx="351378" cy="523220"/>
+          </a:xfrm>
+          <a:prstGeom prst="rect">
+            <a:avLst/>
+          </a:prstGeom>
+          <a:noFill/>
+        </p:spPr>
+        <p:txBody>
+          <a:bodyPr wrap="none" rtlCol="0">
+            <a:spAutoFit/>
+          </a:bodyPr>
+          <a:lstStyle/>
+          <a:p>
+            <a:r>
+              <a:rPr lang="en-GB" sz="2800" dirty="0">
+                <a:solidFill>
+                  <a:srgbClr val="FF0000"/>
+                </a:solidFill>
+              </a:rPr>
+              <a:t>?</a:t>
+            </a:r>
+          </a:p>
+        </p:txBody>
+      </p:sp>
+      <p:sp>
+        <p:nvSpPr>
+          <p:cNvPr id="74" name="TextBox 73">
+            <a:extLst>
+              <a:ext uri="{FF2B5EF4-FFF2-40B4-BE49-F238E27FC236}">
+                <a16:creationId xmlns:a16="http://schemas.microsoft.com/office/drawing/2014/main" id="{DE35BAC7-F052-FEFB-AA6C-1567E57C39B3}"/>
+              </a:ext>
+            </a:extLst>
+          </p:cNvPr>
+          <p:cNvSpPr txBox="1"/>
+          <p:nvPr/>
+        </p:nvSpPr>
+        <p:spPr>
+          <a:xfrm>
+            <a:off x="7430789" y="2978449"/>
+            <a:ext cx="351378" cy="523220"/>
+          </a:xfrm>
+          <a:prstGeom prst="rect">
+            <a:avLst/>
+          </a:prstGeom>
+          <a:noFill/>
+        </p:spPr>
+        <p:txBody>
+          <a:bodyPr wrap="none" rtlCol="0">
+            <a:spAutoFit/>
+          </a:bodyPr>
+          <a:lstStyle/>
+          <a:p>
+            <a:r>
+              <a:rPr lang="en-GB" sz="2800" dirty="0">
+                <a:solidFill>
+                  <a:srgbClr val="FF0000"/>
+                </a:solidFill>
+              </a:rPr>
+              <a:t>?</a:t>
+            </a:r>
+          </a:p>
+        </p:txBody>
+      </p:sp>
+      <p:sp>
+        <p:nvSpPr>
+          <p:cNvPr id="75" name="TextBox 74">
+            <a:extLst>
+              <a:ext uri="{FF2B5EF4-FFF2-40B4-BE49-F238E27FC236}">
+                <a16:creationId xmlns:a16="http://schemas.microsoft.com/office/drawing/2014/main" id="{CBAF52CB-0899-4874-C135-3951D61B4770}"/>
+              </a:ext>
+            </a:extLst>
+          </p:cNvPr>
+          <p:cNvSpPr txBox="1"/>
+          <p:nvPr/>
+        </p:nvSpPr>
+        <p:spPr>
+          <a:xfrm>
+            <a:off x="8058848" y="2978449"/>
+            <a:ext cx="351378" cy="523220"/>
+          </a:xfrm>
+          <a:prstGeom prst="rect">
+            <a:avLst/>
+          </a:prstGeom>
+          <a:noFill/>
+        </p:spPr>
+        <p:txBody>
+          <a:bodyPr wrap="none" rtlCol="0">
+            <a:spAutoFit/>
+          </a:bodyPr>
+          <a:lstStyle/>
+          <a:p>
+            <a:r>
+              <a:rPr lang="en-GB" sz="2800" dirty="0">
+                <a:solidFill>
+                  <a:srgbClr val="FF0000"/>
+                </a:solidFill>
+              </a:rPr>
+              <a:t>?</a:t>
+            </a:r>
+          </a:p>
+        </p:txBody>
+      </p:sp>
+      <p:sp>
+        <p:nvSpPr>
+          <p:cNvPr id="76" name="TextBox 75">
+            <a:extLst>
+              <a:ext uri="{FF2B5EF4-FFF2-40B4-BE49-F238E27FC236}">
+                <a16:creationId xmlns:a16="http://schemas.microsoft.com/office/drawing/2014/main" id="{DEDFF763-FD26-5401-6536-81294D5B08B3}"/>
+              </a:ext>
+            </a:extLst>
+          </p:cNvPr>
+          <p:cNvSpPr txBox="1"/>
+          <p:nvPr/>
+        </p:nvSpPr>
+        <p:spPr>
+          <a:xfrm>
+            <a:off x="9285762" y="2809029"/>
+            <a:ext cx="351378" cy="523220"/>
+          </a:xfrm>
+          <a:prstGeom prst="rect">
+            <a:avLst/>
+          </a:prstGeom>
+          <a:noFill/>
+        </p:spPr>
+        <p:txBody>
+          <a:bodyPr wrap="none" rtlCol="0">
+            <a:spAutoFit/>
+          </a:bodyPr>
+          <a:lstStyle/>
+          <a:p>
+            <a:r>
+              <a:rPr lang="en-GB" sz="2800" dirty="0">
+                <a:solidFill>
+                  <a:srgbClr val="FF0000"/>
+                </a:solidFill>
+              </a:rPr>
+              <a:t>?</a:t>
+            </a:r>
+          </a:p>
+        </p:txBody>
+      </p:sp>
+      <p:sp>
+        <p:nvSpPr>
+          <p:cNvPr id="77" name="TextBox 76">
+            <a:extLst>
+              <a:ext uri="{FF2B5EF4-FFF2-40B4-BE49-F238E27FC236}">
+                <a16:creationId xmlns:a16="http://schemas.microsoft.com/office/drawing/2014/main" id="{9CB96040-A022-0D9B-2A26-5B9C8967D583}"/>
+              </a:ext>
+            </a:extLst>
+          </p:cNvPr>
+          <p:cNvSpPr txBox="1"/>
+          <p:nvPr/>
+        </p:nvSpPr>
+        <p:spPr>
+          <a:xfrm>
+            <a:off x="5357994" y="4425992"/>
+            <a:ext cx="5159473" cy="369332"/>
+          </a:xfrm>
+          <a:prstGeom prst="rect">
+            <a:avLst/>
+          </a:prstGeom>
+          <a:noFill/>
+        </p:spPr>
+        <p:txBody>
+          <a:bodyPr wrap="square" rtlCol="0">
+            <a:spAutoFit/>
+          </a:bodyPr>
+          <a:lstStyle/>
+          <a:p>
+            <a:r>
+              <a:rPr lang="en-GB" b="1" dirty="0">
+                <a:solidFill>
+                  <a:srgbClr val="92D050"/>
+                </a:solidFill>
+              </a:rPr>
+              <a:t>    ?	                ?                           ?                          ?</a:t>
+            </a:r>
+          </a:p>
+        </p:txBody>
+      </p:sp>
+      <p:sp>
+        <p:nvSpPr>
+          <p:cNvPr id="78" name="TextBox 77">
+            <a:extLst>
+              <a:ext uri="{FF2B5EF4-FFF2-40B4-BE49-F238E27FC236}">
+                <a16:creationId xmlns:a16="http://schemas.microsoft.com/office/drawing/2014/main" id="{7EAE7F4F-F5D0-DC6D-3BB3-D6C159D6242B}"/>
+              </a:ext>
+            </a:extLst>
+          </p:cNvPr>
+          <p:cNvSpPr txBox="1"/>
+          <p:nvPr/>
+        </p:nvSpPr>
+        <p:spPr>
+          <a:xfrm>
+            <a:off x="9879221" y="734317"/>
+            <a:ext cx="1467089" cy="923330"/>
+          </a:xfrm>
+          <a:prstGeom prst="rect">
+            <a:avLst/>
+          </a:prstGeom>
+          <a:noFill/>
+        </p:spPr>
+        <p:txBody>
+          <a:bodyPr wrap="square" rtlCol="0">
+            <a:spAutoFit/>
+          </a:bodyPr>
+          <a:lstStyle/>
+          <a:p>
+            <a:pPr algn="ctr"/>
+            <a:r>
+              <a:rPr lang="en-GB" b="1" dirty="0">
+                <a:solidFill>
+                  <a:schemeClr val="accent1"/>
+                </a:solidFill>
+              </a:rPr>
+              <a:t>1 latent factor variance</a:t>
+            </a:r>
+          </a:p>
+        </p:txBody>
+      </p:sp>
+      <p:sp>
+        <p:nvSpPr>
+          <p:cNvPr id="79" name="TextBox 78">
+            <a:extLst>
+              <a:ext uri="{FF2B5EF4-FFF2-40B4-BE49-F238E27FC236}">
+                <a16:creationId xmlns:a16="http://schemas.microsoft.com/office/drawing/2014/main" id="{72DFA5F4-CA57-A665-7FF3-20E5E6946211}"/>
+              </a:ext>
+            </a:extLst>
+          </p:cNvPr>
+          <p:cNvSpPr txBox="1"/>
+          <p:nvPr/>
+        </p:nvSpPr>
+        <p:spPr>
+          <a:xfrm>
+            <a:off x="10156519" y="2566244"/>
+            <a:ext cx="1467089" cy="646331"/>
+          </a:xfrm>
+          <a:prstGeom prst="rect">
+            <a:avLst/>
+          </a:prstGeom>
+          <a:noFill/>
+        </p:spPr>
+        <p:txBody>
+          <a:bodyPr wrap="square" rtlCol="0">
+            <a:spAutoFit/>
+          </a:bodyPr>
+          <a:lstStyle/>
+          <a:p>
+            <a:pPr algn="ctr"/>
+            <a:r>
+              <a:rPr lang="en-GB" b="1" dirty="0">
+                <a:solidFill>
+                  <a:srgbClr val="FF0000"/>
+                </a:solidFill>
+              </a:rPr>
+              <a:t>4 factor loadings</a:t>
+            </a:r>
+          </a:p>
+        </p:txBody>
+      </p:sp>
+      <p:sp>
+        <p:nvSpPr>
+          <p:cNvPr id="80" name="TextBox 79">
+            <a:extLst>
+              <a:ext uri="{FF2B5EF4-FFF2-40B4-BE49-F238E27FC236}">
+                <a16:creationId xmlns:a16="http://schemas.microsoft.com/office/drawing/2014/main" id="{8DD188D2-268C-E595-169F-3F7ABFC7B337}"/>
+              </a:ext>
+            </a:extLst>
+          </p:cNvPr>
+          <p:cNvSpPr txBox="1"/>
+          <p:nvPr/>
+        </p:nvSpPr>
+        <p:spPr>
+          <a:xfrm>
+            <a:off x="10585349" y="4121172"/>
+            <a:ext cx="1467089" cy="923330"/>
+          </a:xfrm>
+          <a:prstGeom prst="rect">
+            <a:avLst/>
+          </a:prstGeom>
+          <a:noFill/>
+        </p:spPr>
+        <p:txBody>
+          <a:bodyPr wrap="square" rtlCol="0">
+            <a:spAutoFit/>
+          </a:bodyPr>
+          <a:lstStyle/>
+          <a:p>
+            <a:pPr algn="ctr"/>
+            <a:r>
+              <a:rPr lang="en-GB" b="1" dirty="0">
+                <a:solidFill>
+                  <a:schemeClr val="accent6"/>
+                </a:solidFill>
+              </a:rPr>
+              <a:t>4 residual factor loadings</a:t>
+            </a:r>
+          </a:p>
+        </p:txBody>
+      </p:sp>
+      <p:sp>
+        <p:nvSpPr>
+          <p:cNvPr id="81" name="TextBox 80">
+            <a:extLst>
+              <a:ext uri="{FF2B5EF4-FFF2-40B4-BE49-F238E27FC236}">
+                <a16:creationId xmlns:a16="http://schemas.microsoft.com/office/drawing/2014/main" id="{1344220C-B2D8-FBC0-5277-1B7F83FCB95B}"/>
+              </a:ext>
+            </a:extLst>
+          </p:cNvPr>
+          <p:cNvSpPr txBox="1"/>
+          <p:nvPr/>
+        </p:nvSpPr>
+        <p:spPr>
+          <a:xfrm>
+            <a:off x="10562892" y="5624568"/>
+            <a:ext cx="1467089" cy="923330"/>
+          </a:xfrm>
+          <a:prstGeom prst="rect">
+            <a:avLst/>
+          </a:prstGeom>
+          <a:noFill/>
+        </p:spPr>
+        <p:txBody>
+          <a:bodyPr wrap="square" rtlCol="0">
+            <a:spAutoFit/>
+          </a:bodyPr>
+          <a:lstStyle/>
+          <a:p>
+            <a:pPr algn="ctr"/>
+            <a:r>
+              <a:rPr lang="en-GB" b="1" dirty="0">
+                <a:solidFill>
+                  <a:schemeClr val="accent1"/>
+                </a:solidFill>
+              </a:rPr>
+              <a:t>4 residual factor variances</a:t>
+            </a:r>
+          </a:p>
+        </p:txBody>
+      </p:sp>
+    </p:spTree>
+    <p:extLst>
+      <p:ext uri="{BB962C8B-B14F-4D97-AF65-F5344CB8AC3E}">
+        <p14:creationId xmlns:p14="http://schemas.microsoft.com/office/powerpoint/2010/main" val="3741890692"/>
+      </p:ext>
+    </p:extLst>
+  </p:cSld>
+  <p:clrMapOvr>
+    <a:masterClrMapping/>
+  </p:clrMapOvr>
+</p:sld>
+</file>
+
+<file path=ppt/slides/slide5.xml><?xml version="1.0" encoding="utf-8"?>
+<p:sld xmlns:a="http://schemas.openxmlformats.org/drawingml/2006/main" xmlns:r="http://schemas.openxmlformats.org/officeDocument/2006/relationships" xmlns:p="http://schemas.openxmlformats.org/presentationml/2006/main">
+  <p:cSld>
+    <p:spTree>
+      <p:nvGrpSpPr>
+        <p:cNvPr id="1" name=""/>
+        <p:cNvGrpSpPr/>
+        <p:nvPr/>
+      </p:nvGrpSpPr>
+      <p:grpSpPr>
+        <a:xfrm>
+          <a:off x="0" y="0"/>
+          <a:ext cx="0" cy="0"/>
+          <a:chOff x="0" y="0"/>
+          <a:chExt cx="0" cy="0"/>
+        </a:xfrm>
+      </p:grpSpPr>
+      <p:grpSp>
+        <p:nvGrpSpPr>
+          <p:cNvPr id="41" name="Group 40">
+            <a:extLst>
+              <a:ext uri="{FF2B5EF4-FFF2-40B4-BE49-F238E27FC236}">
+                <a16:creationId xmlns:a16="http://schemas.microsoft.com/office/drawing/2014/main" id="{33DE9097-9831-FB52-F163-2F6719089B8D}"/>
+              </a:ext>
+            </a:extLst>
+          </p:cNvPr>
+          <p:cNvGrpSpPr/>
+          <p:nvPr/>
+        </p:nvGrpSpPr>
+        <p:grpSpPr>
+          <a:xfrm>
+            <a:off x="151227" y="812332"/>
+            <a:ext cx="5717512" cy="5441182"/>
+            <a:chOff x="0" y="1044419"/>
+            <a:chExt cx="6851445" cy="5813581"/>
+          </a:xfrm>
+        </p:grpSpPr>
+        <p:sp>
+          <p:nvSpPr>
+            <p:cNvPr id="4" name="Arc 3">
+              <a:extLst>
+                <a:ext uri="{FF2B5EF4-FFF2-40B4-BE49-F238E27FC236}">
+                  <a16:creationId xmlns:a16="http://schemas.microsoft.com/office/drawing/2014/main" id="{42672AAF-280C-D74E-8F49-F4F8EC9C95E0}"/>
+                </a:ext>
+              </a:extLst>
+            </p:cNvPr>
+            <p:cNvSpPr/>
+            <p:nvPr/>
+          </p:nvSpPr>
+          <p:spPr>
+            <a:xfrm rot="1003916">
+              <a:off x="163443" y="5761182"/>
+              <a:ext cx="485858" cy="468622"/>
+            </a:xfrm>
+            <a:prstGeom prst="arc">
+              <a:avLst>
+                <a:gd name="adj1" fmla="val 16200000"/>
+                <a:gd name="adj2" fmla="val 13932934"/>
+              </a:avLst>
+            </a:prstGeom>
+            <a:noFill/>
+            <a:ln w="28575">
+              <a:solidFill>
+                <a:schemeClr val="tx1"/>
+              </a:solidFill>
+              <a:headEnd type="triangle" w="lg" len="lg"/>
+              <a:tailEnd type="triangle" w="lg" len="lg"/>
+            </a:ln>
+          </p:spPr>
+          <p:style>
+            <a:lnRef idx="1">
+              <a:schemeClr val="accent1"/>
+            </a:lnRef>
+            <a:fillRef idx="0">
+              <a:schemeClr val="accent1"/>
+            </a:fillRef>
+            <a:effectRef idx="0">
+              <a:schemeClr val="accent1"/>
+            </a:effectRef>
+            <a:fontRef idx="minor">
+              <a:schemeClr val="tx1"/>
+            </a:fontRef>
+          </p:style>
+          <p:txBody>
+            <a:bodyPr rtlCol="0" anchor="ctr"/>
+            <a:lstStyle/>
+            <a:p>
+              <a:pPr algn="ctr"/>
+              <a:endParaRPr lang="en-GB" sz="3200" dirty="0"/>
+            </a:p>
+          </p:txBody>
+        </p:sp>
+        <p:sp>
+          <p:nvSpPr>
+            <p:cNvPr id="5" name="Rectangle 4">
+              <a:extLst>
+                <a:ext uri="{FF2B5EF4-FFF2-40B4-BE49-F238E27FC236}">
+                  <a16:creationId xmlns:a16="http://schemas.microsoft.com/office/drawing/2014/main" id="{454DFA2D-44A3-1B1C-4D8F-BCF286CD6C11}"/>
+                </a:ext>
+              </a:extLst>
+            </p:cNvPr>
+            <p:cNvSpPr/>
+            <p:nvPr/>
+          </p:nvSpPr>
+          <p:spPr>
+            <a:xfrm>
+              <a:off x="45425" y="3928043"/>
+              <a:ext cx="721895" cy="705852"/>
+            </a:xfrm>
+            <a:prstGeom prst="rect">
+              <a:avLst/>
+            </a:prstGeom>
+            <a:noFill/>
+            <a:ln>
+              <a:solidFill>
+                <a:schemeClr val="tx1"/>
+              </a:solidFill>
+            </a:ln>
+          </p:spPr>
+          <p:style>
+            <a:lnRef idx="2">
+              <a:schemeClr val="accent1">
+                <a:shade val="50000"/>
+              </a:schemeClr>
+            </a:lnRef>
+            <a:fillRef idx="1">
+              <a:schemeClr val="accent1"/>
+            </a:fillRef>
+            <a:effectRef idx="0">
+              <a:schemeClr val="accent1"/>
+            </a:effectRef>
+            <a:fontRef idx="minor">
+              <a:schemeClr val="lt1"/>
+            </a:fontRef>
+          </p:style>
+          <p:txBody>
+            <a:bodyPr rtlCol="0" anchor="ctr"/>
+            <a:lstStyle/>
+            <a:p>
+              <a:pPr algn="ctr"/>
+              <a:r>
+                <a:rPr lang="en-GB" sz="3200" dirty="0">
+                  <a:solidFill>
+                    <a:schemeClr val="tx1"/>
+                  </a:solidFill>
+                </a:rPr>
+                <a:t>Y1</a:t>
+              </a:r>
+            </a:p>
+          </p:txBody>
+        </p:sp>
+        <p:sp>
+          <p:nvSpPr>
+            <p:cNvPr id="6" name="Rectangle 5">
+              <a:extLst>
+                <a:ext uri="{FF2B5EF4-FFF2-40B4-BE49-F238E27FC236}">
+                  <a16:creationId xmlns:a16="http://schemas.microsoft.com/office/drawing/2014/main" id="{D4B595D6-4E83-1A74-EACF-38179231C1E8}"/>
+                </a:ext>
+              </a:extLst>
+            </p:cNvPr>
+            <p:cNvSpPr/>
+            <p:nvPr/>
+          </p:nvSpPr>
+          <p:spPr>
+            <a:xfrm>
+              <a:off x="1568747" y="3928043"/>
+              <a:ext cx="721895" cy="705852"/>
+            </a:xfrm>
+            <a:prstGeom prst="rect">
+              <a:avLst/>
+            </a:prstGeom>
+            <a:noFill/>
+            <a:ln>
+              <a:solidFill>
+                <a:schemeClr val="tx1"/>
+              </a:solidFill>
+            </a:ln>
+          </p:spPr>
+          <p:style>
+            <a:lnRef idx="2">
+              <a:schemeClr val="accent1">
+                <a:shade val="50000"/>
+              </a:schemeClr>
+            </a:lnRef>
+            <a:fillRef idx="1">
+              <a:schemeClr val="accent1"/>
+            </a:fillRef>
+            <a:effectRef idx="0">
+              <a:schemeClr val="accent1"/>
+            </a:effectRef>
+            <a:fontRef idx="minor">
+              <a:schemeClr val="lt1"/>
+            </a:fontRef>
+          </p:style>
+          <p:txBody>
+            <a:bodyPr rtlCol="0" anchor="ctr"/>
+            <a:lstStyle/>
+            <a:p>
+              <a:pPr algn="ctr"/>
+              <a:r>
+                <a:rPr lang="en-GB" sz="3200" dirty="0">
+                  <a:solidFill>
+                    <a:schemeClr val="tx1"/>
+                  </a:solidFill>
+                </a:rPr>
+                <a:t>Y2</a:t>
+              </a:r>
+            </a:p>
+          </p:txBody>
+        </p:sp>
+        <p:sp>
+          <p:nvSpPr>
+            <p:cNvPr id="8" name="Rectangle 7">
+              <a:extLst>
+                <a:ext uri="{FF2B5EF4-FFF2-40B4-BE49-F238E27FC236}">
+                  <a16:creationId xmlns:a16="http://schemas.microsoft.com/office/drawing/2014/main" id="{6F6DE456-E347-1A11-BB39-1056DA016F9D}"/>
+                </a:ext>
+              </a:extLst>
+            </p:cNvPr>
+            <p:cNvSpPr/>
+            <p:nvPr/>
+          </p:nvSpPr>
+          <p:spPr>
+            <a:xfrm>
+              <a:off x="3113953" y="3928043"/>
+              <a:ext cx="721895" cy="705852"/>
+            </a:xfrm>
+            <a:prstGeom prst="rect">
+              <a:avLst/>
+            </a:prstGeom>
+            <a:noFill/>
+            <a:ln>
+              <a:solidFill>
+                <a:schemeClr val="tx1"/>
+              </a:solidFill>
+            </a:ln>
+          </p:spPr>
+          <p:style>
+            <a:lnRef idx="2">
+              <a:schemeClr val="accent1">
+                <a:shade val="50000"/>
+              </a:schemeClr>
+            </a:lnRef>
+            <a:fillRef idx="1">
+              <a:schemeClr val="accent1"/>
+            </a:fillRef>
+            <a:effectRef idx="0">
+              <a:schemeClr val="accent1"/>
+            </a:effectRef>
+            <a:fontRef idx="minor">
+              <a:schemeClr val="lt1"/>
+            </a:fontRef>
+          </p:style>
+          <p:txBody>
+            <a:bodyPr rtlCol="0" anchor="ctr"/>
+            <a:lstStyle/>
+            <a:p>
+              <a:pPr algn="ctr"/>
+              <a:r>
+                <a:rPr lang="en-GB" sz="3200" dirty="0">
+                  <a:solidFill>
+                    <a:schemeClr val="tx1"/>
+                  </a:solidFill>
+                </a:rPr>
+                <a:t>Y3</a:t>
+              </a:r>
+            </a:p>
+          </p:txBody>
+        </p:sp>
+        <p:sp>
+          <p:nvSpPr>
+            <p:cNvPr id="9" name="Rectangle 8">
+              <a:extLst>
+                <a:ext uri="{FF2B5EF4-FFF2-40B4-BE49-F238E27FC236}">
+                  <a16:creationId xmlns:a16="http://schemas.microsoft.com/office/drawing/2014/main" id="{14517B9A-3E0D-A9C9-977A-4A474A6377DC}"/>
+                </a:ext>
+              </a:extLst>
+            </p:cNvPr>
+            <p:cNvSpPr/>
+            <p:nvPr/>
+          </p:nvSpPr>
+          <p:spPr>
+            <a:xfrm>
+              <a:off x="4594579" y="3928043"/>
+              <a:ext cx="721895" cy="705852"/>
+            </a:xfrm>
+            <a:prstGeom prst="rect">
+              <a:avLst/>
+            </a:prstGeom>
+            <a:noFill/>
+            <a:ln>
+              <a:solidFill>
+                <a:schemeClr val="tx1"/>
+              </a:solidFill>
+            </a:ln>
+          </p:spPr>
+          <p:style>
+            <a:lnRef idx="2">
+              <a:schemeClr val="accent1">
+                <a:shade val="50000"/>
+              </a:schemeClr>
+            </a:lnRef>
+            <a:fillRef idx="1">
+              <a:schemeClr val="accent1"/>
+            </a:fillRef>
+            <a:effectRef idx="0">
+              <a:schemeClr val="accent1"/>
+            </a:effectRef>
+            <a:fontRef idx="minor">
+              <a:schemeClr val="lt1"/>
+            </a:fontRef>
+          </p:style>
+          <p:txBody>
+            <a:bodyPr rtlCol="0" anchor="ctr"/>
+            <a:lstStyle/>
+            <a:p>
+              <a:pPr algn="ctr"/>
+              <a:r>
+                <a:rPr lang="en-GB" sz="3200" dirty="0">
+                  <a:solidFill>
+                    <a:schemeClr val="tx1"/>
+                  </a:solidFill>
+                </a:rPr>
+                <a:t>Y4</a:t>
+              </a:r>
+            </a:p>
+          </p:txBody>
+        </p:sp>
+        <p:sp>
+          <p:nvSpPr>
+            <p:cNvPr id="10" name="Oval 9">
+              <a:extLst>
+                <a:ext uri="{FF2B5EF4-FFF2-40B4-BE49-F238E27FC236}">
+                  <a16:creationId xmlns:a16="http://schemas.microsoft.com/office/drawing/2014/main" id="{13BBF0FF-D84B-AD55-60F0-1AC5EFF6E69C}"/>
+                </a:ext>
+              </a:extLst>
+            </p:cNvPr>
+            <p:cNvSpPr/>
+            <p:nvPr/>
+          </p:nvSpPr>
+          <p:spPr>
+            <a:xfrm>
+              <a:off x="2128425" y="1949641"/>
+              <a:ext cx="1173653" cy="883798"/>
+            </a:xfrm>
+            <a:prstGeom prst="ellipse">
+              <a:avLst/>
+            </a:prstGeom>
+            <a:solidFill>
+              <a:schemeClr val="bg1"/>
+            </a:solidFill>
+            <a:ln>
+              <a:solidFill>
+                <a:schemeClr val="tx1"/>
+              </a:solidFill>
+            </a:ln>
+          </p:spPr>
+          <p:style>
+            <a:lnRef idx="2">
+              <a:schemeClr val="accent1">
+                <a:shade val="50000"/>
+              </a:schemeClr>
+            </a:lnRef>
+            <a:fillRef idx="1">
+              <a:schemeClr val="accent1"/>
+            </a:fillRef>
+            <a:effectRef idx="0">
+              <a:schemeClr val="accent1"/>
+            </a:effectRef>
+            <a:fontRef idx="minor">
+              <a:schemeClr val="lt1"/>
+            </a:fontRef>
+          </p:style>
+          <p:txBody>
+            <a:bodyPr rtlCol="0" anchor="ctr"/>
+            <a:lstStyle/>
+            <a:p>
+              <a:pPr algn="ctr"/>
+              <a:r>
+                <a:rPr lang="en-GB" sz="3200" dirty="0">
+                  <a:solidFill>
+                    <a:schemeClr val="tx1"/>
+                  </a:solidFill>
+                </a:rPr>
+                <a:t>F</a:t>
+              </a:r>
+            </a:p>
+          </p:txBody>
+        </p:sp>
+        <p:cxnSp>
+          <p:nvCxnSpPr>
+            <p:cNvPr id="11" name="Straight Arrow Connector 10">
+              <a:extLst>
+                <a:ext uri="{FF2B5EF4-FFF2-40B4-BE49-F238E27FC236}">
+                  <a16:creationId xmlns:a16="http://schemas.microsoft.com/office/drawing/2014/main" id="{31167E04-0712-00A6-1979-2319200345D2}"/>
+                </a:ext>
+              </a:extLst>
+            </p:cNvPr>
+            <p:cNvCxnSpPr>
+              <a:stCxn id="10" idx="4"/>
+              <a:endCxn id="5" idx="0"/>
+            </p:cNvCxnSpPr>
+            <p:nvPr/>
+          </p:nvCxnSpPr>
+          <p:spPr>
+            <a:xfrm flipH="1">
+              <a:off x="406373" y="2833439"/>
+              <a:ext cx="2308879" cy="1094604"/>
+            </a:xfrm>
+            <a:prstGeom prst="straightConnector1">
+              <a:avLst/>
+            </a:prstGeom>
+            <a:ln w="38100">
+              <a:solidFill>
+                <a:schemeClr val="tx1"/>
+              </a:solidFill>
+              <a:headEnd w="lg" len="lg"/>
+              <a:tailEnd type="triangle" w="lg" len="lg"/>
+            </a:ln>
+          </p:spPr>
+          <p:style>
+            <a:lnRef idx="1">
+              <a:schemeClr val="accent1"/>
+            </a:lnRef>
+            <a:fillRef idx="0">
+              <a:schemeClr val="accent1"/>
+            </a:fillRef>
+            <a:effectRef idx="0">
+              <a:schemeClr val="accent1"/>
+            </a:effectRef>
+            <a:fontRef idx="minor">
+              <a:schemeClr val="tx1"/>
+            </a:fontRef>
+          </p:style>
+        </p:cxnSp>
+        <p:cxnSp>
+          <p:nvCxnSpPr>
+            <p:cNvPr id="12" name="Straight Arrow Connector 11">
+              <a:extLst>
+                <a:ext uri="{FF2B5EF4-FFF2-40B4-BE49-F238E27FC236}">
+                  <a16:creationId xmlns:a16="http://schemas.microsoft.com/office/drawing/2014/main" id="{D465DBF7-AFEA-B355-9472-A24BB0F00472}"/>
+                </a:ext>
+              </a:extLst>
+            </p:cNvPr>
+            <p:cNvCxnSpPr>
+              <a:stCxn id="10" idx="4"/>
+              <a:endCxn id="6" idx="0"/>
+            </p:cNvCxnSpPr>
+            <p:nvPr/>
+          </p:nvCxnSpPr>
+          <p:spPr>
+            <a:xfrm flipH="1">
+              <a:off x="1929695" y="2833439"/>
+              <a:ext cx="785557" cy="1094604"/>
+            </a:xfrm>
+            <a:prstGeom prst="straightConnector1">
+              <a:avLst/>
+            </a:prstGeom>
+            <a:ln w="38100">
+              <a:solidFill>
+                <a:schemeClr val="tx1"/>
+              </a:solidFill>
+              <a:headEnd w="lg" len="lg"/>
+              <a:tailEnd type="triangle" w="lg" len="lg"/>
+            </a:ln>
+          </p:spPr>
+          <p:style>
+            <a:lnRef idx="1">
+              <a:schemeClr val="accent1"/>
+            </a:lnRef>
+            <a:fillRef idx="0">
+              <a:schemeClr val="accent1"/>
+            </a:fillRef>
+            <a:effectRef idx="0">
+              <a:schemeClr val="accent1"/>
+            </a:effectRef>
+            <a:fontRef idx="minor">
+              <a:schemeClr val="tx1"/>
+            </a:fontRef>
+          </p:style>
+        </p:cxnSp>
+        <p:cxnSp>
+          <p:nvCxnSpPr>
+            <p:cNvPr id="13" name="Straight Arrow Connector 12">
+              <a:extLst>
+                <a:ext uri="{FF2B5EF4-FFF2-40B4-BE49-F238E27FC236}">
+                  <a16:creationId xmlns:a16="http://schemas.microsoft.com/office/drawing/2014/main" id="{73EEF4A3-E5C0-1B37-08F6-80175F6CC82A}"/>
+                </a:ext>
+              </a:extLst>
+            </p:cNvPr>
+            <p:cNvCxnSpPr>
+              <a:stCxn id="10" idx="4"/>
+              <a:endCxn id="8" idx="0"/>
+            </p:cNvCxnSpPr>
+            <p:nvPr/>
+          </p:nvCxnSpPr>
+          <p:spPr>
+            <a:xfrm>
+              <a:off x="2715252" y="2833439"/>
+              <a:ext cx="759649" cy="1094604"/>
+            </a:xfrm>
+            <a:prstGeom prst="straightConnector1">
+              <a:avLst/>
+            </a:prstGeom>
+            <a:ln w="38100">
+              <a:solidFill>
+                <a:schemeClr val="tx1"/>
+              </a:solidFill>
+              <a:headEnd w="lg" len="lg"/>
+              <a:tailEnd type="triangle" w="lg" len="lg"/>
+            </a:ln>
+          </p:spPr>
+          <p:style>
+            <a:lnRef idx="1">
+              <a:schemeClr val="accent1"/>
+            </a:lnRef>
+            <a:fillRef idx="0">
+              <a:schemeClr val="accent1"/>
+            </a:fillRef>
+            <a:effectRef idx="0">
+              <a:schemeClr val="accent1"/>
+            </a:effectRef>
+            <a:fontRef idx="minor">
+              <a:schemeClr val="tx1"/>
+            </a:fontRef>
+          </p:style>
+        </p:cxnSp>
+        <p:cxnSp>
+          <p:nvCxnSpPr>
+            <p:cNvPr id="14" name="Straight Arrow Connector 13">
+              <a:extLst>
+                <a:ext uri="{FF2B5EF4-FFF2-40B4-BE49-F238E27FC236}">
+                  <a16:creationId xmlns:a16="http://schemas.microsoft.com/office/drawing/2014/main" id="{F8103F2F-D5B3-5507-22BD-34FA9E9CDAF5}"/>
+                </a:ext>
+              </a:extLst>
+            </p:cNvPr>
+            <p:cNvCxnSpPr>
+              <a:stCxn id="10" idx="4"/>
+              <a:endCxn id="9" idx="0"/>
+            </p:cNvCxnSpPr>
+            <p:nvPr/>
+          </p:nvCxnSpPr>
+          <p:spPr>
+            <a:xfrm>
+              <a:off x="2715252" y="2833439"/>
+              <a:ext cx="2240275" cy="1094604"/>
+            </a:xfrm>
+            <a:prstGeom prst="straightConnector1">
+              <a:avLst/>
+            </a:prstGeom>
+            <a:ln w="38100">
+              <a:solidFill>
+                <a:schemeClr val="tx1"/>
+              </a:solidFill>
+              <a:headEnd w="lg" len="lg"/>
+              <a:tailEnd type="triangle" w="lg" len="lg"/>
+            </a:ln>
+          </p:spPr>
+          <p:style>
+            <a:lnRef idx="1">
+              <a:schemeClr val="accent1"/>
+            </a:lnRef>
+            <a:fillRef idx="0">
+              <a:schemeClr val="accent1"/>
+            </a:fillRef>
+            <a:effectRef idx="0">
+              <a:schemeClr val="accent1"/>
+            </a:effectRef>
+            <a:fontRef idx="minor">
+              <a:schemeClr val="tx1"/>
+            </a:fontRef>
+          </p:style>
+        </p:cxnSp>
+        <p:sp>
+          <p:nvSpPr>
+            <p:cNvPr id="15" name="Arc 14">
+              <a:extLst>
+                <a:ext uri="{FF2B5EF4-FFF2-40B4-BE49-F238E27FC236}">
+                  <a16:creationId xmlns:a16="http://schemas.microsoft.com/office/drawing/2014/main" id="{59D1F9DD-426A-61CC-DCD4-861C97AE5982}"/>
+                </a:ext>
+              </a:extLst>
+            </p:cNvPr>
+            <p:cNvSpPr/>
+            <p:nvPr/>
+          </p:nvSpPr>
+          <p:spPr>
+            <a:xfrm rot="15103718">
+              <a:off x="3117195" y="1591532"/>
+              <a:ext cx="721895" cy="705852"/>
+            </a:xfrm>
+            <a:prstGeom prst="arc">
+              <a:avLst>
+                <a:gd name="adj1" fmla="val 16200000"/>
+                <a:gd name="adj2" fmla="val 13932934"/>
+              </a:avLst>
+            </a:prstGeom>
+            <a:noFill/>
+            <a:ln w="38100">
+              <a:solidFill>
+                <a:schemeClr val="tx1"/>
+              </a:solidFill>
+              <a:headEnd type="triangle" w="lg" len="lg"/>
+              <a:tailEnd type="triangle" w="lg" len="lg"/>
+            </a:ln>
+          </p:spPr>
+          <p:style>
+            <a:lnRef idx="1">
+              <a:schemeClr val="accent1"/>
+            </a:lnRef>
+            <a:fillRef idx="0">
+              <a:schemeClr val="accent1"/>
+            </a:fillRef>
+            <a:effectRef idx="0">
+              <a:schemeClr val="accent1"/>
+            </a:effectRef>
+            <a:fontRef idx="minor">
+              <a:schemeClr val="tx1"/>
+            </a:fontRef>
+          </p:style>
+          <p:txBody>
+            <a:bodyPr rtlCol="0" anchor="ctr"/>
+            <a:lstStyle/>
+            <a:p>
+              <a:pPr algn="ctr"/>
+              <a:endParaRPr lang="en-GB" sz="3200"/>
+            </a:p>
+          </p:txBody>
+        </p:sp>
+        <p:sp>
+          <p:nvSpPr>
+            <p:cNvPr id="16" name="Oval 15">
+              <a:extLst>
+                <a:ext uri="{FF2B5EF4-FFF2-40B4-BE49-F238E27FC236}">
+                  <a16:creationId xmlns:a16="http://schemas.microsoft.com/office/drawing/2014/main" id="{3FED416D-9215-7EBE-6FF6-7D65F1B17876}"/>
+                </a:ext>
+              </a:extLst>
+            </p:cNvPr>
+            <p:cNvSpPr/>
+            <p:nvPr/>
+          </p:nvSpPr>
+          <p:spPr>
+            <a:xfrm>
+              <a:off x="0" y="5162189"/>
+              <a:ext cx="812744" cy="623385"/>
+            </a:xfrm>
+            <a:prstGeom prst="ellipse">
+              <a:avLst/>
+            </a:prstGeom>
+            <a:solidFill>
+              <a:schemeClr val="bg1"/>
+            </a:solidFill>
+            <a:ln>
+              <a:solidFill>
+                <a:schemeClr val="tx1"/>
+              </a:solidFill>
+            </a:ln>
+          </p:spPr>
+          <p:style>
+            <a:lnRef idx="2">
+              <a:schemeClr val="accent1">
+                <a:shade val="50000"/>
+              </a:schemeClr>
+            </a:lnRef>
+            <a:fillRef idx="1">
+              <a:schemeClr val="accent1"/>
+            </a:fillRef>
+            <a:effectRef idx="0">
+              <a:schemeClr val="accent1"/>
+            </a:effectRef>
+            <a:fontRef idx="minor">
+              <a:schemeClr val="lt1"/>
+            </a:fontRef>
+          </p:style>
+          <p:txBody>
+            <a:bodyPr rtlCol="0" anchor="ctr"/>
+            <a:lstStyle/>
+            <a:p>
+              <a:pPr algn="ctr"/>
+              <a:r>
+                <a:rPr lang="en-GB" sz="2400" dirty="0">
+                  <a:solidFill>
+                    <a:schemeClr val="tx1"/>
+                  </a:solidFill>
+                </a:rPr>
+                <a:t>u</a:t>
+              </a:r>
+              <a:r>
+                <a:rPr lang="en-GB" sz="2400" baseline="-25000" dirty="0">
+                  <a:solidFill>
+                    <a:schemeClr val="tx1"/>
+                  </a:solidFill>
+                </a:rPr>
+                <a:t>1</a:t>
+              </a:r>
+              <a:endParaRPr lang="en-GB" sz="2400" dirty="0">
+                <a:solidFill>
+                  <a:schemeClr val="tx1"/>
+                </a:solidFill>
+              </a:endParaRPr>
+            </a:p>
+          </p:txBody>
+        </p:sp>
+        <p:cxnSp>
+          <p:nvCxnSpPr>
+            <p:cNvPr id="17" name="Straight Arrow Connector 16">
+              <a:extLst>
+                <a:ext uri="{FF2B5EF4-FFF2-40B4-BE49-F238E27FC236}">
+                  <a16:creationId xmlns:a16="http://schemas.microsoft.com/office/drawing/2014/main" id="{C925A0CC-081C-04D9-5348-67E29CD9446C}"/>
+                </a:ext>
+              </a:extLst>
+            </p:cNvPr>
+            <p:cNvCxnSpPr>
+              <a:cxnSpLocks/>
+              <a:stCxn id="16" idx="0"/>
+              <a:endCxn id="5" idx="2"/>
+            </p:cNvCxnSpPr>
+            <p:nvPr/>
+          </p:nvCxnSpPr>
+          <p:spPr>
+            <a:xfrm flipV="1">
+              <a:off x="406372" y="4633895"/>
+              <a:ext cx="1" cy="528294"/>
+            </a:xfrm>
+            <a:prstGeom prst="straightConnector1">
+              <a:avLst/>
+            </a:prstGeom>
+            <a:ln w="28575">
+              <a:solidFill>
+                <a:schemeClr val="tx1"/>
+              </a:solidFill>
+              <a:tailEnd type="triangle"/>
+            </a:ln>
+          </p:spPr>
+          <p:style>
+            <a:lnRef idx="1">
+              <a:schemeClr val="accent1"/>
+            </a:lnRef>
+            <a:fillRef idx="0">
+              <a:schemeClr val="accent1"/>
+            </a:fillRef>
+            <a:effectRef idx="0">
+              <a:schemeClr val="accent1"/>
+            </a:effectRef>
+            <a:fontRef idx="minor">
+              <a:schemeClr val="tx1"/>
+            </a:fontRef>
+          </p:style>
+        </p:cxnSp>
+        <p:sp>
+          <p:nvSpPr>
+            <p:cNvPr id="18" name="TextBox 17">
+              <a:extLst>
+                <a:ext uri="{FF2B5EF4-FFF2-40B4-BE49-F238E27FC236}">
+                  <a16:creationId xmlns:a16="http://schemas.microsoft.com/office/drawing/2014/main" id="{09237F45-9E2B-8617-9995-30ED8AD51B14}"/>
+                </a:ext>
+              </a:extLst>
+            </p:cNvPr>
+            <p:cNvSpPr txBox="1"/>
+            <p:nvPr/>
+          </p:nvSpPr>
+          <p:spPr>
+            <a:xfrm>
+              <a:off x="260338" y="6211669"/>
+              <a:ext cx="292068" cy="369332"/>
+            </a:xfrm>
+            <a:prstGeom prst="rect">
+              <a:avLst/>
+            </a:prstGeom>
+            <a:noFill/>
+          </p:spPr>
+          <p:txBody>
+            <a:bodyPr wrap="square" rtlCol="0">
+              <a:spAutoFit/>
+            </a:bodyPr>
+            <a:lstStyle/>
+            <a:p>
+              <a:r>
+                <a:rPr lang="en-GB" b="1" dirty="0">
+                  <a:solidFill>
+                    <a:schemeClr val="accent1"/>
+                  </a:solidFill>
+                </a:rPr>
+                <a:t>?</a:t>
+              </a:r>
+            </a:p>
+          </p:txBody>
+        </p:sp>
+        <p:sp>
+          <p:nvSpPr>
+            <p:cNvPr id="19" name="Arc 18">
+              <a:extLst>
+                <a:ext uri="{FF2B5EF4-FFF2-40B4-BE49-F238E27FC236}">
+                  <a16:creationId xmlns:a16="http://schemas.microsoft.com/office/drawing/2014/main" id="{12807F24-2383-2036-1C9D-993CD6A3B8D3}"/>
+                </a:ext>
+              </a:extLst>
+            </p:cNvPr>
+            <p:cNvSpPr/>
+            <p:nvPr/>
+          </p:nvSpPr>
+          <p:spPr>
+            <a:xfrm rot="1003916">
+              <a:off x="1686766" y="5761182"/>
+              <a:ext cx="485858" cy="468622"/>
+            </a:xfrm>
+            <a:prstGeom prst="arc">
+              <a:avLst>
+                <a:gd name="adj1" fmla="val 16200000"/>
+                <a:gd name="adj2" fmla="val 13932934"/>
+              </a:avLst>
+            </a:prstGeom>
+            <a:noFill/>
+            <a:ln w="28575">
+              <a:solidFill>
+                <a:schemeClr val="tx1"/>
+              </a:solidFill>
+              <a:headEnd type="triangle" w="lg" len="lg"/>
+              <a:tailEnd type="triangle" w="lg" len="lg"/>
+            </a:ln>
+          </p:spPr>
+          <p:style>
+            <a:lnRef idx="1">
+              <a:schemeClr val="accent1"/>
+            </a:lnRef>
+            <a:fillRef idx="0">
+              <a:schemeClr val="accent1"/>
+            </a:fillRef>
+            <a:effectRef idx="0">
+              <a:schemeClr val="accent1"/>
+            </a:effectRef>
+            <a:fontRef idx="minor">
+              <a:schemeClr val="tx1"/>
+            </a:fontRef>
+          </p:style>
+          <p:txBody>
+            <a:bodyPr rtlCol="0" anchor="ctr"/>
+            <a:lstStyle/>
+            <a:p>
+              <a:pPr algn="ctr"/>
+              <a:endParaRPr lang="en-GB" sz="3200" dirty="0"/>
+            </a:p>
+          </p:txBody>
+        </p:sp>
+        <p:sp>
+          <p:nvSpPr>
+            <p:cNvPr id="20" name="Oval 19">
+              <a:extLst>
+                <a:ext uri="{FF2B5EF4-FFF2-40B4-BE49-F238E27FC236}">
+                  <a16:creationId xmlns:a16="http://schemas.microsoft.com/office/drawing/2014/main" id="{377EFFEF-73BF-1CD2-CE90-5896C80C1EE0}"/>
+                </a:ext>
+              </a:extLst>
+            </p:cNvPr>
+            <p:cNvSpPr/>
+            <p:nvPr/>
+          </p:nvSpPr>
+          <p:spPr>
+            <a:xfrm>
+              <a:off x="1523323" y="5162189"/>
+              <a:ext cx="812744" cy="623385"/>
+            </a:xfrm>
+            <a:prstGeom prst="ellipse">
+              <a:avLst/>
+            </a:prstGeom>
+            <a:solidFill>
+              <a:schemeClr val="bg1"/>
+            </a:solidFill>
+            <a:ln>
+              <a:solidFill>
+                <a:schemeClr val="tx1"/>
+              </a:solidFill>
+            </a:ln>
+          </p:spPr>
+          <p:style>
+            <a:lnRef idx="2">
+              <a:schemeClr val="accent1">
+                <a:shade val="50000"/>
+              </a:schemeClr>
+            </a:lnRef>
+            <a:fillRef idx="1">
+              <a:schemeClr val="accent1"/>
+            </a:fillRef>
+            <a:effectRef idx="0">
+              <a:schemeClr val="accent1"/>
+            </a:effectRef>
+            <a:fontRef idx="minor">
+              <a:schemeClr val="lt1"/>
+            </a:fontRef>
+          </p:style>
+          <p:txBody>
+            <a:bodyPr rtlCol="0" anchor="ctr"/>
+            <a:lstStyle/>
+            <a:p>
+              <a:pPr algn="ctr"/>
+              <a:r>
+                <a:rPr lang="en-GB" sz="2400" dirty="0">
+                  <a:solidFill>
+                    <a:schemeClr val="tx1"/>
+                  </a:solidFill>
+                </a:rPr>
+                <a:t>u</a:t>
+              </a:r>
+              <a:r>
+                <a:rPr lang="en-GB" sz="2400" baseline="-25000" dirty="0">
+                  <a:solidFill>
+                    <a:schemeClr val="tx1"/>
+                  </a:solidFill>
+                </a:rPr>
+                <a:t>2</a:t>
+              </a:r>
+              <a:endParaRPr lang="en-GB" sz="2400" dirty="0">
+                <a:solidFill>
+                  <a:schemeClr val="tx1"/>
+                </a:solidFill>
+              </a:endParaRPr>
+            </a:p>
+          </p:txBody>
+        </p:sp>
+        <p:cxnSp>
+          <p:nvCxnSpPr>
+            <p:cNvPr id="21" name="Straight Arrow Connector 20">
+              <a:extLst>
+                <a:ext uri="{FF2B5EF4-FFF2-40B4-BE49-F238E27FC236}">
+                  <a16:creationId xmlns:a16="http://schemas.microsoft.com/office/drawing/2014/main" id="{27EC3FF9-5BEA-EADD-D7C2-1B18F4DDD601}"/>
+                </a:ext>
+              </a:extLst>
+            </p:cNvPr>
+            <p:cNvCxnSpPr>
+              <a:cxnSpLocks/>
+              <a:stCxn id="20" idx="0"/>
+              <a:endCxn id="6" idx="2"/>
+            </p:cNvCxnSpPr>
+            <p:nvPr/>
+          </p:nvCxnSpPr>
+          <p:spPr>
+            <a:xfrm flipV="1">
+              <a:off x="1929695" y="4633895"/>
+              <a:ext cx="0" cy="528294"/>
+            </a:xfrm>
+            <a:prstGeom prst="straightConnector1">
+              <a:avLst/>
+            </a:prstGeom>
+            <a:ln w="28575">
+              <a:solidFill>
+                <a:schemeClr val="tx1"/>
+              </a:solidFill>
+              <a:tailEnd type="triangle"/>
+            </a:ln>
+          </p:spPr>
+          <p:style>
+            <a:lnRef idx="1">
+              <a:schemeClr val="accent1"/>
+            </a:lnRef>
+            <a:fillRef idx="0">
+              <a:schemeClr val="accent1"/>
+            </a:fillRef>
+            <a:effectRef idx="0">
+              <a:schemeClr val="accent1"/>
+            </a:effectRef>
+            <a:fontRef idx="minor">
+              <a:schemeClr val="tx1"/>
+            </a:fontRef>
+          </p:style>
+        </p:cxnSp>
+        <p:sp>
+          <p:nvSpPr>
+            <p:cNvPr id="22" name="TextBox 21">
+              <a:extLst>
+                <a:ext uri="{FF2B5EF4-FFF2-40B4-BE49-F238E27FC236}">
+                  <a16:creationId xmlns:a16="http://schemas.microsoft.com/office/drawing/2014/main" id="{3A337085-1B46-5578-B7E1-40831405488C}"/>
+                </a:ext>
+              </a:extLst>
+            </p:cNvPr>
+            <p:cNvSpPr txBox="1"/>
+            <p:nvPr/>
+          </p:nvSpPr>
+          <p:spPr>
+            <a:xfrm>
+              <a:off x="1783661" y="6211669"/>
+              <a:ext cx="292068" cy="369332"/>
+            </a:xfrm>
+            <a:prstGeom prst="rect">
+              <a:avLst/>
+            </a:prstGeom>
+            <a:noFill/>
+          </p:spPr>
+          <p:txBody>
+            <a:bodyPr wrap="square" rtlCol="0">
+              <a:spAutoFit/>
+            </a:bodyPr>
+            <a:lstStyle/>
+            <a:p>
+              <a:r>
+                <a:rPr lang="en-GB" b="1" dirty="0">
+                  <a:solidFill>
+                    <a:schemeClr val="accent1"/>
+                  </a:solidFill>
+                </a:rPr>
+                <a:t>?</a:t>
+              </a:r>
+            </a:p>
+          </p:txBody>
+        </p:sp>
+        <p:sp>
+          <p:nvSpPr>
+            <p:cNvPr id="23" name="Arc 22">
+              <a:extLst>
+                <a:ext uri="{FF2B5EF4-FFF2-40B4-BE49-F238E27FC236}">
+                  <a16:creationId xmlns:a16="http://schemas.microsoft.com/office/drawing/2014/main" id="{400F977E-5349-803B-1142-13C4CD73A7FE}"/>
+                </a:ext>
+              </a:extLst>
+            </p:cNvPr>
+            <p:cNvSpPr/>
+            <p:nvPr/>
+          </p:nvSpPr>
+          <p:spPr>
+            <a:xfrm rot="1003916">
+              <a:off x="3231972" y="5761182"/>
+              <a:ext cx="485858" cy="468622"/>
+            </a:xfrm>
+            <a:prstGeom prst="arc">
+              <a:avLst>
+                <a:gd name="adj1" fmla="val 16200000"/>
+                <a:gd name="adj2" fmla="val 13932934"/>
+              </a:avLst>
+            </a:prstGeom>
+            <a:noFill/>
+            <a:ln w="28575">
+              <a:solidFill>
+                <a:schemeClr val="tx1"/>
+              </a:solidFill>
+              <a:headEnd type="triangle" w="lg" len="lg"/>
+              <a:tailEnd type="triangle" w="lg" len="lg"/>
+            </a:ln>
+          </p:spPr>
+          <p:style>
+            <a:lnRef idx="1">
+              <a:schemeClr val="accent1"/>
+            </a:lnRef>
+            <a:fillRef idx="0">
+              <a:schemeClr val="accent1"/>
+            </a:fillRef>
+            <a:effectRef idx="0">
+              <a:schemeClr val="accent1"/>
+            </a:effectRef>
+            <a:fontRef idx="minor">
+              <a:schemeClr val="tx1"/>
+            </a:fontRef>
+          </p:style>
+          <p:txBody>
+            <a:bodyPr rtlCol="0" anchor="ctr"/>
+            <a:lstStyle/>
+            <a:p>
+              <a:pPr algn="ctr"/>
+              <a:endParaRPr lang="en-GB" sz="3200" dirty="0"/>
+            </a:p>
+          </p:txBody>
+        </p:sp>
+        <p:sp>
+          <p:nvSpPr>
+            <p:cNvPr id="24" name="Oval 23">
+              <a:extLst>
+                <a:ext uri="{FF2B5EF4-FFF2-40B4-BE49-F238E27FC236}">
+                  <a16:creationId xmlns:a16="http://schemas.microsoft.com/office/drawing/2014/main" id="{AD762372-300D-A428-0FDA-4EDCA54E7982}"/>
+                </a:ext>
+              </a:extLst>
+            </p:cNvPr>
+            <p:cNvSpPr/>
+            <p:nvPr/>
+          </p:nvSpPr>
+          <p:spPr>
+            <a:xfrm>
+              <a:off x="3068529" y="5162189"/>
+              <a:ext cx="812744" cy="623385"/>
+            </a:xfrm>
+            <a:prstGeom prst="ellipse">
+              <a:avLst/>
+            </a:prstGeom>
+            <a:solidFill>
+              <a:schemeClr val="bg1"/>
+            </a:solidFill>
+            <a:ln>
+              <a:solidFill>
+                <a:schemeClr val="tx1"/>
+              </a:solidFill>
+            </a:ln>
+          </p:spPr>
+          <p:style>
+            <a:lnRef idx="2">
+              <a:schemeClr val="accent1">
+                <a:shade val="50000"/>
+              </a:schemeClr>
+            </a:lnRef>
+            <a:fillRef idx="1">
+              <a:schemeClr val="accent1"/>
+            </a:fillRef>
+            <a:effectRef idx="0">
+              <a:schemeClr val="accent1"/>
+            </a:effectRef>
+            <a:fontRef idx="minor">
+              <a:schemeClr val="lt1"/>
+            </a:fontRef>
+          </p:style>
+          <p:txBody>
+            <a:bodyPr rtlCol="0" anchor="ctr"/>
+            <a:lstStyle/>
+            <a:p>
+              <a:pPr algn="ctr"/>
+              <a:r>
+                <a:rPr lang="en-GB" sz="2400" dirty="0">
+                  <a:solidFill>
+                    <a:schemeClr val="tx1"/>
+                  </a:solidFill>
+                </a:rPr>
+                <a:t>u</a:t>
+              </a:r>
+              <a:r>
+                <a:rPr lang="en-GB" sz="2400" baseline="-25000" dirty="0">
+                  <a:solidFill>
+                    <a:schemeClr val="tx1"/>
+                  </a:solidFill>
+                </a:rPr>
+                <a:t>3</a:t>
+              </a:r>
+              <a:endParaRPr lang="en-GB" sz="2400" dirty="0">
+                <a:solidFill>
+                  <a:schemeClr val="tx1"/>
+                </a:solidFill>
+              </a:endParaRPr>
+            </a:p>
+          </p:txBody>
+        </p:sp>
+        <p:cxnSp>
+          <p:nvCxnSpPr>
+            <p:cNvPr id="25" name="Straight Arrow Connector 24">
+              <a:extLst>
+                <a:ext uri="{FF2B5EF4-FFF2-40B4-BE49-F238E27FC236}">
+                  <a16:creationId xmlns:a16="http://schemas.microsoft.com/office/drawing/2014/main" id="{55BF2A0F-3EC2-C078-54C5-BCCA2975412C}"/>
+                </a:ext>
+              </a:extLst>
+            </p:cNvPr>
+            <p:cNvCxnSpPr>
+              <a:cxnSpLocks/>
+              <a:stCxn id="24" idx="0"/>
+              <a:endCxn id="8" idx="2"/>
+            </p:cNvCxnSpPr>
+            <p:nvPr/>
+          </p:nvCxnSpPr>
+          <p:spPr>
+            <a:xfrm flipV="1">
+              <a:off x="3474901" y="4633895"/>
+              <a:ext cx="0" cy="528294"/>
+            </a:xfrm>
+            <a:prstGeom prst="straightConnector1">
+              <a:avLst/>
+            </a:prstGeom>
+            <a:ln w="28575">
+              <a:solidFill>
+                <a:schemeClr val="tx1"/>
+              </a:solidFill>
+              <a:tailEnd type="triangle"/>
+            </a:ln>
+          </p:spPr>
+          <p:style>
+            <a:lnRef idx="1">
+              <a:schemeClr val="accent1"/>
+            </a:lnRef>
+            <a:fillRef idx="0">
+              <a:schemeClr val="accent1"/>
+            </a:fillRef>
+            <a:effectRef idx="0">
+              <a:schemeClr val="accent1"/>
+            </a:effectRef>
+            <a:fontRef idx="minor">
+              <a:schemeClr val="tx1"/>
+            </a:fontRef>
+          </p:style>
+        </p:cxnSp>
+        <p:sp>
+          <p:nvSpPr>
+            <p:cNvPr id="26" name="TextBox 25">
+              <a:extLst>
+                <a:ext uri="{FF2B5EF4-FFF2-40B4-BE49-F238E27FC236}">
+                  <a16:creationId xmlns:a16="http://schemas.microsoft.com/office/drawing/2014/main" id="{9D06463A-5022-7515-2C3C-43AA916B2E42}"/>
+                </a:ext>
+              </a:extLst>
+            </p:cNvPr>
+            <p:cNvSpPr txBox="1"/>
+            <p:nvPr/>
+          </p:nvSpPr>
+          <p:spPr>
+            <a:xfrm>
+              <a:off x="3328867" y="6211669"/>
+              <a:ext cx="292068" cy="369332"/>
+            </a:xfrm>
+            <a:prstGeom prst="rect">
+              <a:avLst/>
+            </a:prstGeom>
+            <a:noFill/>
+          </p:spPr>
+          <p:txBody>
+            <a:bodyPr wrap="square" rtlCol="0">
+              <a:spAutoFit/>
+            </a:bodyPr>
+            <a:lstStyle/>
+            <a:p>
+              <a:r>
+                <a:rPr lang="en-GB" b="1" dirty="0">
+                  <a:solidFill>
+                    <a:schemeClr val="accent1"/>
+                  </a:solidFill>
+                </a:rPr>
+                <a:t>?</a:t>
+              </a:r>
+            </a:p>
+          </p:txBody>
+        </p:sp>
+        <p:sp>
+          <p:nvSpPr>
+            <p:cNvPr id="27" name="Arc 26">
+              <a:extLst>
+                <a:ext uri="{FF2B5EF4-FFF2-40B4-BE49-F238E27FC236}">
+                  <a16:creationId xmlns:a16="http://schemas.microsoft.com/office/drawing/2014/main" id="{7314C60E-AD6A-20BE-44AF-13353AECE909}"/>
+                </a:ext>
+              </a:extLst>
+            </p:cNvPr>
+            <p:cNvSpPr/>
+            <p:nvPr/>
+          </p:nvSpPr>
+          <p:spPr>
+            <a:xfrm rot="1003916">
+              <a:off x="4712598" y="5761182"/>
+              <a:ext cx="485858" cy="468622"/>
+            </a:xfrm>
+            <a:prstGeom prst="arc">
+              <a:avLst>
+                <a:gd name="adj1" fmla="val 16200000"/>
+                <a:gd name="adj2" fmla="val 13932934"/>
+              </a:avLst>
+            </a:prstGeom>
+            <a:noFill/>
+            <a:ln w="28575">
+              <a:solidFill>
+                <a:schemeClr val="tx1"/>
+              </a:solidFill>
+              <a:headEnd type="triangle" w="lg" len="lg"/>
+              <a:tailEnd type="triangle" w="lg" len="lg"/>
+            </a:ln>
+          </p:spPr>
+          <p:style>
+            <a:lnRef idx="1">
+              <a:schemeClr val="accent1"/>
+            </a:lnRef>
+            <a:fillRef idx="0">
+              <a:schemeClr val="accent1"/>
+            </a:fillRef>
+            <a:effectRef idx="0">
+              <a:schemeClr val="accent1"/>
+            </a:effectRef>
+            <a:fontRef idx="minor">
+              <a:schemeClr val="tx1"/>
+            </a:fontRef>
+          </p:style>
+          <p:txBody>
+            <a:bodyPr rtlCol="0" anchor="ctr"/>
+            <a:lstStyle/>
+            <a:p>
+              <a:pPr algn="ctr"/>
+              <a:endParaRPr lang="en-GB" sz="3200" dirty="0"/>
+            </a:p>
+          </p:txBody>
+        </p:sp>
+        <p:sp>
+          <p:nvSpPr>
+            <p:cNvPr id="28" name="Oval 27">
+              <a:extLst>
+                <a:ext uri="{FF2B5EF4-FFF2-40B4-BE49-F238E27FC236}">
+                  <a16:creationId xmlns:a16="http://schemas.microsoft.com/office/drawing/2014/main" id="{787BF4B6-4CB5-FCBB-CF95-47DDB265BD7A}"/>
+                </a:ext>
+              </a:extLst>
+            </p:cNvPr>
+            <p:cNvSpPr/>
+            <p:nvPr/>
+          </p:nvSpPr>
+          <p:spPr>
+            <a:xfrm>
+              <a:off x="4549155" y="5162189"/>
+              <a:ext cx="812744" cy="623385"/>
+            </a:xfrm>
+            <a:prstGeom prst="ellipse">
+              <a:avLst/>
+            </a:prstGeom>
+            <a:solidFill>
+              <a:schemeClr val="bg1"/>
+            </a:solidFill>
+            <a:ln>
+              <a:solidFill>
+                <a:schemeClr val="tx1"/>
+              </a:solidFill>
+            </a:ln>
+          </p:spPr>
+          <p:style>
+            <a:lnRef idx="2">
+              <a:schemeClr val="accent1">
+                <a:shade val="50000"/>
+              </a:schemeClr>
+            </a:lnRef>
+            <a:fillRef idx="1">
+              <a:schemeClr val="accent1"/>
+            </a:fillRef>
+            <a:effectRef idx="0">
+              <a:schemeClr val="accent1"/>
+            </a:effectRef>
+            <a:fontRef idx="minor">
+              <a:schemeClr val="lt1"/>
+            </a:fontRef>
+          </p:style>
+          <p:txBody>
+            <a:bodyPr rtlCol="0" anchor="ctr"/>
+            <a:lstStyle/>
+            <a:p>
+              <a:pPr algn="ctr"/>
+              <a:r>
+                <a:rPr lang="en-GB" sz="2400" dirty="0">
+                  <a:solidFill>
+                    <a:schemeClr val="tx1"/>
+                  </a:solidFill>
+                </a:rPr>
+                <a:t>u</a:t>
+              </a:r>
+              <a:r>
+                <a:rPr lang="en-GB" sz="2400" baseline="-25000" dirty="0">
+                  <a:solidFill>
+                    <a:schemeClr val="tx1"/>
+                  </a:solidFill>
+                </a:rPr>
+                <a:t>4</a:t>
+              </a:r>
+              <a:endParaRPr lang="en-GB" sz="2400" dirty="0">
+                <a:solidFill>
+                  <a:schemeClr val="tx1"/>
+                </a:solidFill>
+              </a:endParaRPr>
+            </a:p>
+          </p:txBody>
+        </p:sp>
+        <p:cxnSp>
+          <p:nvCxnSpPr>
+            <p:cNvPr id="29" name="Straight Arrow Connector 28">
+              <a:extLst>
+                <a:ext uri="{FF2B5EF4-FFF2-40B4-BE49-F238E27FC236}">
+                  <a16:creationId xmlns:a16="http://schemas.microsoft.com/office/drawing/2014/main" id="{B10F18B3-470D-7675-1693-54B105DFA0C2}"/>
+                </a:ext>
+              </a:extLst>
+            </p:cNvPr>
+            <p:cNvCxnSpPr>
+              <a:cxnSpLocks/>
+              <a:stCxn id="28" idx="0"/>
+              <a:endCxn id="9" idx="2"/>
+            </p:cNvCxnSpPr>
+            <p:nvPr/>
+          </p:nvCxnSpPr>
+          <p:spPr>
+            <a:xfrm flipV="1">
+              <a:off x="4955527" y="4633895"/>
+              <a:ext cx="0" cy="528294"/>
+            </a:xfrm>
+            <a:prstGeom prst="straightConnector1">
+              <a:avLst/>
+            </a:prstGeom>
+            <a:ln w="28575">
+              <a:solidFill>
+                <a:schemeClr val="tx1"/>
+              </a:solidFill>
+              <a:tailEnd type="triangle"/>
+            </a:ln>
+          </p:spPr>
+          <p:style>
+            <a:lnRef idx="1">
+              <a:schemeClr val="accent1"/>
+            </a:lnRef>
+            <a:fillRef idx="0">
+              <a:schemeClr val="accent1"/>
+            </a:fillRef>
+            <a:effectRef idx="0">
+              <a:schemeClr val="accent1"/>
+            </a:effectRef>
+            <a:fontRef idx="minor">
+              <a:schemeClr val="tx1"/>
+            </a:fontRef>
+          </p:style>
+        </p:cxnSp>
+        <p:sp>
+          <p:nvSpPr>
+            <p:cNvPr id="30" name="TextBox 29">
+              <a:extLst>
+                <a:ext uri="{FF2B5EF4-FFF2-40B4-BE49-F238E27FC236}">
+                  <a16:creationId xmlns:a16="http://schemas.microsoft.com/office/drawing/2014/main" id="{E11B6704-8274-5ADC-B4E4-D08A18E9C8FE}"/>
+                </a:ext>
+              </a:extLst>
+            </p:cNvPr>
+            <p:cNvSpPr txBox="1"/>
+            <p:nvPr/>
+          </p:nvSpPr>
+          <p:spPr>
+            <a:xfrm>
+              <a:off x="4809493" y="6211669"/>
+              <a:ext cx="292068" cy="369332"/>
+            </a:xfrm>
+            <a:prstGeom prst="rect">
+              <a:avLst/>
+            </a:prstGeom>
+            <a:noFill/>
+          </p:spPr>
+          <p:txBody>
+            <a:bodyPr wrap="square" rtlCol="0">
+              <a:spAutoFit/>
+            </a:bodyPr>
+            <a:lstStyle/>
+            <a:p>
+              <a:r>
+                <a:rPr lang="en-GB" b="1" dirty="0">
+                  <a:solidFill>
+                    <a:schemeClr val="accent1"/>
+                  </a:solidFill>
+                </a:rPr>
+                <a:t>?</a:t>
+              </a:r>
+            </a:p>
+          </p:txBody>
+        </p:sp>
+        <p:sp>
+          <p:nvSpPr>
+            <p:cNvPr id="31" name="TextBox 30">
+              <a:extLst>
+                <a:ext uri="{FF2B5EF4-FFF2-40B4-BE49-F238E27FC236}">
+                  <a16:creationId xmlns:a16="http://schemas.microsoft.com/office/drawing/2014/main" id="{2E724B4F-78D1-B8FA-9CED-9384B0F6FCC8}"/>
+                </a:ext>
+              </a:extLst>
+            </p:cNvPr>
+            <p:cNvSpPr txBox="1"/>
+            <p:nvPr/>
+          </p:nvSpPr>
+          <p:spPr>
+            <a:xfrm>
+              <a:off x="3628384" y="1236834"/>
+              <a:ext cx="351378" cy="523220"/>
+            </a:xfrm>
+            <a:prstGeom prst="rect">
+              <a:avLst/>
+            </a:prstGeom>
+            <a:noFill/>
+          </p:spPr>
+          <p:txBody>
+            <a:bodyPr wrap="square" rtlCol="0">
+              <a:spAutoFit/>
+            </a:bodyPr>
+            <a:lstStyle/>
+            <a:p>
+              <a:r>
+                <a:rPr lang="en-GB" sz="2800" dirty="0">
+                  <a:solidFill>
+                    <a:schemeClr val="accent1"/>
+                  </a:solidFill>
+                </a:rPr>
+                <a:t>?</a:t>
+              </a:r>
+            </a:p>
+          </p:txBody>
+        </p:sp>
+        <p:sp>
+          <p:nvSpPr>
+            <p:cNvPr id="32" name="TextBox 31">
+              <a:extLst>
+                <a:ext uri="{FF2B5EF4-FFF2-40B4-BE49-F238E27FC236}">
+                  <a16:creationId xmlns:a16="http://schemas.microsoft.com/office/drawing/2014/main" id="{20794FF1-8B4D-BE9C-3D06-79DEBD40F74B}"/>
+                </a:ext>
+              </a:extLst>
+            </p:cNvPr>
+            <p:cNvSpPr txBox="1"/>
+            <p:nvPr/>
+          </p:nvSpPr>
+          <p:spPr>
+            <a:xfrm>
+              <a:off x="1018871" y="3119131"/>
+              <a:ext cx="351378" cy="523220"/>
+            </a:xfrm>
+            <a:prstGeom prst="rect">
+              <a:avLst/>
+            </a:prstGeom>
+            <a:noFill/>
+          </p:spPr>
+          <p:txBody>
+            <a:bodyPr wrap="square" rtlCol="0">
+              <a:spAutoFit/>
+            </a:bodyPr>
+            <a:lstStyle/>
+            <a:p>
+              <a:r>
+                <a:rPr lang="en-GB" sz="2800" dirty="0">
+                  <a:solidFill>
+                    <a:srgbClr val="FF0000"/>
+                  </a:solidFill>
+                </a:rPr>
+                <a:t>?</a:t>
+              </a:r>
+            </a:p>
+          </p:txBody>
+        </p:sp>
+        <p:sp>
+          <p:nvSpPr>
+            <p:cNvPr id="33" name="TextBox 32">
+              <a:extLst>
+                <a:ext uri="{FF2B5EF4-FFF2-40B4-BE49-F238E27FC236}">
+                  <a16:creationId xmlns:a16="http://schemas.microsoft.com/office/drawing/2014/main" id="{B90B2AF3-EC9F-7B9F-6150-F0FAF14BE70A}"/>
+                </a:ext>
+              </a:extLst>
+            </p:cNvPr>
+            <p:cNvSpPr txBox="1"/>
+            <p:nvPr/>
+          </p:nvSpPr>
+          <p:spPr>
+            <a:xfrm>
+              <a:off x="2229796" y="3288551"/>
+              <a:ext cx="351378" cy="523220"/>
+            </a:xfrm>
+            <a:prstGeom prst="rect">
+              <a:avLst/>
+            </a:prstGeom>
+            <a:noFill/>
+          </p:spPr>
+          <p:txBody>
+            <a:bodyPr wrap="square" rtlCol="0">
+              <a:spAutoFit/>
+            </a:bodyPr>
+            <a:lstStyle/>
+            <a:p>
+              <a:r>
+                <a:rPr lang="en-GB" sz="2800" dirty="0">
+                  <a:solidFill>
+                    <a:srgbClr val="FF0000"/>
+                  </a:solidFill>
+                </a:rPr>
+                <a:t>?</a:t>
+              </a:r>
+            </a:p>
+          </p:txBody>
+        </p:sp>
+        <p:sp>
+          <p:nvSpPr>
+            <p:cNvPr id="34" name="TextBox 33">
+              <a:extLst>
+                <a:ext uri="{FF2B5EF4-FFF2-40B4-BE49-F238E27FC236}">
+                  <a16:creationId xmlns:a16="http://schemas.microsoft.com/office/drawing/2014/main" id="{018BF40E-FCE2-3181-B731-DE957003463B}"/>
+                </a:ext>
+              </a:extLst>
+            </p:cNvPr>
+            <p:cNvSpPr txBox="1"/>
+            <p:nvPr/>
+          </p:nvSpPr>
+          <p:spPr>
+            <a:xfrm>
+              <a:off x="2857855" y="3288551"/>
+              <a:ext cx="351378" cy="523220"/>
+            </a:xfrm>
+            <a:prstGeom prst="rect">
+              <a:avLst/>
+            </a:prstGeom>
+            <a:noFill/>
+          </p:spPr>
+          <p:txBody>
+            <a:bodyPr wrap="square" rtlCol="0">
+              <a:spAutoFit/>
+            </a:bodyPr>
+            <a:lstStyle/>
+            <a:p>
+              <a:r>
+                <a:rPr lang="en-GB" sz="2800" dirty="0">
+                  <a:solidFill>
+                    <a:srgbClr val="FF0000"/>
+                  </a:solidFill>
+                </a:rPr>
+                <a:t>?</a:t>
+              </a:r>
+            </a:p>
+          </p:txBody>
+        </p:sp>
+        <p:sp>
+          <p:nvSpPr>
+            <p:cNvPr id="35" name="TextBox 34">
+              <a:extLst>
+                <a:ext uri="{FF2B5EF4-FFF2-40B4-BE49-F238E27FC236}">
+                  <a16:creationId xmlns:a16="http://schemas.microsoft.com/office/drawing/2014/main" id="{4580155F-AC11-8A79-BD63-1DB90987CC8A}"/>
+                </a:ext>
+              </a:extLst>
+            </p:cNvPr>
+            <p:cNvSpPr txBox="1"/>
+            <p:nvPr/>
+          </p:nvSpPr>
+          <p:spPr>
+            <a:xfrm>
+              <a:off x="4084769" y="3119131"/>
+              <a:ext cx="351378" cy="523220"/>
+            </a:xfrm>
+            <a:prstGeom prst="rect">
+              <a:avLst/>
+            </a:prstGeom>
+            <a:noFill/>
+          </p:spPr>
+          <p:txBody>
+            <a:bodyPr wrap="square" rtlCol="0">
+              <a:spAutoFit/>
+            </a:bodyPr>
+            <a:lstStyle/>
+            <a:p>
+              <a:r>
+                <a:rPr lang="en-GB" sz="2800" dirty="0">
+                  <a:solidFill>
+                    <a:srgbClr val="FF0000"/>
+                  </a:solidFill>
+                </a:rPr>
+                <a:t>?</a:t>
+              </a:r>
+            </a:p>
+          </p:txBody>
+        </p:sp>
+        <p:sp>
+          <p:nvSpPr>
+            <p:cNvPr id="36" name="TextBox 35">
+              <a:extLst>
+                <a:ext uri="{FF2B5EF4-FFF2-40B4-BE49-F238E27FC236}">
+                  <a16:creationId xmlns:a16="http://schemas.microsoft.com/office/drawing/2014/main" id="{007D03CF-D36C-52DF-A223-74909AE28C2A}"/>
+                </a:ext>
+              </a:extLst>
+            </p:cNvPr>
+            <p:cNvSpPr txBox="1"/>
+            <p:nvPr/>
+          </p:nvSpPr>
+          <p:spPr>
+            <a:xfrm>
+              <a:off x="157001" y="4736094"/>
+              <a:ext cx="5159473" cy="394609"/>
+            </a:xfrm>
+            <a:prstGeom prst="rect">
+              <a:avLst/>
+            </a:prstGeom>
+            <a:noFill/>
+          </p:spPr>
+          <p:txBody>
+            <a:bodyPr wrap="square" rtlCol="0">
+              <a:spAutoFit/>
+            </a:bodyPr>
+            <a:lstStyle/>
+            <a:p>
+              <a:r>
+                <a:rPr lang="en-GB" b="1" dirty="0">
+                  <a:solidFill>
+                    <a:srgbClr val="92D050"/>
+                  </a:solidFill>
+                </a:rPr>
+                <a:t>    1                      1                      1                     1</a:t>
+              </a:r>
+            </a:p>
+          </p:txBody>
+        </p:sp>
+        <p:sp>
+          <p:nvSpPr>
+            <p:cNvPr id="37" name="TextBox 36">
+              <a:extLst>
+                <a:ext uri="{FF2B5EF4-FFF2-40B4-BE49-F238E27FC236}">
+                  <a16:creationId xmlns:a16="http://schemas.microsoft.com/office/drawing/2014/main" id="{BD8378E1-6B78-7EF2-8CF5-FF3B480B1070}"/>
+                </a:ext>
+              </a:extLst>
+            </p:cNvPr>
+            <p:cNvSpPr txBox="1"/>
+            <p:nvPr/>
+          </p:nvSpPr>
+          <p:spPr>
+            <a:xfrm>
+              <a:off x="4678228" y="1044419"/>
+              <a:ext cx="1467089" cy="923330"/>
+            </a:xfrm>
+            <a:prstGeom prst="rect">
+              <a:avLst/>
+            </a:prstGeom>
+            <a:noFill/>
+          </p:spPr>
+          <p:txBody>
+            <a:bodyPr wrap="square" rtlCol="0">
+              <a:spAutoFit/>
+            </a:bodyPr>
+            <a:lstStyle/>
+            <a:p>
+              <a:pPr algn="ctr"/>
+              <a:r>
+                <a:rPr lang="en-GB" b="1" dirty="0">
+                  <a:solidFill>
+                    <a:schemeClr val="accent1"/>
+                  </a:solidFill>
+                </a:rPr>
+                <a:t>1 latent factor variance</a:t>
+              </a:r>
+            </a:p>
+          </p:txBody>
+        </p:sp>
+        <p:sp>
+          <p:nvSpPr>
+            <p:cNvPr id="38" name="TextBox 37">
+              <a:extLst>
+                <a:ext uri="{FF2B5EF4-FFF2-40B4-BE49-F238E27FC236}">
+                  <a16:creationId xmlns:a16="http://schemas.microsoft.com/office/drawing/2014/main" id="{BDFE083F-F2D2-4DFB-6087-0D867790BB67}"/>
+                </a:ext>
+              </a:extLst>
+            </p:cNvPr>
+            <p:cNvSpPr txBox="1"/>
+            <p:nvPr/>
+          </p:nvSpPr>
+          <p:spPr>
+            <a:xfrm>
+              <a:off x="4955526" y="2876346"/>
+              <a:ext cx="1467089" cy="646331"/>
+            </a:xfrm>
+            <a:prstGeom prst="rect">
+              <a:avLst/>
+            </a:prstGeom>
+            <a:noFill/>
+          </p:spPr>
+          <p:txBody>
+            <a:bodyPr wrap="square" rtlCol="0">
+              <a:spAutoFit/>
+            </a:bodyPr>
+            <a:lstStyle/>
+            <a:p>
+              <a:pPr algn="ctr"/>
+              <a:r>
+                <a:rPr lang="en-GB" b="1" dirty="0">
+                  <a:solidFill>
+                    <a:srgbClr val="FF0000"/>
+                  </a:solidFill>
+                </a:rPr>
+                <a:t>4 factor loadings</a:t>
+              </a:r>
+            </a:p>
+          </p:txBody>
+        </p:sp>
+        <p:sp>
+          <p:nvSpPr>
+            <p:cNvPr id="39" name="TextBox 38">
+              <a:extLst>
+                <a:ext uri="{FF2B5EF4-FFF2-40B4-BE49-F238E27FC236}">
+                  <a16:creationId xmlns:a16="http://schemas.microsoft.com/office/drawing/2014/main" id="{E73F7462-FA28-EBA4-56E5-CA4872737CC1}"/>
+                </a:ext>
+              </a:extLst>
+            </p:cNvPr>
+            <p:cNvSpPr txBox="1"/>
+            <p:nvPr/>
+          </p:nvSpPr>
+          <p:spPr>
+            <a:xfrm>
+              <a:off x="5384356" y="4431274"/>
+              <a:ext cx="1467089" cy="923330"/>
+            </a:xfrm>
+            <a:prstGeom prst="rect">
+              <a:avLst/>
+            </a:prstGeom>
+            <a:noFill/>
+          </p:spPr>
+          <p:txBody>
+            <a:bodyPr wrap="square" rtlCol="0">
+              <a:spAutoFit/>
+            </a:bodyPr>
+            <a:lstStyle/>
+            <a:p>
+              <a:pPr algn="ctr"/>
+              <a:r>
+                <a:rPr lang="en-GB" b="1" dirty="0">
+                  <a:solidFill>
+                    <a:schemeClr val="accent6"/>
+                  </a:solidFill>
+                </a:rPr>
+                <a:t>4 residual factor loadings</a:t>
+              </a:r>
+            </a:p>
+          </p:txBody>
+        </p:sp>
+        <p:sp>
+          <p:nvSpPr>
+            <p:cNvPr id="40" name="TextBox 39">
+              <a:extLst>
+                <a:ext uri="{FF2B5EF4-FFF2-40B4-BE49-F238E27FC236}">
+                  <a16:creationId xmlns:a16="http://schemas.microsoft.com/office/drawing/2014/main" id="{4D38905E-70A5-B4AC-7C66-5506B71EFFA9}"/>
+                </a:ext>
+              </a:extLst>
+            </p:cNvPr>
+            <p:cNvSpPr txBox="1"/>
+            <p:nvPr/>
+          </p:nvSpPr>
+          <p:spPr>
+            <a:xfrm>
+              <a:off x="5361899" y="5934670"/>
+              <a:ext cx="1467089" cy="923330"/>
+            </a:xfrm>
+            <a:prstGeom prst="rect">
+              <a:avLst/>
+            </a:prstGeom>
+            <a:noFill/>
+          </p:spPr>
+          <p:txBody>
+            <a:bodyPr wrap="square" rtlCol="0">
+              <a:spAutoFit/>
+            </a:bodyPr>
+            <a:lstStyle/>
+            <a:p>
+              <a:pPr algn="ctr"/>
+              <a:r>
+                <a:rPr lang="en-GB" b="1" dirty="0">
+                  <a:solidFill>
+                    <a:schemeClr val="accent1"/>
+                  </a:solidFill>
+                </a:rPr>
+                <a:t>4 residual factor variances</a:t>
+              </a:r>
+            </a:p>
+          </p:txBody>
+        </p:sp>
+      </p:grpSp>
+      <p:sp>
+        <p:nvSpPr>
+          <p:cNvPr id="82" name="Arc 81">
+            <a:extLst>
+              <a:ext uri="{FF2B5EF4-FFF2-40B4-BE49-F238E27FC236}">
+                <a16:creationId xmlns:a16="http://schemas.microsoft.com/office/drawing/2014/main" id="{6D18353D-62AA-7884-5EEC-44BD6DDA3EDA}"/>
+              </a:ext>
+            </a:extLst>
+          </p:cNvPr>
+          <p:cNvSpPr/>
+          <p:nvPr/>
+        </p:nvSpPr>
+        <p:spPr>
+          <a:xfrm rot="1003916">
+            <a:off x="6629621" y="4184853"/>
+            <a:ext cx="405447" cy="438604"/>
+          </a:xfrm>
+          <a:prstGeom prst="arc">
+            <a:avLst>
+              <a:gd name="adj1" fmla="val 16200000"/>
+              <a:gd name="adj2" fmla="val 13932934"/>
+            </a:avLst>
+          </a:prstGeom>
+          <a:noFill/>
+          <a:ln w="28575">
+            <a:solidFill>
+              <a:schemeClr val="tx1"/>
+            </a:solidFill>
+            <a:headEnd type="triangle" w="lg" len="lg"/>
+            <a:tailEnd type="triangle" w="lg" len="lg"/>
+          </a:ln>
+        </p:spPr>
+        <p:style>
+          <a:lnRef idx="1">
+            <a:schemeClr val="accent1"/>
+          </a:lnRef>
+          <a:fillRef idx="0">
+            <a:schemeClr val="accent1"/>
+          </a:fillRef>
+          <a:effectRef idx="0">
+            <a:schemeClr val="accent1"/>
+          </a:effectRef>
+          <a:fontRef idx="minor">
+            <a:schemeClr val="tx1"/>
+          </a:fontRef>
+        </p:style>
+        <p:txBody>
+          <a:bodyPr rtlCol="0" anchor="ctr"/>
+          <a:lstStyle/>
+          <a:p>
+            <a:pPr algn="ctr"/>
+            <a:endParaRPr lang="en-GB" sz="3200" dirty="0"/>
+          </a:p>
+        </p:txBody>
+      </p:sp>
+      <p:sp>
+        <p:nvSpPr>
+          <p:cNvPr id="83" name="Rectangle 82">
+            <a:extLst>
+              <a:ext uri="{FF2B5EF4-FFF2-40B4-BE49-F238E27FC236}">
+                <a16:creationId xmlns:a16="http://schemas.microsoft.com/office/drawing/2014/main" id="{A5250D5F-DF31-E093-4DEC-D223EC635ADF}"/>
+              </a:ext>
+            </a:extLst>
+          </p:cNvPr>
+          <p:cNvSpPr/>
+          <p:nvPr/>
+        </p:nvSpPr>
+        <p:spPr>
+          <a:xfrm>
+            <a:off x="6531135" y="3532923"/>
+            <a:ext cx="602419" cy="660637"/>
+          </a:xfrm>
+          <a:prstGeom prst="rect">
+            <a:avLst/>
+          </a:prstGeom>
+          <a:noFill/>
+          <a:ln>
+            <a:solidFill>
+              <a:schemeClr val="tx1"/>
+            </a:solidFill>
+          </a:ln>
+        </p:spPr>
+        <p:style>
+          <a:lnRef idx="2">
+            <a:schemeClr val="accent1">
+              <a:shade val="50000"/>
+            </a:schemeClr>
+          </a:lnRef>
+          <a:fillRef idx="1">
+            <a:schemeClr val="accent1"/>
+          </a:fillRef>
+          <a:effectRef idx="0">
+            <a:schemeClr val="accent1"/>
+          </a:effectRef>
+          <a:fontRef idx="minor">
+            <a:schemeClr val="lt1"/>
+          </a:fontRef>
+        </p:style>
+        <p:txBody>
+          <a:bodyPr rtlCol="0" anchor="ctr"/>
+          <a:lstStyle/>
+          <a:p>
+            <a:pPr algn="ctr"/>
+            <a:r>
+              <a:rPr lang="en-GB" sz="3200" dirty="0">
+                <a:solidFill>
+                  <a:schemeClr val="tx1"/>
+                </a:solidFill>
+              </a:rPr>
+              <a:t>Y1</a:t>
+            </a:r>
+          </a:p>
+        </p:txBody>
+      </p:sp>
+      <p:sp>
+        <p:nvSpPr>
+          <p:cNvPr id="84" name="Rectangle 83">
+            <a:extLst>
+              <a:ext uri="{FF2B5EF4-FFF2-40B4-BE49-F238E27FC236}">
+                <a16:creationId xmlns:a16="http://schemas.microsoft.com/office/drawing/2014/main" id="{31932743-34F5-D2DC-D00B-A12CAB28EF0B}"/>
+              </a:ext>
+            </a:extLst>
+          </p:cNvPr>
+          <p:cNvSpPr/>
+          <p:nvPr/>
+        </p:nvSpPr>
+        <p:spPr>
+          <a:xfrm>
+            <a:off x="7802343" y="3532923"/>
+            <a:ext cx="602419" cy="660637"/>
+          </a:xfrm>
+          <a:prstGeom prst="rect">
+            <a:avLst/>
+          </a:prstGeom>
+          <a:noFill/>
+          <a:ln>
+            <a:solidFill>
+              <a:schemeClr val="tx1"/>
+            </a:solidFill>
+          </a:ln>
+        </p:spPr>
+        <p:style>
+          <a:lnRef idx="2">
+            <a:schemeClr val="accent1">
+              <a:shade val="50000"/>
+            </a:schemeClr>
+          </a:lnRef>
+          <a:fillRef idx="1">
+            <a:schemeClr val="accent1"/>
+          </a:fillRef>
+          <a:effectRef idx="0">
+            <a:schemeClr val="accent1"/>
+          </a:effectRef>
+          <a:fontRef idx="minor">
+            <a:schemeClr val="lt1"/>
+          </a:fontRef>
+        </p:style>
+        <p:txBody>
+          <a:bodyPr rtlCol="0" anchor="ctr"/>
+          <a:lstStyle/>
+          <a:p>
+            <a:pPr algn="ctr"/>
+            <a:r>
+              <a:rPr lang="en-GB" sz="3200" dirty="0">
+                <a:solidFill>
+                  <a:schemeClr val="tx1"/>
+                </a:solidFill>
+              </a:rPr>
+              <a:t>Y2</a:t>
+            </a:r>
+          </a:p>
+        </p:txBody>
+      </p:sp>
+      <p:sp>
+        <p:nvSpPr>
+          <p:cNvPr id="85" name="Rectangle 84">
+            <a:extLst>
+              <a:ext uri="{FF2B5EF4-FFF2-40B4-BE49-F238E27FC236}">
+                <a16:creationId xmlns:a16="http://schemas.microsoft.com/office/drawing/2014/main" id="{9F77D036-0A08-7082-CC6E-47D68CD02168}"/>
+              </a:ext>
+            </a:extLst>
+          </p:cNvPr>
+          <p:cNvSpPr/>
+          <p:nvPr/>
+        </p:nvSpPr>
+        <p:spPr>
+          <a:xfrm>
+            <a:off x="9091813" y="3532923"/>
+            <a:ext cx="602419" cy="660637"/>
+          </a:xfrm>
+          <a:prstGeom prst="rect">
+            <a:avLst/>
+          </a:prstGeom>
+          <a:noFill/>
+          <a:ln>
+            <a:solidFill>
+              <a:schemeClr val="tx1"/>
+            </a:solidFill>
+          </a:ln>
+        </p:spPr>
+        <p:style>
+          <a:lnRef idx="2">
+            <a:schemeClr val="accent1">
+              <a:shade val="50000"/>
+            </a:schemeClr>
+          </a:lnRef>
+          <a:fillRef idx="1">
+            <a:schemeClr val="accent1"/>
+          </a:fillRef>
+          <a:effectRef idx="0">
+            <a:schemeClr val="accent1"/>
+          </a:effectRef>
+          <a:fontRef idx="minor">
+            <a:schemeClr val="lt1"/>
+          </a:fontRef>
+        </p:style>
+        <p:txBody>
+          <a:bodyPr rtlCol="0" anchor="ctr"/>
+          <a:lstStyle/>
+          <a:p>
+            <a:pPr algn="ctr"/>
+            <a:r>
+              <a:rPr lang="en-GB" sz="3200" dirty="0">
+                <a:solidFill>
+                  <a:schemeClr val="tx1"/>
+                </a:solidFill>
+              </a:rPr>
+              <a:t>Y3</a:t>
+            </a:r>
+          </a:p>
+        </p:txBody>
+      </p:sp>
+      <p:sp>
+        <p:nvSpPr>
+          <p:cNvPr id="86" name="Rectangle 85">
+            <a:extLst>
+              <a:ext uri="{FF2B5EF4-FFF2-40B4-BE49-F238E27FC236}">
+                <a16:creationId xmlns:a16="http://schemas.microsoft.com/office/drawing/2014/main" id="{28C12B8D-3C49-D133-2610-677947D6187B}"/>
+              </a:ext>
+            </a:extLst>
+          </p:cNvPr>
+          <p:cNvSpPr/>
+          <p:nvPr/>
+        </p:nvSpPr>
+        <p:spPr>
+          <a:xfrm>
+            <a:off x="10327392" y="3532923"/>
+            <a:ext cx="602419" cy="660637"/>
+          </a:xfrm>
+          <a:prstGeom prst="rect">
+            <a:avLst/>
+          </a:prstGeom>
+          <a:noFill/>
+          <a:ln>
+            <a:solidFill>
+              <a:schemeClr val="tx1"/>
+            </a:solidFill>
+          </a:ln>
+        </p:spPr>
+        <p:style>
+          <a:lnRef idx="2">
+            <a:schemeClr val="accent1">
+              <a:shade val="50000"/>
+            </a:schemeClr>
+          </a:lnRef>
+          <a:fillRef idx="1">
+            <a:schemeClr val="accent1"/>
+          </a:fillRef>
+          <a:effectRef idx="0">
+            <a:schemeClr val="accent1"/>
+          </a:effectRef>
+          <a:fontRef idx="minor">
+            <a:schemeClr val="lt1"/>
+          </a:fontRef>
+        </p:style>
+        <p:txBody>
+          <a:bodyPr rtlCol="0" anchor="ctr"/>
+          <a:lstStyle/>
+          <a:p>
+            <a:pPr algn="ctr"/>
+            <a:r>
+              <a:rPr lang="en-GB" sz="3200" dirty="0">
+                <a:solidFill>
+                  <a:schemeClr val="tx1"/>
+                </a:solidFill>
+              </a:rPr>
+              <a:t>Y4</a:t>
+            </a:r>
+          </a:p>
+        </p:txBody>
+      </p:sp>
+      <p:sp>
+        <p:nvSpPr>
+          <p:cNvPr id="87" name="Oval 86">
+            <a:extLst>
+              <a:ext uri="{FF2B5EF4-FFF2-40B4-BE49-F238E27FC236}">
+                <a16:creationId xmlns:a16="http://schemas.microsoft.com/office/drawing/2014/main" id="{1B1125D0-AC9C-DB35-4A56-2C95B2907D35}"/>
+              </a:ext>
+            </a:extLst>
+          </p:cNvPr>
+          <p:cNvSpPr/>
+          <p:nvPr/>
+        </p:nvSpPr>
+        <p:spPr>
+          <a:xfrm>
+            <a:off x="8269393" y="1681251"/>
+            <a:ext cx="979410" cy="827185"/>
+          </a:xfrm>
+          <a:prstGeom prst="ellipse">
+            <a:avLst/>
+          </a:prstGeom>
+          <a:solidFill>
+            <a:schemeClr val="bg1"/>
+          </a:solidFill>
+          <a:ln>
+            <a:solidFill>
+              <a:schemeClr val="tx1"/>
+            </a:solidFill>
+          </a:ln>
+        </p:spPr>
+        <p:style>
+          <a:lnRef idx="2">
+            <a:schemeClr val="accent1">
+              <a:shade val="50000"/>
+            </a:schemeClr>
+          </a:lnRef>
+          <a:fillRef idx="1">
+            <a:schemeClr val="accent1"/>
+          </a:fillRef>
+          <a:effectRef idx="0">
+            <a:schemeClr val="accent1"/>
+          </a:effectRef>
+          <a:fontRef idx="minor">
+            <a:schemeClr val="lt1"/>
+          </a:fontRef>
+        </p:style>
+        <p:txBody>
+          <a:bodyPr rtlCol="0" anchor="ctr"/>
+          <a:lstStyle/>
+          <a:p>
+            <a:pPr algn="ctr"/>
+            <a:r>
+              <a:rPr lang="en-GB" sz="3200" dirty="0">
+                <a:solidFill>
+                  <a:schemeClr val="tx1"/>
+                </a:solidFill>
+              </a:rPr>
+              <a:t>F</a:t>
+            </a:r>
+          </a:p>
+        </p:txBody>
+      </p:sp>
+      <p:cxnSp>
+        <p:nvCxnSpPr>
+          <p:cNvPr id="88" name="Straight Arrow Connector 87">
+            <a:extLst>
+              <a:ext uri="{FF2B5EF4-FFF2-40B4-BE49-F238E27FC236}">
+                <a16:creationId xmlns:a16="http://schemas.microsoft.com/office/drawing/2014/main" id="{A175A5F5-029F-EBEB-D182-B792B2B5FC83}"/>
+              </a:ext>
+            </a:extLst>
+          </p:cNvPr>
+          <p:cNvCxnSpPr>
+            <a:stCxn id="87" idx="4"/>
+            <a:endCxn id="83" idx="0"/>
+          </p:cNvCxnSpPr>
+          <p:nvPr/>
+        </p:nvCxnSpPr>
+        <p:spPr>
+          <a:xfrm flipH="1">
+            <a:off x="6832345" y="2508436"/>
+            <a:ext cx="1926753" cy="1024487"/>
+          </a:xfrm>
+          <a:prstGeom prst="straightConnector1">
+            <a:avLst/>
+          </a:prstGeom>
+          <a:ln w="38100">
+            <a:solidFill>
+              <a:schemeClr val="tx1"/>
+            </a:solidFill>
+            <a:headEnd w="lg" len="lg"/>
+            <a:tailEnd type="triangle" w="lg" len="lg"/>
+          </a:ln>
+        </p:spPr>
+        <p:style>
+          <a:lnRef idx="1">
+            <a:schemeClr val="accent1"/>
+          </a:lnRef>
+          <a:fillRef idx="0">
+            <a:schemeClr val="accent1"/>
+          </a:fillRef>
+          <a:effectRef idx="0">
+            <a:schemeClr val="accent1"/>
+          </a:effectRef>
+          <a:fontRef idx="minor">
+            <a:schemeClr val="tx1"/>
+          </a:fontRef>
+        </p:style>
+      </p:cxnSp>
+      <p:cxnSp>
+        <p:nvCxnSpPr>
+          <p:cNvPr id="89" name="Straight Arrow Connector 88">
+            <a:extLst>
+              <a:ext uri="{FF2B5EF4-FFF2-40B4-BE49-F238E27FC236}">
+                <a16:creationId xmlns:a16="http://schemas.microsoft.com/office/drawing/2014/main" id="{8C6ED7FE-5238-A591-9C9C-4B4747DE7F07}"/>
+              </a:ext>
+            </a:extLst>
+          </p:cNvPr>
+          <p:cNvCxnSpPr>
+            <a:stCxn id="87" idx="4"/>
+            <a:endCxn id="84" idx="0"/>
+          </p:cNvCxnSpPr>
+          <p:nvPr/>
+        </p:nvCxnSpPr>
+        <p:spPr>
+          <a:xfrm flipH="1">
+            <a:off x="8103553" y="2508436"/>
+            <a:ext cx="655545" cy="1024487"/>
+          </a:xfrm>
+          <a:prstGeom prst="straightConnector1">
+            <a:avLst/>
+          </a:prstGeom>
+          <a:ln w="38100">
+            <a:solidFill>
+              <a:schemeClr val="tx1"/>
+            </a:solidFill>
+            <a:headEnd w="lg" len="lg"/>
+            <a:tailEnd type="triangle" w="lg" len="lg"/>
+          </a:ln>
+        </p:spPr>
+        <p:style>
+          <a:lnRef idx="1">
+            <a:schemeClr val="accent1"/>
+          </a:lnRef>
+          <a:fillRef idx="0">
+            <a:schemeClr val="accent1"/>
+          </a:fillRef>
+          <a:effectRef idx="0">
+            <a:schemeClr val="accent1"/>
+          </a:effectRef>
+          <a:fontRef idx="minor">
+            <a:schemeClr val="tx1"/>
+          </a:fontRef>
+        </p:style>
+      </p:cxnSp>
+      <p:cxnSp>
+        <p:nvCxnSpPr>
+          <p:cNvPr id="90" name="Straight Arrow Connector 89">
+            <a:extLst>
+              <a:ext uri="{FF2B5EF4-FFF2-40B4-BE49-F238E27FC236}">
+                <a16:creationId xmlns:a16="http://schemas.microsoft.com/office/drawing/2014/main" id="{770E0DBC-278F-DBCE-D9F5-40D31DEF1D79}"/>
+              </a:ext>
+            </a:extLst>
+          </p:cNvPr>
+          <p:cNvCxnSpPr>
+            <a:stCxn id="87" idx="4"/>
+            <a:endCxn id="85" idx="0"/>
+          </p:cNvCxnSpPr>
+          <p:nvPr/>
+        </p:nvCxnSpPr>
+        <p:spPr>
+          <a:xfrm>
+            <a:off x="8759098" y="2508436"/>
+            <a:ext cx="633925" cy="1024487"/>
+          </a:xfrm>
+          <a:prstGeom prst="straightConnector1">
+            <a:avLst/>
+          </a:prstGeom>
+          <a:ln w="38100">
+            <a:solidFill>
+              <a:schemeClr val="tx1"/>
+            </a:solidFill>
+            <a:headEnd w="lg" len="lg"/>
+            <a:tailEnd type="triangle" w="lg" len="lg"/>
+          </a:ln>
+        </p:spPr>
+        <p:style>
+          <a:lnRef idx="1">
+            <a:schemeClr val="accent1"/>
+          </a:lnRef>
+          <a:fillRef idx="0">
+            <a:schemeClr val="accent1"/>
+          </a:fillRef>
+          <a:effectRef idx="0">
+            <a:schemeClr val="accent1"/>
+          </a:effectRef>
+          <a:fontRef idx="minor">
+            <a:schemeClr val="tx1"/>
+          </a:fontRef>
+        </p:style>
+      </p:cxnSp>
+      <p:cxnSp>
+        <p:nvCxnSpPr>
+          <p:cNvPr id="91" name="Straight Arrow Connector 90">
+            <a:extLst>
+              <a:ext uri="{FF2B5EF4-FFF2-40B4-BE49-F238E27FC236}">
+                <a16:creationId xmlns:a16="http://schemas.microsoft.com/office/drawing/2014/main" id="{1B10B973-11EE-E70B-4270-C59AAAE7C583}"/>
+              </a:ext>
+            </a:extLst>
+          </p:cNvPr>
+          <p:cNvCxnSpPr>
+            <a:stCxn id="87" idx="4"/>
+            <a:endCxn id="86" idx="0"/>
+          </p:cNvCxnSpPr>
+          <p:nvPr/>
+        </p:nvCxnSpPr>
+        <p:spPr>
+          <a:xfrm>
+            <a:off x="8759098" y="2508436"/>
+            <a:ext cx="1869503" cy="1024487"/>
+          </a:xfrm>
+          <a:prstGeom prst="straightConnector1">
+            <a:avLst/>
+          </a:prstGeom>
+          <a:ln w="38100">
+            <a:solidFill>
+              <a:schemeClr val="tx1"/>
+            </a:solidFill>
+            <a:headEnd w="lg" len="lg"/>
+            <a:tailEnd type="triangle" w="lg" len="lg"/>
+          </a:ln>
+        </p:spPr>
+        <p:style>
+          <a:lnRef idx="1">
+            <a:schemeClr val="accent1"/>
+          </a:lnRef>
+          <a:fillRef idx="0">
+            <a:schemeClr val="accent1"/>
+          </a:fillRef>
+          <a:effectRef idx="0">
+            <a:schemeClr val="accent1"/>
+          </a:effectRef>
+          <a:fontRef idx="minor">
+            <a:schemeClr val="tx1"/>
+          </a:fontRef>
+        </p:style>
+      </p:cxnSp>
+      <p:sp>
+        <p:nvSpPr>
+          <p:cNvPr id="92" name="Arc 91">
+            <a:extLst>
+              <a:ext uri="{FF2B5EF4-FFF2-40B4-BE49-F238E27FC236}">
+                <a16:creationId xmlns:a16="http://schemas.microsoft.com/office/drawing/2014/main" id="{7FD89E5E-908F-24F6-2827-43B888241822}"/>
+              </a:ext>
+            </a:extLst>
+          </p:cNvPr>
+          <p:cNvSpPr/>
+          <p:nvPr/>
+        </p:nvSpPr>
+        <p:spPr>
+          <a:xfrm rot="15103718">
+            <a:off x="9057902" y="1381885"/>
+            <a:ext cx="675653" cy="589032"/>
+          </a:xfrm>
+          <a:prstGeom prst="arc">
+            <a:avLst>
+              <a:gd name="adj1" fmla="val 16200000"/>
+              <a:gd name="adj2" fmla="val 13932934"/>
+            </a:avLst>
+          </a:prstGeom>
+          <a:noFill/>
+          <a:ln w="38100">
+            <a:solidFill>
+              <a:schemeClr val="tx1"/>
+            </a:solidFill>
+            <a:headEnd type="triangle" w="lg" len="lg"/>
+            <a:tailEnd type="triangle" w="lg" len="lg"/>
+          </a:ln>
+        </p:spPr>
+        <p:style>
+          <a:lnRef idx="1">
+            <a:schemeClr val="accent1"/>
+          </a:lnRef>
+          <a:fillRef idx="0">
+            <a:schemeClr val="accent1"/>
+          </a:fillRef>
+          <a:effectRef idx="0">
+            <a:schemeClr val="accent1"/>
+          </a:effectRef>
+          <a:fontRef idx="minor">
+            <a:schemeClr val="tx1"/>
+          </a:fontRef>
+        </p:style>
+        <p:txBody>
+          <a:bodyPr rtlCol="0" anchor="ctr"/>
+          <a:lstStyle/>
+          <a:p>
+            <a:pPr algn="ctr"/>
+            <a:endParaRPr lang="en-GB" sz="3200"/>
+          </a:p>
+        </p:txBody>
+      </p:sp>
+      <p:sp>
+        <p:nvSpPr>
+          <p:cNvPr id="95" name="TextBox 94">
+            <a:extLst>
+              <a:ext uri="{FF2B5EF4-FFF2-40B4-BE49-F238E27FC236}">
+                <a16:creationId xmlns:a16="http://schemas.microsoft.com/office/drawing/2014/main" id="{9B2DBFEE-71BF-B07A-F0FA-764E2BE76686}"/>
+              </a:ext>
+            </a:extLst>
+          </p:cNvPr>
+          <p:cNvSpPr txBox="1"/>
+          <p:nvPr/>
+        </p:nvSpPr>
+        <p:spPr>
+          <a:xfrm>
+            <a:off x="6710479" y="4606483"/>
+            <a:ext cx="243730" cy="345674"/>
+          </a:xfrm>
+          <a:prstGeom prst="rect">
+            <a:avLst/>
+          </a:prstGeom>
+          <a:noFill/>
+        </p:spPr>
+        <p:txBody>
+          <a:bodyPr wrap="square" rtlCol="0">
+            <a:spAutoFit/>
+          </a:bodyPr>
+          <a:lstStyle/>
+          <a:p>
+            <a:r>
+              <a:rPr lang="en-GB" b="1" dirty="0">
+                <a:solidFill>
+                  <a:schemeClr val="accent1"/>
+                </a:solidFill>
+              </a:rPr>
+              <a:t>?</a:t>
+            </a:r>
+          </a:p>
+        </p:txBody>
+      </p:sp>
+      <p:sp>
+        <p:nvSpPr>
+          <p:cNvPr id="96" name="Arc 95">
+            <a:extLst>
+              <a:ext uri="{FF2B5EF4-FFF2-40B4-BE49-F238E27FC236}">
+                <a16:creationId xmlns:a16="http://schemas.microsoft.com/office/drawing/2014/main" id="{A914DB25-9E78-5C8A-BE2D-39FA6EBFDCCD}"/>
+              </a:ext>
+            </a:extLst>
+          </p:cNvPr>
+          <p:cNvSpPr/>
+          <p:nvPr/>
+        </p:nvSpPr>
+        <p:spPr>
+          <a:xfrm rot="1003916">
+            <a:off x="7900830" y="4184853"/>
+            <a:ext cx="405447" cy="438604"/>
+          </a:xfrm>
+          <a:prstGeom prst="arc">
+            <a:avLst>
+              <a:gd name="adj1" fmla="val 16200000"/>
+              <a:gd name="adj2" fmla="val 13932934"/>
+            </a:avLst>
+          </a:prstGeom>
+          <a:noFill/>
+          <a:ln w="28575">
+            <a:solidFill>
+              <a:schemeClr val="tx1"/>
+            </a:solidFill>
+            <a:headEnd type="triangle" w="lg" len="lg"/>
+            <a:tailEnd type="triangle" w="lg" len="lg"/>
+          </a:ln>
+        </p:spPr>
+        <p:style>
+          <a:lnRef idx="1">
+            <a:schemeClr val="accent1"/>
+          </a:lnRef>
+          <a:fillRef idx="0">
+            <a:schemeClr val="accent1"/>
+          </a:fillRef>
+          <a:effectRef idx="0">
+            <a:schemeClr val="accent1"/>
+          </a:effectRef>
+          <a:fontRef idx="minor">
+            <a:schemeClr val="tx1"/>
+          </a:fontRef>
+        </p:style>
+        <p:txBody>
+          <a:bodyPr rtlCol="0" anchor="ctr"/>
+          <a:lstStyle/>
+          <a:p>
+            <a:pPr algn="ctr"/>
+            <a:endParaRPr lang="en-GB" sz="3200" dirty="0"/>
+          </a:p>
+        </p:txBody>
+      </p:sp>
+      <p:sp>
+        <p:nvSpPr>
+          <p:cNvPr id="99" name="TextBox 98">
+            <a:extLst>
+              <a:ext uri="{FF2B5EF4-FFF2-40B4-BE49-F238E27FC236}">
+                <a16:creationId xmlns:a16="http://schemas.microsoft.com/office/drawing/2014/main" id="{11729227-D234-6009-4DF7-349140F1B9EE}"/>
+              </a:ext>
+            </a:extLst>
+          </p:cNvPr>
+          <p:cNvSpPr txBox="1"/>
+          <p:nvPr/>
+        </p:nvSpPr>
+        <p:spPr>
+          <a:xfrm>
+            <a:off x="7981688" y="4606483"/>
+            <a:ext cx="243730" cy="345674"/>
+          </a:xfrm>
+          <a:prstGeom prst="rect">
+            <a:avLst/>
+          </a:prstGeom>
+          <a:noFill/>
+        </p:spPr>
+        <p:txBody>
+          <a:bodyPr wrap="square" rtlCol="0">
+            <a:spAutoFit/>
+          </a:bodyPr>
+          <a:lstStyle/>
+          <a:p>
+            <a:r>
+              <a:rPr lang="en-GB" b="1" dirty="0">
+                <a:solidFill>
+                  <a:schemeClr val="accent1"/>
+                </a:solidFill>
+              </a:rPr>
+              <a:t>?</a:t>
+            </a:r>
+          </a:p>
+        </p:txBody>
+      </p:sp>
+      <p:sp>
+        <p:nvSpPr>
+          <p:cNvPr id="100" name="Arc 99">
+            <a:extLst>
+              <a:ext uri="{FF2B5EF4-FFF2-40B4-BE49-F238E27FC236}">
+                <a16:creationId xmlns:a16="http://schemas.microsoft.com/office/drawing/2014/main" id="{91E6DFFB-50E0-F250-3408-C6972620BBE6}"/>
+              </a:ext>
+            </a:extLst>
+          </p:cNvPr>
+          <p:cNvSpPr/>
+          <p:nvPr/>
+        </p:nvSpPr>
+        <p:spPr>
+          <a:xfrm rot="1003916">
+            <a:off x="9190300" y="4184853"/>
+            <a:ext cx="405447" cy="438604"/>
+          </a:xfrm>
+          <a:prstGeom prst="arc">
+            <a:avLst>
+              <a:gd name="adj1" fmla="val 16200000"/>
+              <a:gd name="adj2" fmla="val 13932934"/>
+            </a:avLst>
+          </a:prstGeom>
+          <a:noFill/>
+          <a:ln w="28575">
+            <a:solidFill>
+              <a:schemeClr val="tx1"/>
+            </a:solidFill>
+            <a:headEnd type="triangle" w="lg" len="lg"/>
+            <a:tailEnd type="triangle" w="lg" len="lg"/>
+          </a:ln>
+        </p:spPr>
+        <p:style>
+          <a:lnRef idx="1">
+            <a:schemeClr val="accent1"/>
+          </a:lnRef>
+          <a:fillRef idx="0">
+            <a:schemeClr val="accent1"/>
+          </a:fillRef>
+          <a:effectRef idx="0">
+            <a:schemeClr val="accent1"/>
+          </a:effectRef>
+          <a:fontRef idx="minor">
+            <a:schemeClr val="tx1"/>
+          </a:fontRef>
+        </p:style>
+        <p:txBody>
+          <a:bodyPr rtlCol="0" anchor="ctr"/>
+          <a:lstStyle/>
+          <a:p>
+            <a:pPr algn="ctr"/>
+            <a:endParaRPr lang="en-GB" sz="3200" dirty="0"/>
+          </a:p>
+        </p:txBody>
+      </p:sp>
+      <p:sp>
+        <p:nvSpPr>
+          <p:cNvPr id="103" name="TextBox 102">
+            <a:extLst>
+              <a:ext uri="{FF2B5EF4-FFF2-40B4-BE49-F238E27FC236}">
+                <a16:creationId xmlns:a16="http://schemas.microsoft.com/office/drawing/2014/main" id="{85FF48F7-F2A3-AF9D-E785-CF070047E86E}"/>
+              </a:ext>
+            </a:extLst>
+          </p:cNvPr>
+          <p:cNvSpPr txBox="1"/>
+          <p:nvPr/>
+        </p:nvSpPr>
+        <p:spPr>
+          <a:xfrm>
+            <a:off x="9271159" y="4606483"/>
+            <a:ext cx="243730" cy="345674"/>
+          </a:xfrm>
+          <a:prstGeom prst="rect">
+            <a:avLst/>
+          </a:prstGeom>
+          <a:noFill/>
+        </p:spPr>
+        <p:txBody>
+          <a:bodyPr wrap="square" rtlCol="0">
+            <a:spAutoFit/>
+          </a:bodyPr>
+          <a:lstStyle/>
+          <a:p>
+            <a:r>
+              <a:rPr lang="en-GB" b="1" dirty="0">
+                <a:solidFill>
+                  <a:schemeClr val="accent1"/>
+                </a:solidFill>
+              </a:rPr>
+              <a:t>?</a:t>
+            </a:r>
+          </a:p>
+        </p:txBody>
+      </p:sp>
+      <p:sp>
+        <p:nvSpPr>
+          <p:cNvPr id="104" name="Arc 103">
+            <a:extLst>
+              <a:ext uri="{FF2B5EF4-FFF2-40B4-BE49-F238E27FC236}">
+                <a16:creationId xmlns:a16="http://schemas.microsoft.com/office/drawing/2014/main" id="{1FC7B723-29CE-425D-A097-7B3F2DE40950}"/>
+              </a:ext>
+            </a:extLst>
+          </p:cNvPr>
+          <p:cNvSpPr/>
+          <p:nvPr/>
+        </p:nvSpPr>
+        <p:spPr>
+          <a:xfrm rot="1003916">
+            <a:off x="10425878" y="4184853"/>
+            <a:ext cx="405447" cy="438604"/>
+          </a:xfrm>
+          <a:prstGeom prst="arc">
+            <a:avLst>
+              <a:gd name="adj1" fmla="val 16200000"/>
+              <a:gd name="adj2" fmla="val 13932934"/>
+            </a:avLst>
+          </a:prstGeom>
+          <a:noFill/>
+          <a:ln w="28575">
+            <a:solidFill>
+              <a:schemeClr val="tx1"/>
+            </a:solidFill>
+            <a:headEnd type="triangle" w="lg" len="lg"/>
+            <a:tailEnd type="triangle" w="lg" len="lg"/>
+          </a:ln>
+        </p:spPr>
+        <p:style>
+          <a:lnRef idx="1">
+            <a:schemeClr val="accent1"/>
+          </a:lnRef>
+          <a:fillRef idx="0">
+            <a:schemeClr val="accent1"/>
+          </a:fillRef>
+          <a:effectRef idx="0">
+            <a:schemeClr val="accent1"/>
+          </a:effectRef>
+          <a:fontRef idx="minor">
+            <a:schemeClr val="tx1"/>
+          </a:fontRef>
+        </p:style>
+        <p:txBody>
+          <a:bodyPr rtlCol="0" anchor="ctr"/>
+          <a:lstStyle/>
+          <a:p>
+            <a:pPr algn="ctr"/>
+            <a:endParaRPr lang="en-GB" sz="3200" dirty="0"/>
+          </a:p>
+        </p:txBody>
+      </p:sp>
+      <p:sp>
+        <p:nvSpPr>
+          <p:cNvPr id="107" name="TextBox 106">
+            <a:extLst>
+              <a:ext uri="{FF2B5EF4-FFF2-40B4-BE49-F238E27FC236}">
+                <a16:creationId xmlns:a16="http://schemas.microsoft.com/office/drawing/2014/main" id="{1ACF84A6-6E01-D505-D614-FDA5F54C8877}"/>
+              </a:ext>
+            </a:extLst>
+          </p:cNvPr>
+          <p:cNvSpPr txBox="1"/>
+          <p:nvPr/>
+        </p:nvSpPr>
+        <p:spPr>
+          <a:xfrm>
+            <a:off x="10506737" y="4606483"/>
+            <a:ext cx="243730" cy="345674"/>
+          </a:xfrm>
+          <a:prstGeom prst="rect">
+            <a:avLst/>
+          </a:prstGeom>
+          <a:noFill/>
+        </p:spPr>
+        <p:txBody>
+          <a:bodyPr wrap="square" rtlCol="0">
+            <a:spAutoFit/>
+          </a:bodyPr>
+          <a:lstStyle/>
+          <a:p>
+            <a:r>
+              <a:rPr lang="en-GB" b="1" dirty="0">
+                <a:solidFill>
+                  <a:schemeClr val="accent1"/>
+                </a:solidFill>
+              </a:rPr>
+              <a:t>?</a:t>
+            </a:r>
+          </a:p>
+        </p:txBody>
+      </p:sp>
+      <p:sp>
+        <p:nvSpPr>
+          <p:cNvPr id="108" name="TextBox 107">
+            <a:extLst>
+              <a:ext uri="{FF2B5EF4-FFF2-40B4-BE49-F238E27FC236}">
+                <a16:creationId xmlns:a16="http://schemas.microsoft.com/office/drawing/2014/main" id="{56AE4998-BD16-CCD0-B37E-95E91A72B424}"/>
+              </a:ext>
+            </a:extLst>
+          </p:cNvPr>
+          <p:cNvSpPr txBox="1"/>
+          <p:nvPr/>
+        </p:nvSpPr>
+        <p:spPr>
+          <a:xfrm>
+            <a:off x="9521105" y="1014105"/>
+            <a:ext cx="293224" cy="489704"/>
+          </a:xfrm>
+          <a:prstGeom prst="rect">
+            <a:avLst/>
+          </a:prstGeom>
+          <a:noFill/>
+        </p:spPr>
+        <p:txBody>
+          <a:bodyPr wrap="square" rtlCol="0">
+            <a:spAutoFit/>
+          </a:bodyPr>
+          <a:lstStyle/>
+          <a:p>
+            <a:r>
+              <a:rPr lang="en-GB" sz="2800" dirty="0">
+                <a:solidFill>
+                  <a:schemeClr val="accent1"/>
+                </a:solidFill>
+              </a:rPr>
+              <a:t>?</a:t>
+            </a:r>
+          </a:p>
+        </p:txBody>
+      </p:sp>
+      <p:sp>
+        <p:nvSpPr>
+          <p:cNvPr id="109" name="TextBox 108">
+            <a:extLst>
+              <a:ext uri="{FF2B5EF4-FFF2-40B4-BE49-F238E27FC236}">
+                <a16:creationId xmlns:a16="http://schemas.microsoft.com/office/drawing/2014/main" id="{FA44F05D-E9B8-873E-8437-6B85E2176131}"/>
+              </a:ext>
+            </a:extLst>
+          </p:cNvPr>
+          <p:cNvSpPr txBox="1"/>
+          <p:nvPr/>
+        </p:nvSpPr>
+        <p:spPr>
+          <a:xfrm>
+            <a:off x="7343473" y="2775828"/>
+            <a:ext cx="293224" cy="489704"/>
+          </a:xfrm>
+          <a:prstGeom prst="rect">
+            <a:avLst/>
+          </a:prstGeom>
+          <a:noFill/>
+        </p:spPr>
+        <p:txBody>
+          <a:bodyPr wrap="square" rtlCol="0">
+            <a:spAutoFit/>
+          </a:bodyPr>
+          <a:lstStyle/>
+          <a:p>
+            <a:r>
+              <a:rPr lang="en-GB" sz="2800" dirty="0">
+                <a:solidFill>
+                  <a:srgbClr val="FF0000"/>
+                </a:solidFill>
+              </a:rPr>
+              <a:t>?</a:t>
+            </a:r>
+          </a:p>
+        </p:txBody>
+      </p:sp>
+      <p:sp>
+        <p:nvSpPr>
+          <p:cNvPr id="110" name="TextBox 109">
+            <a:extLst>
+              <a:ext uri="{FF2B5EF4-FFF2-40B4-BE49-F238E27FC236}">
+                <a16:creationId xmlns:a16="http://schemas.microsoft.com/office/drawing/2014/main" id="{35049DB1-D18E-F404-B290-55B484592CF1}"/>
+              </a:ext>
+            </a:extLst>
+          </p:cNvPr>
+          <p:cNvSpPr txBox="1"/>
+          <p:nvPr/>
+        </p:nvSpPr>
+        <p:spPr>
+          <a:xfrm>
+            <a:off x="8353987" y="2934395"/>
+            <a:ext cx="293224" cy="489704"/>
+          </a:xfrm>
+          <a:prstGeom prst="rect">
+            <a:avLst/>
+          </a:prstGeom>
+          <a:noFill/>
+        </p:spPr>
+        <p:txBody>
+          <a:bodyPr wrap="square" rtlCol="0">
+            <a:spAutoFit/>
+          </a:bodyPr>
+          <a:lstStyle/>
+          <a:p>
+            <a:r>
+              <a:rPr lang="en-GB" sz="2800" dirty="0">
+                <a:solidFill>
+                  <a:srgbClr val="FF0000"/>
+                </a:solidFill>
+              </a:rPr>
+              <a:t>?</a:t>
+            </a:r>
+          </a:p>
+        </p:txBody>
+      </p:sp>
+      <p:sp>
+        <p:nvSpPr>
+          <p:cNvPr id="111" name="TextBox 110">
+            <a:extLst>
+              <a:ext uri="{FF2B5EF4-FFF2-40B4-BE49-F238E27FC236}">
+                <a16:creationId xmlns:a16="http://schemas.microsoft.com/office/drawing/2014/main" id="{EDF8B7CC-1594-3963-C384-F2B20DD2B436}"/>
+              </a:ext>
+            </a:extLst>
+          </p:cNvPr>
+          <p:cNvSpPr txBox="1"/>
+          <p:nvPr/>
+        </p:nvSpPr>
+        <p:spPr>
+          <a:xfrm>
+            <a:off x="8878100" y="2934395"/>
+            <a:ext cx="293224" cy="489704"/>
+          </a:xfrm>
+          <a:prstGeom prst="rect">
+            <a:avLst/>
+          </a:prstGeom>
+          <a:noFill/>
+        </p:spPr>
+        <p:txBody>
+          <a:bodyPr wrap="square" rtlCol="0">
+            <a:spAutoFit/>
+          </a:bodyPr>
+          <a:lstStyle/>
+          <a:p>
+            <a:r>
+              <a:rPr lang="en-GB" sz="2800" dirty="0">
+                <a:solidFill>
+                  <a:srgbClr val="FF0000"/>
+                </a:solidFill>
+              </a:rPr>
+              <a:t>?</a:t>
+            </a:r>
+          </a:p>
+        </p:txBody>
+      </p:sp>
+      <p:sp>
+        <p:nvSpPr>
+          <p:cNvPr id="112" name="TextBox 111">
+            <a:extLst>
+              <a:ext uri="{FF2B5EF4-FFF2-40B4-BE49-F238E27FC236}">
+                <a16:creationId xmlns:a16="http://schemas.microsoft.com/office/drawing/2014/main" id="{F8810EA0-EB2A-8A0F-E691-F5670D832519}"/>
+              </a:ext>
+            </a:extLst>
+          </p:cNvPr>
+          <p:cNvSpPr txBox="1"/>
+          <p:nvPr/>
+        </p:nvSpPr>
+        <p:spPr>
+          <a:xfrm>
+            <a:off x="9901957" y="2775828"/>
+            <a:ext cx="293224" cy="489704"/>
+          </a:xfrm>
+          <a:prstGeom prst="rect">
+            <a:avLst/>
+          </a:prstGeom>
+          <a:noFill/>
+        </p:spPr>
+        <p:txBody>
+          <a:bodyPr wrap="square" rtlCol="0">
+            <a:spAutoFit/>
+          </a:bodyPr>
+          <a:lstStyle/>
+          <a:p>
+            <a:r>
+              <a:rPr lang="en-GB" sz="2800" dirty="0">
+                <a:solidFill>
+                  <a:srgbClr val="FF0000"/>
+                </a:solidFill>
+              </a:rPr>
+              <a:t>?</a:t>
+            </a:r>
+          </a:p>
+        </p:txBody>
+      </p:sp>
+      <p:sp>
+        <p:nvSpPr>
+          <p:cNvPr id="114" name="TextBox 113">
+            <a:extLst>
+              <a:ext uri="{FF2B5EF4-FFF2-40B4-BE49-F238E27FC236}">
+                <a16:creationId xmlns:a16="http://schemas.microsoft.com/office/drawing/2014/main" id="{024245E1-D788-0619-0D41-2517DBEE27C1}"/>
+              </a:ext>
+            </a:extLst>
+          </p:cNvPr>
+          <p:cNvSpPr txBox="1"/>
+          <p:nvPr/>
+        </p:nvSpPr>
+        <p:spPr>
+          <a:xfrm>
+            <a:off x="10397197" y="834015"/>
+            <a:ext cx="1224282" cy="864184"/>
+          </a:xfrm>
+          <a:prstGeom prst="rect">
+            <a:avLst/>
+          </a:prstGeom>
+          <a:noFill/>
+        </p:spPr>
+        <p:txBody>
+          <a:bodyPr wrap="square" rtlCol="0">
+            <a:spAutoFit/>
+          </a:bodyPr>
+          <a:lstStyle/>
+          <a:p>
+            <a:pPr algn="ctr"/>
+            <a:r>
+              <a:rPr lang="en-GB" b="1" dirty="0">
+                <a:solidFill>
+                  <a:schemeClr val="accent1"/>
+                </a:solidFill>
+              </a:rPr>
+              <a:t>1 latent factor variance</a:t>
+            </a:r>
+          </a:p>
+        </p:txBody>
+      </p:sp>
+      <p:sp>
+        <p:nvSpPr>
+          <p:cNvPr id="115" name="TextBox 114">
+            <a:extLst>
+              <a:ext uri="{FF2B5EF4-FFF2-40B4-BE49-F238E27FC236}">
+                <a16:creationId xmlns:a16="http://schemas.microsoft.com/office/drawing/2014/main" id="{40CB525E-BCD6-AC90-8075-8DA849BD6178}"/>
+              </a:ext>
+            </a:extLst>
+          </p:cNvPr>
+          <p:cNvSpPr txBox="1"/>
+          <p:nvPr/>
+        </p:nvSpPr>
+        <p:spPr>
+          <a:xfrm>
+            <a:off x="10628601" y="2548595"/>
+            <a:ext cx="1224282" cy="604929"/>
+          </a:xfrm>
+          <a:prstGeom prst="rect">
+            <a:avLst/>
+          </a:prstGeom>
+          <a:noFill/>
+        </p:spPr>
+        <p:txBody>
+          <a:bodyPr wrap="square" rtlCol="0">
+            <a:spAutoFit/>
+          </a:bodyPr>
+          <a:lstStyle/>
+          <a:p>
+            <a:pPr algn="ctr"/>
+            <a:r>
+              <a:rPr lang="en-GB" b="1" dirty="0">
+                <a:solidFill>
+                  <a:srgbClr val="FF0000"/>
+                </a:solidFill>
+              </a:rPr>
+              <a:t>4 factor loadings</a:t>
+            </a:r>
+          </a:p>
+        </p:txBody>
+      </p:sp>
+      <p:sp>
+        <p:nvSpPr>
+          <p:cNvPr id="117" name="TextBox 116">
+            <a:extLst>
+              <a:ext uri="{FF2B5EF4-FFF2-40B4-BE49-F238E27FC236}">
+                <a16:creationId xmlns:a16="http://schemas.microsoft.com/office/drawing/2014/main" id="{369D7F55-4767-400B-DDCD-778D91769A97}"/>
+              </a:ext>
+            </a:extLst>
+          </p:cNvPr>
+          <p:cNvSpPr txBox="1"/>
+          <p:nvPr/>
+        </p:nvSpPr>
+        <p:spPr>
+          <a:xfrm>
+            <a:off x="10967718" y="4347228"/>
+            <a:ext cx="1224282" cy="864184"/>
+          </a:xfrm>
+          <a:prstGeom prst="rect">
+            <a:avLst/>
+          </a:prstGeom>
+          <a:noFill/>
+        </p:spPr>
+        <p:txBody>
+          <a:bodyPr wrap="square" rtlCol="0">
+            <a:spAutoFit/>
+          </a:bodyPr>
+          <a:lstStyle/>
+          <a:p>
+            <a:pPr algn="ctr"/>
+            <a:r>
+              <a:rPr lang="en-GB" b="1" dirty="0">
+                <a:solidFill>
+                  <a:schemeClr val="accent1"/>
+                </a:solidFill>
+              </a:rPr>
+              <a:t>4 residual factor variances</a:t>
+            </a:r>
+          </a:p>
+        </p:txBody>
+      </p:sp>
+      <p:sp>
+        <p:nvSpPr>
+          <p:cNvPr id="119" name="TextBox 118">
+            <a:extLst>
+              <a:ext uri="{FF2B5EF4-FFF2-40B4-BE49-F238E27FC236}">
+                <a16:creationId xmlns:a16="http://schemas.microsoft.com/office/drawing/2014/main" id="{F59B67DF-4777-FB40-E739-E1956FA1ADA6}"/>
+              </a:ext>
+            </a:extLst>
+          </p:cNvPr>
+          <p:cNvSpPr txBox="1"/>
+          <p:nvPr/>
+        </p:nvSpPr>
+        <p:spPr>
+          <a:xfrm>
+            <a:off x="191063" y="204186"/>
+            <a:ext cx="474678" cy="707886"/>
+          </a:xfrm>
+          <a:prstGeom prst="rect">
+            <a:avLst/>
+          </a:prstGeom>
+          <a:noFill/>
+        </p:spPr>
+        <p:txBody>
+          <a:bodyPr wrap="square">
+            <a:spAutoFit/>
+          </a:bodyPr>
+          <a:lstStyle/>
+          <a:p>
+            <a:pPr algn="ctr"/>
+            <a:r>
+              <a:rPr lang="en-GB" sz="4000" dirty="0">
+                <a:solidFill>
+                  <a:schemeClr val="tx1"/>
+                </a:solidFill>
+              </a:rPr>
+              <a:t>A</a:t>
+            </a:r>
+          </a:p>
+        </p:txBody>
+      </p:sp>
+      <p:sp>
+        <p:nvSpPr>
+          <p:cNvPr id="120" name="TextBox 119">
+            <a:extLst>
+              <a:ext uri="{FF2B5EF4-FFF2-40B4-BE49-F238E27FC236}">
+                <a16:creationId xmlns:a16="http://schemas.microsoft.com/office/drawing/2014/main" id="{629D96AD-1338-AF8D-D702-D7254BCE12EA}"/>
+              </a:ext>
+            </a:extLst>
+          </p:cNvPr>
+          <p:cNvSpPr txBox="1"/>
+          <p:nvPr/>
+        </p:nvSpPr>
+        <p:spPr>
+          <a:xfrm>
+            <a:off x="6533065" y="204186"/>
+            <a:ext cx="474678" cy="707886"/>
+          </a:xfrm>
+          <a:prstGeom prst="rect">
+            <a:avLst/>
+          </a:prstGeom>
+          <a:noFill/>
+        </p:spPr>
+        <p:txBody>
+          <a:bodyPr wrap="square">
+            <a:spAutoFit/>
+          </a:bodyPr>
+          <a:lstStyle/>
+          <a:p>
+            <a:pPr algn="ctr"/>
+            <a:r>
+              <a:rPr lang="en-GB" sz="4000" dirty="0"/>
+              <a:t>B</a:t>
+            </a:r>
+            <a:endParaRPr lang="en-GB" sz="4000" dirty="0">
+              <a:solidFill>
+                <a:schemeClr val="tx1"/>
+              </a:solidFill>
+            </a:endParaRPr>
+          </a:p>
+        </p:txBody>
+      </p:sp>
+    </p:spTree>
+    <p:extLst>
+      <p:ext uri="{BB962C8B-B14F-4D97-AF65-F5344CB8AC3E}">
+        <p14:creationId xmlns:p14="http://schemas.microsoft.com/office/powerpoint/2010/main" val="3449741045"/>
+      </p:ext>
+    </p:extLst>
+  </p:cSld>
+  <p:clrMapOvr>
+    <a:masterClrMapping/>
+  </p:clrMapOvr>
+</p:sld>
+</file>
+
 <file path=ppt/theme/theme1.xml><?xml version="1.0" encoding="utf-8"?>
 <a:theme xmlns:a="http://schemas.openxmlformats.org/drawingml/2006/main" name="Office Theme">
   <a:themeElements>

--- a/lv_readings/images/lv_scaling.pptx
+++ b/lv_readings/images/lv_scaling.pptx
@@ -265,7 +265,7 @@
           <a:p>
             <a:fld id="{6487BBF2-5813-4A92-ADF4-45C081C37504}" type="datetimeFigureOut">
               <a:rPr lang="en-GB" smtClean="0"/>
-              <a:t>06/11/2025</a:t>
+              <a:t>10/11/2025</a:t>
             </a:fld>
             <a:endParaRPr lang="en-GB"/>
           </a:p>
@@ -465,7 +465,7 @@
           <a:p>
             <a:fld id="{6487BBF2-5813-4A92-ADF4-45C081C37504}" type="datetimeFigureOut">
               <a:rPr lang="en-GB" smtClean="0"/>
-              <a:t>06/11/2025</a:t>
+              <a:t>10/11/2025</a:t>
             </a:fld>
             <a:endParaRPr lang="en-GB"/>
           </a:p>
@@ -675,7 +675,7 @@
           <a:p>
             <a:fld id="{6487BBF2-5813-4A92-ADF4-45C081C37504}" type="datetimeFigureOut">
               <a:rPr lang="en-GB" smtClean="0"/>
-              <a:t>06/11/2025</a:t>
+              <a:t>10/11/2025</a:t>
             </a:fld>
             <a:endParaRPr lang="en-GB"/>
           </a:p>
@@ -875,7 +875,7 @@
           <a:p>
             <a:fld id="{6487BBF2-5813-4A92-ADF4-45C081C37504}" type="datetimeFigureOut">
               <a:rPr lang="en-GB" smtClean="0"/>
-              <a:t>06/11/2025</a:t>
+              <a:t>10/11/2025</a:t>
             </a:fld>
             <a:endParaRPr lang="en-GB"/>
           </a:p>
@@ -1151,7 +1151,7 @@
           <a:p>
             <a:fld id="{6487BBF2-5813-4A92-ADF4-45C081C37504}" type="datetimeFigureOut">
               <a:rPr lang="en-GB" smtClean="0"/>
-              <a:t>06/11/2025</a:t>
+              <a:t>10/11/2025</a:t>
             </a:fld>
             <a:endParaRPr lang="en-GB"/>
           </a:p>
@@ -1419,7 +1419,7 @@
           <a:p>
             <a:fld id="{6487BBF2-5813-4A92-ADF4-45C081C37504}" type="datetimeFigureOut">
               <a:rPr lang="en-GB" smtClean="0"/>
-              <a:t>06/11/2025</a:t>
+              <a:t>10/11/2025</a:t>
             </a:fld>
             <a:endParaRPr lang="en-GB"/>
           </a:p>
@@ -1834,7 +1834,7 @@
           <a:p>
             <a:fld id="{6487BBF2-5813-4A92-ADF4-45C081C37504}" type="datetimeFigureOut">
               <a:rPr lang="en-GB" smtClean="0"/>
-              <a:t>06/11/2025</a:t>
+              <a:t>10/11/2025</a:t>
             </a:fld>
             <a:endParaRPr lang="en-GB"/>
           </a:p>
@@ -1976,7 +1976,7 @@
           <a:p>
             <a:fld id="{6487BBF2-5813-4A92-ADF4-45C081C37504}" type="datetimeFigureOut">
               <a:rPr lang="en-GB" smtClean="0"/>
-              <a:t>06/11/2025</a:t>
+              <a:t>10/11/2025</a:t>
             </a:fld>
             <a:endParaRPr lang="en-GB"/>
           </a:p>
@@ -2089,7 +2089,7 @@
           <a:p>
             <a:fld id="{6487BBF2-5813-4A92-ADF4-45C081C37504}" type="datetimeFigureOut">
               <a:rPr lang="en-GB" smtClean="0"/>
-              <a:t>06/11/2025</a:t>
+              <a:t>10/11/2025</a:t>
             </a:fld>
             <a:endParaRPr lang="en-GB"/>
           </a:p>
@@ -2402,7 +2402,7 @@
           <a:p>
             <a:fld id="{6487BBF2-5813-4A92-ADF4-45C081C37504}" type="datetimeFigureOut">
               <a:rPr lang="en-GB" smtClean="0"/>
-              <a:t>06/11/2025</a:t>
+              <a:t>10/11/2025</a:t>
             </a:fld>
             <a:endParaRPr lang="en-GB"/>
           </a:p>
@@ -2691,7 +2691,7 @@
           <a:p>
             <a:fld id="{6487BBF2-5813-4A92-ADF4-45C081C37504}" type="datetimeFigureOut">
               <a:rPr lang="en-GB" smtClean="0"/>
-              <a:t>06/11/2025</a:t>
+              <a:t>10/11/2025</a:t>
             </a:fld>
             <a:endParaRPr lang="en-GB"/>
           </a:p>
@@ -2934,7 +2934,7 @@
           <a:p>
             <a:fld id="{6487BBF2-5813-4A92-ADF4-45C081C37504}" type="datetimeFigureOut">
               <a:rPr lang="en-GB" smtClean="0"/>
-              <a:t>06/11/2025</a:t>
+              <a:t>10/11/2025</a:t>
             </a:fld>
             <a:endParaRPr lang="en-GB"/>
           </a:p>
@@ -19381,8 +19381,8 @@
           </p:nvSpPr>
           <p:spPr>
             <a:xfrm>
-              <a:off x="3628384" y="1236834"/>
-              <a:ext cx="351378" cy="523220"/>
+              <a:off x="3628383" y="1236835"/>
+              <a:ext cx="351378" cy="559030"/>
             </a:xfrm>
             <a:prstGeom prst="rect">
               <a:avLst/>
@@ -19401,7 +19401,7 @@
                     <a:schemeClr val="accent1"/>
                   </a:solidFill>
                 </a:rPr>
-                <a:t>?</a:t>
+                <a:t>1</a:t>
               </a:r>
             </a:p>
           </p:txBody>
@@ -20689,7 +20689,7 @@
         <p:spPr>
           <a:xfrm>
             <a:off x="9521105" y="1014105"/>
-            <a:ext cx="293224" cy="489704"/>
+            <a:ext cx="293224" cy="523220"/>
           </a:xfrm>
           <a:prstGeom prst="rect">
             <a:avLst/>
@@ -20708,7 +20708,7 @@
                   <a:schemeClr val="accent1"/>
                 </a:solidFill>
               </a:rPr>
-              <a:t>?</a:t>
+              <a:t>1</a:t>
             </a:r>
           </a:p>
         </p:txBody>
